--- a/Admin/_Documents/Docs.pptx
+++ b/Admin/_Documents/Docs.pptx
@@ -3500,7 +3500,7 @@
         </p:nvSpPr>
         <p:spPr>
           <a:xfrm>
-            <a:off x="5917007" y="1438607"/>
+            <a:off x="5917007" y="1859952"/>
             <a:ext cx="2333296" cy="735726"/>
           </a:xfrm>
           <a:prstGeom prst="roundRect">
@@ -3563,7 +3563,7 @@
         </p:nvSpPr>
         <p:spPr>
           <a:xfrm>
-            <a:off x="5917007" y="2488325"/>
+            <a:off x="5917007" y="2909670"/>
             <a:ext cx="2333296" cy="735726"/>
           </a:xfrm>
           <a:prstGeom prst="roundRect">
@@ -3626,7 +3626,7 @@
         </p:nvSpPr>
         <p:spPr>
           <a:xfrm>
-            <a:off x="5917007" y="3429000"/>
+            <a:off x="5917007" y="3850345"/>
             <a:ext cx="2333296" cy="735726"/>
           </a:xfrm>
           <a:prstGeom prst="roundRect">
@@ -3858,8 +3858,8 @@
         </p:nvCxnSpPr>
         <p:spPr>
           <a:xfrm flipV="1">
-            <a:off x="3016469" y="1806470"/>
-            <a:ext cx="2900538" cy="4037282"/>
+            <a:off x="3016469" y="2227815"/>
+            <a:ext cx="2900538" cy="3615937"/>
           </a:xfrm>
           <a:prstGeom prst="straightConnector1">
             <a:avLst/>
@@ -3900,8 +3900,8 @@
         </p:nvCxnSpPr>
         <p:spPr>
           <a:xfrm flipV="1">
-            <a:off x="3016469" y="2856188"/>
-            <a:ext cx="2900538" cy="2987564"/>
+            <a:off x="3016469" y="3277533"/>
+            <a:ext cx="2900538" cy="2566219"/>
           </a:xfrm>
           <a:prstGeom prst="straightConnector1">
             <a:avLst/>
@@ -3942,8 +3942,8 @@
         </p:nvCxnSpPr>
         <p:spPr>
           <a:xfrm flipV="1">
-            <a:off x="3016469" y="3796863"/>
-            <a:ext cx="2900538" cy="2046889"/>
+            <a:off x="3016469" y="4218208"/>
+            <a:ext cx="2900538" cy="1625544"/>
           </a:xfrm>
           <a:prstGeom prst="straightConnector1">
             <a:avLst/>
@@ -4511,7 +4511,7 @@
         </p:nvSpPr>
         <p:spPr>
           <a:xfrm>
-            <a:off x="8366234" y="1597572"/>
+            <a:off x="8366234" y="2018917"/>
             <a:ext cx="325501" cy="2354318"/>
           </a:xfrm>
           <a:prstGeom prst="rightBrace">
@@ -4557,7 +4557,7 @@
         </p:nvCxnSpPr>
         <p:spPr>
           <a:xfrm flipV="1">
-            <a:off x="8691735" y="1618593"/>
+            <a:off x="8691735" y="2039938"/>
             <a:ext cx="1976265" cy="1156138"/>
           </a:xfrm>
           <a:prstGeom prst="straightConnector1">

--- a/Admin/_Documents/Docs.pptx
+++ b/Admin/_Documents/Docs.pptx
@@ -6,40 +6,42 @@
   </p:sldMasterIdLst>
   <p:sldIdLst>
     <p:sldId id="290" r:id="rId2"/>
-    <p:sldId id="262" r:id="rId3"/>
-    <p:sldId id="263" r:id="rId4"/>
-    <p:sldId id="268" r:id="rId5"/>
-    <p:sldId id="264" r:id="rId6"/>
-    <p:sldId id="267" r:id="rId7"/>
-    <p:sldId id="266" r:id="rId8"/>
-    <p:sldId id="269" r:id="rId9"/>
-    <p:sldId id="273" r:id="rId10"/>
-    <p:sldId id="274" r:id="rId11"/>
-    <p:sldId id="279" r:id="rId12"/>
-    <p:sldId id="282" r:id="rId13"/>
-    <p:sldId id="275" r:id="rId14"/>
-    <p:sldId id="281" r:id="rId15"/>
-    <p:sldId id="272" r:id="rId16"/>
-    <p:sldId id="276" r:id="rId17"/>
-    <p:sldId id="278" r:id="rId18"/>
-    <p:sldId id="270" r:id="rId19"/>
-    <p:sldId id="271" r:id="rId20"/>
-    <p:sldId id="280" r:id="rId21"/>
-    <p:sldId id="277" r:id="rId22"/>
-    <p:sldId id="256" r:id="rId23"/>
-    <p:sldId id="257" r:id="rId24"/>
-    <p:sldId id="258" r:id="rId25"/>
-    <p:sldId id="259" r:id="rId26"/>
-    <p:sldId id="260" r:id="rId27"/>
-    <p:sldId id="261" r:id="rId28"/>
-    <p:sldId id="265" r:id="rId29"/>
-    <p:sldId id="283" r:id="rId30"/>
-    <p:sldId id="284" r:id="rId31"/>
-    <p:sldId id="285" r:id="rId32"/>
-    <p:sldId id="286" r:id="rId33"/>
-    <p:sldId id="287" r:id="rId34"/>
-    <p:sldId id="288" r:id="rId35"/>
-    <p:sldId id="289" r:id="rId36"/>
+    <p:sldId id="291" r:id="rId3"/>
+    <p:sldId id="292" r:id="rId4"/>
+    <p:sldId id="262" r:id="rId5"/>
+    <p:sldId id="263" r:id="rId6"/>
+    <p:sldId id="268" r:id="rId7"/>
+    <p:sldId id="264" r:id="rId8"/>
+    <p:sldId id="267" r:id="rId9"/>
+    <p:sldId id="266" r:id="rId10"/>
+    <p:sldId id="269" r:id="rId11"/>
+    <p:sldId id="273" r:id="rId12"/>
+    <p:sldId id="274" r:id="rId13"/>
+    <p:sldId id="279" r:id="rId14"/>
+    <p:sldId id="282" r:id="rId15"/>
+    <p:sldId id="275" r:id="rId16"/>
+    <p:sldId id="281" r:id="rId17"/>
+    <p:sldId id="272" r:id="rId18"/>
+    <p:sldId id="276" r:id="rId19"/>
+    <p:sldId id="278" r:id="rId20"/>
+    <p:sldId id="270" r:id="rId21"/>
+    <p:sldId id="271" r:id="rId22"/>
+    <p:sldId id="280" r:id="rId23"/>
+    <p:sldId id="277" r:id="rId24"/>
+    <p:sldId id="256" r:id="rId25"/>
+    <p:sldId id="257" r:id="rId26"/>
+    <p:sldId id="258" r:id="rId27"/>
+    <p:sldId id="259" r:id="rId28"/>
+    <p:sldId id="260" r:id="rId29"/>
+    <p:sldId id="261" r:id="rId30"/>
+    <p:sldId id="265" r:id="rId31"/>
+    <p:sldId id="283" r:id="rId32"/>
+    <p:sldId id="284" r:id="rId33"/>
+    <p:sldId id="285" r:id="rId34"/>
+    <p:sldId id="286" r:id="rId35"/>
+    <p:sldId id="287" r:id="rId36"/>
+    <p:sldId id="288" r:id="rId37"/>
+    <p:sldId id="289" r:id="rId38"/>
   </p:sldIdLst>
   <p:sldSz cx="12192000" cy="6858000"/>
   <p:notesSz cx="6858000" cy="9144000"/>
@@ -293,7 +295,7 @@
           <a:p>
             <a:fld id="{5AD74501-8691-4646-B472-1139202FB98B}" type="datetimeFigureOut">
               <a:rPr lang="en-US" smtClean="0"/>
-              <a:t>7/29/2026</a:t>
+              <a:t>8/2/2026</a:t>
             </a:fld>
             <a:endParaRPr lang="en-US"/>
           </a:p>
@@ -491,7 +493,7 @@
           <a:p>
             <a:fld id="{5AD74501-8691-4646-B472-1139202FB98B}" type="datetimeFigureOut">
               <a:rPr lang="en-US" smtClean="0"/>
-              <a:t>7/29/2026</a:t>
+              <a:t>8/2/2026</a:t>
             </a:fld>
             <a:endParaRPr lang="en-US"/>
           </a:p>
@@ -699,7 +701,7 @@
           <a:p>
             <a:fld id="{5AD74501-8691-4646-B472-1139202FB98B}" type="datetimeFigureOut">
               <a:rPr lang="en-US" smtClean="0"/>
-              <a:t>7/29/2026</a:t>
+              <a:t>8/2/2026</a:t>
             </a:fld>
             <a:endParaRPr lang="en-US"/>
           </a:p>
@@ -897,7 +899,7 @@
           <a:p>
             <a:fld id="{5AD74501-8691-4646-B472-1139202FB98B}" type="datetimeFigureOut">
               <a:rPr lang="en-US" smtClean="0"/>
-              <a:t>7/29/2026</a:t>
+              <a:t>8/2/2026</a:t>
             </a:fld>
             <a:endParaRPr lang="en-US"/>
           </a:p>
@@ -1172,7 +1174,7 @@
           <a:p>
             <a:fld id="{5AD74501-8691-4646-B472-1139202FB98B}" type="datetimeFigureOut">
               <a:rPr lang="en-US" smtClean="0"/>
-              <a:t>7/29/2026</a:t>
+              <a:t>8/2/2026</a:t>
             </a:fld>
             <a:endParaRPr lang="en-US"/>
           </a:p>
@@ -1437,7 +1439,7 @@
           <a:p>
             <a:fld id="{5AD74501-8691-4646-B472-1139202FB98B}" type="datetimeFigureOut">
               <a:rPr lang="en-US" smtClean="0"/>
-              <a:t>7/29/2026</a:t>
+              <a:t>8/2/2026</a:t>
             </a:fld>
             <a:endParaRPr lang="en-US"/>
           </a:p>
@@ -1849,7 +1851,7 @@
           <a:p>
             <a:fld id="{5AD74501-8691-4646-B472-1139202FB98B}" type="datetimeFigureOut">
               <a:rPr lang="en-US" smtClean="0"/>
-              <a:t>7/29/2026</a:t>
+              <a:t>8/2/2026</a:t>
             </a:fld>
             <a:endParaRPr lang="en-US"/>
           </a:p>
@@ -1990,7 +1992,7 @@
           <a:p>
             <a:fld id="{5AD74501-8691-4646-B472-1139202FB98B}" type="datetimeFigureOut">
               <a:rPr lang="en-US" smtClean="0"/>
-              <a:t>7/29/2026</a:t>
+              <a:t>8/2/2026</a:t>
             </a:fld>
             <a:endParaRPr lang="en-US"/>
           </a:p>
@@ -2103,7 +2105,7 @@
           <a:p>
             <a:fld id="{5AD74501-8691-4646-B472-1139202FB98B}" type="datetimeFigureOut">
               <a:rPr lang="en-US" smtClean="0"/>
-              <a:t>7/29/2026</a:t>
+              <a:t>8/2/2026</a:t>
             </a:fld>
             <a:endParaRPr lang="en-US"/>
           </a:p>
@@ -2414,7 +2416,7 @@
           <a:p>
             <a:fld id="{5AD74501-8691-4646-B472-1139202FB98B}" type="datetimeFigureOut">
               <a:rPr lang="en-US" smtClean="0"/>
-              <a:t>7/29/2026</a:t>
+              <a:t>8/2/2026</a:t>
             </a:fld>
             <a:endParaRPr lang="en-US"/>
           </a:p>
@@ -2702,7 +2704,7 @@
           <a:p>
             <a:fld id="{5AD74501-8691-4646-B472-1139202FB98B}" type="datetimeFigureOut">
               <a:rPr lang="en-US" smtClean="0"/>
-              <a:t>7/29/2026</a:t>
+              <a:t>8/2/2026</a:t>
             </a:fld>
             <a:endParaRPr lang="en-US"/>
           </a:p>
@@ -2943,7 +2945,7 @@
           <a:p>
             <a:fld id="{5AD74501-8691-4646-B472-1139202FB98B}" type="datetimeFigureOut">
               <a:rPr lang="en-US" smtClean="0"/>
-              <a:t>7/29/2026</a:t>
+              <a:t>8/2/2026</a:t>
             </a:fld>
             <a:endParaRPr lang="en-US"/>
           </a:p>
@@ -4687,6 +4689,598 @@
         <p:cNvPr id="1" name="">
           <a:extLst>
             <a:ext uri="{FF2B5EF4-FFF2-40B4-BE49-F238E27FC236}">
+              <a16:creationId xmlns:a16="http://schemas.microsoft.com/office/drawing/2014/main" id="{5B36EA00-395F-4F04-189F-D4DFD2699091}"/>
+            </a:ext>
+          </a:extLst>
+        </p:cNvPr>
+        <p:cNvGrpSpPr/>
+        <p:nvPr/>
+      </p:nvGrpSpPr>
+      <p:grpSpPr>
+        <a:xfrm>
+          <a:off x="0" y="0"/>
+          <a:ext cx="0" cy="0"/>
+          <a:chOff x="0" y="0"/>
+          <a:chExt cx="0" cy="0"/>
+        </a:xfrm>
+      </p:grpSpPr>
+      <p:grpSp>
+        <p:nvGrpSpPr>
+          <p:cNvPr id="3" name="Group 2">
+            <a:extLst>
+              <a:ext uri="{FF2B5EF4-FFF2-40B4-BE49-F238E27FC236}">
+                <a16:creationId xmlns:a16="http://schemas.microsoft.com/office/drawing/2014/main" id="{154373E5-8028-72A9-9F42-FEABA5A247A7}"/>
+              </a:ext>
+            </a:extLst>
+          </p:cNvPr>
+          <p:cNvGrpSpPr/>
+          <p:nvPr/>
+        </p:nvGrpSpPr>
+        <p:grpSpPr>
+          <a:xfrm>
+            <a:off x="3003618" y="72185"/>
+            <a:ext cx="7229139" cy="6709406"/>
+            <a:chOff x="3003618" y="72185"/>
+            <a:chExt cx="7229139" cy="6709406"/>
+          </a:xfrm>
+        </p:grpSpPr>
+        <p:sp>
+          <p:nvSpPr>
+            <p:cNvPr id="2" name="Freeform: Shape 1">
+              <a:extLst>
+                <a:ext uri="{FF2B5EF4-FFF2-40B4-BE49-F238E27FC236}">
+                  <a16:creationId xmlns:a16="http://schemas.microsoft.com/office/drawing/2014/main" id="{86178146-9F13-C930-0D6C-0906244F2958}"/>
+                </a:ext>
+              </a:extLst>
+            </p:cNvPr>
+            <p:cNvSpPr/>
+            <p:nvPr/>
+          </p:nvSpPr>
+          <p:spPr>
+            <a:xfrm>
+              <a:off x="3003618" y="552917"/>
+              <a:ext cx="7229138" cy="6228674"/>
+            </a:xfrm>
+            <a:custGeom>
+              <a:avLst/>
+              <a:gdLst>
+                <a:gd name="csX0" fmla="*/ -1 w 7229138"/>
+                <a:gd name="csY0" fmla="*/ 3114376 h 6228674"/>
+                <a:gd name="csX1" fmla="*/ 3614568 w 7229138"/>
+                <a:gd name="csY1" fmla="*/ 40 h 6228674"/>
+                <a:gd name="csX2" fmla="*/ 7229137 w 7229138"/>
+                <a:gd name="csY2" fmla="*/ 3114376 h 6228674"/>
+                <a:gd name="csX3" fmla="*/ 3614568 w 7229138"/>
+                <a:gd name="csY3" fmla="*/ 6228715 h 6228674"/>
+                <a:gd name="csX4" fmla="*/ -1 w 7229138"/>
+                <a:gd name="csY4" fmla="*/ 3114376 h 6228674"/>
+              </a:gdLst>
+              <a:ahLst/>
+              <a:cxnLst>
+                <a:cxn ang="0">
+                  <a:pos x="csX0" y="csY0"/>
+                </a:cxn>
+                <a:cxn ang="0">
+                  <a:pos x="csX1" y="csY1"/>
+                </a:cxn>
+                <a:cxn ang="0">
+                  <a:pos x="csX2" y="csY2"/>
+                </a:cxn>
+                <a:cxn ang="0">
+                  <a:pos x="csX3" y="csY3"/>
+                </a:cxn>
+                <a:cxn ang="0">
+                  <a:pos x="csX4" y="csY4"/>
+                </a:cxn>
+              </a:cxnLst>
+              <a:rect l="l" t="t" r="r" b="b"/>
+              <a:pathLst>
+                <a:path w="7229138" h="6228674">
+                  <a:moveTo>
+                    <a:pt x="-1" y="3114376"/>
+                  </a:moveTo>
+                  <a:cubicBezTo>
+                    <a:pt x="-1" y="1394373"/>
+                    <a:pt x="1618301" y="40"/>
+                    <a:pt x="3614568" y="40"/>
+                  </a:cubicBezTo>
+                  <a:cubicBezTo>
+                    <a:pt x="5610843" y="40"/>
+                    <a:pt x="7229137" y="1394373"/>
+                    <a:pt x="7229137" y="3114376"/>
+                  </a:cubicBezTo>
+                  <a:cubicBezTo>
+                    <a:pt x="7229137" y="4834378"/>
+                    <a:pt x="5610843" y="6228715"/>
+                    <a:pt x="3614568" y="6228715"/>
+                  </a:cubicBezTo>
+                  <a:cubicBezTo>
+                    <a:pt x="1618301" y="6228715"/>
+                    <a:pt x="-1" y="4834378"/>
+                    <a:pt x="-1" y="3114376"/>
+                  </a:cubicBezTo>
+                  <a:close/>
+                </a:path>
+              </a:pathLst>
+            </a:custGeom>
+            <a:solidFill>
+              <a:srgbClr val="4472C4">
+                <a:alpha val="15000"/>
+              </a:srgbClr>
+            </a:solidFill>
+            <a:ln w="8067" cap="flat">
+              <a:noFill/>
+              <a:prstDash val="solid"/>
+              <a:miter/>
+            </a:ln>
+          </p:spPr>
+          <p:txBody>
+            <a:bodyPr/>
+            <a:lstStyle/>
+            <a:p>
+              <a:endParaRPr lang="en-US"/>
+            </a:p>
+          </p:txBody>
+        </p:sp>
+        <p:sp>
+          <p:nvSpPr>
+            <p:cNvPr id="9" name="Freeform: Shape 8">
+              <a:extLst>
+                <a:ext uri="{FF2B5EF4-FFF2-40B4-BE49-F238E27FC236}">
+                  <a16:creationId xmlns:a16="http://schemas.microsoft.com/office/drawing/2014/main" id="{E8D2A8E2-C8DB-4C1D-D5C1-19E1AC8B81BD}"/>
+                </a:ext>
+              </a:extLst>
+            </p:cNvPr>
+            <p:cNvSpPr/>
+            <p:nvPr/>
+          </p:nvSpPr>
+          <p:spPr>
+            <a:xfrm>
+              <a:off x="3003618" y="72185"/>
+              <a:ext cx="7229139" cy="6228677"/>
+            </a:xfrm>
+            <a:custGeom>
+              <a:avLst/>
+              <a:gdLst>
+                <a:gd name="csX0" fmla="*/ -1371 w 7229139"/>
+                <a:gd name="csY0" fmla="*/ 3112940 h 6228677"/>
+                <a:gd name="csX1" fmla="*/ 3613199 w 7229139"/>
+                <a:gd name="csY1" fmla="*/ -1399 h 6228677"/>
+                <a:gd name="csX2" fmla="*/ 7227768 w 7229139"/>
+                <a:gd name="csY2" fmla="*/ 3112940 h 6228677"/>
+                <a:gd name="csX3" fmla="*/ 3613199 w 7229139"/>
+                <a:gd name="csY3" fmla="*/ 6227279 h 6228677"/>
+                <a:gd name="csX4" fmla="*/ -1371 w 7229139"/>
+                <a:gd name="csY4" fmla="*/ 3112940 h 6228677"/>
+              </a:gdLst>
+              <a:ahLst/>
+              <a:cxnLst>
+                <a:cxn ang="0">
+                  <a:pos x="csX0" y="csY0"/>
+                </a:cxn>
+                <a:cxn ang="0">
+                  <a:pos x="csX1" y="csY1"/>
+                </a:cxn>
+                <a:cxn ang="0">
+                  <a:pos x="csX2" y="csY2"/>
+                </a:cxn>
+                <a:cxn ang="0">
+                  <a:pos x="csX3" y="csY3"/>
+                </a:cxn>
+                <a:cxn ang="0">
+                  <a:pos x="csX4" y="csY4"/>
+                </a:cxn>
+              </a:cxnLst>
+              <a:rect l="l" t="t" r="r" b="b"/>
+              <a:pathLst>
+                <a:path w="7229139" h="6228677">
+                  <a:moveTo>
+                    <a:pt x="-1371" y="3112940"/>
+                  </a:moveTo>
+                  <a:cubicBezTo>
+                    <a:pt x="-1371" y="1392953"/>
+                    <a:pt x="1616955" y="-1399"/>
+                    <a:pt x="3613199" y="-1399"/>
+                  </a:cubicBezTo>
+                  <a:cubicBezTo>
+                    <a:pt x="5609441" y="-1399"/>
+                    <a:pt x="7227768" y="1392953"/>
+                    <a:pt x="7227768" y="3112940"/>
+                  </a:cubicBezTo>
+                  <a:cubicBezTo>
+                    <a:pt x="7227768" y="4832927"/>
+                    <a:pt x="5609441" y="6227279"/>
+                    <a:pt x="3613199" y="6227279"/>
+                  </a:cubicBezTo>
+                  <a:cubicBezTo>
+                    <a:pt x="1616955" y="6227279"/>
+                    <a:pt x="-1371" y="4832927"/>
+                    <a:pt x="-1371" y="3112940"/>
+                  </a:cubicBezTo>
+                  <a:close/>
+                </a:path>
+              </a:pathLst>
+            </a:custGeom>
+            <a:solidFill>
+              <a:srgbClr val="4472C4">
+                <a:alpha val="15000"/>
+              </a:srgbClr>
+            </a:solidFill>
+            <a:ln w="8067" cap="flat">
+              <a:noFill/>
+              <a:prstDash val="solid"/>
+              <a:miter/>
+            </a:ln>
+          </p:spPr>
+          <p:txBody>
+            <a:bodyPr/>
+            <a:lstStyle/>
+            <a:p>
+              <a:endParaRPr lang="en-US"/>
+            </a:p>
+          </p:txBody>
+        </p:sp>
+        <p:pic>
+          <p:nvPicPr>
+            <p:cNvPr id="13" name="Graphic 12" descr="Box trolley outline">
+              <a:extLst>
+                <a:ext uri="{FF2B5EF4-FFF2-40B4-BE49-F238E27FC236}">
+                  <a16:creationId xmlns:a16="http://schemas.microsoft.com/office/drawing/2014/main" id="{7275BC7D-87F6-AB21-BA6B-E5CE9EE95F81}"/>
+                </a:ext>
+              </a:extLst>
+            </p:cNvPr>
+            <p:cNvPicPr>
+              <a:picLocks noChangeAspect="1"/>
+            </p:cNvPicPr>
+            <p:nvPr/>
+          </p:nvPicPr>
+          <p:blipFill>
+            <a:blip>
+              <a:extLst>
+                <a:ext uri="{96DAC541-7B7A-43D3-8B79-37D633B846F1}">
+                  <asvg:svgBlip xmlns:asvg="http://schemas.microsoft.com/office/drawing/2016/SVG/main" r:embed="rId2"/>
+                </a:ext>
+              </a:extLst>
+            </a:blip>
+            <a:stretch>
+              <a:fillRect/>
+            </a:stretch>
+          </p:blipFill>
+          <p:spPr>
+            <a:xfrm>
+              <a:off x="4103587" y="914400"/>
+              <a:ext cx="5029200" cy="5029200"/>
+            </a:xfrm>
+            <a:prstGeom prst="rect">
+              <a:avLst/>
+            </a:prstGeom>
+            <a:effectLst>
+              <a:outerShdw blurRad="50800" dist="127000" dir="2700000" algn="tl" rotWithShape="0">
+                <a:schemeClr val="accent1">
+                  <a:alpha val="40000"/>
+                </a:schemeClr>
+              </a:outerShdw>
+            </a:effectLst>
+          </p:spPr>
+        </p:pic>
+      </p:grpSp>
+    </p:spTree>
+    <p:extLst>
+      <p:ext uri="{BB962C8B-B14F-4D97-AF65-F5344CB8AC3E}">
+        <p14:creationId xmlns:p14="http://schemas.microsoft.com/office/powerpoint/2010/main" val="2230716222"/>
+      </p:ext>
+    </p:extLst>
+  </p:cSld>
+  <p:clrMapOvr>
+    <a:masterClrMapping/>
+  </p:clrMapOvr>
+</p:sld>
+</file>
+
+<file path=ppt/slides/slide11.xml><?xml version="1.0" encoding="utf-8"?>
+<p:sld xmlns:a="http://schemas.openxmlformats.org/drawingml/2006/main" xmlns:r="http://schemas.openxmlformats.org/officeDocument/2006/relationships" xmlns:p="http://schemas.openxmlformats.org/presentationml/2006/main">
+  <p:cSld>
+    <p:spTree>
+      <p:nvGrpSpPr>
+        <p:cNvPr id="1" name="">
+          <a:extLst>
+            <a:ext uri="{FF2B5EF4-FFF2-40B4-BE49-F238E27FC236}">
+              <a16:creationId xmlns:a16="http://schemas.microsoft.com/office/drawing/2014/main" id="{C28D913F-6FA5-4064-46CB-41445AA4059F}"/>
+            </a:ext>
+          </a:extLst>
+        </p:cNvPr>
+        <p:cNvGrpSpPr/>
+        <p:nvPr/>
+      </p:nvGrpSpPr>
+      <p:grpSpPr>
+        <a:xfrm>
+          <a:off x="0" y="0"/>
+          <a:ext cx="0" cy="0"/>
+          <a:chOff x="0" y="0"/>
+          <a:chExt cx="0" cy="0"/>
+        </a:xfrm>
+      </p:grpSpPr>
+      <p:grpSp>
+        <p:nvGrpSpPr>
+          <p:cNvPr id="3" name="Group 2">
+            <a:extLst>
+              <a:ext uri="{FF2B5EF4-FFF2-40B4-BE49-F238E27FC236}">
+                <a16:creationId xmlns:a16="http://schemas.microsoft.com/office/drawing/2014/main" id="{36527995-6817-3479-3DFD-73E5C1B25655}"/>
+              </a:ext>
+            </a:extLst>
+          </p:cNvPr>
+          <p:cNvGrpSpPr/>
+          <p:nvPr/>
+        </p:nvGrpSpPr>
+        <p:grpSpPr>
+          <a:xfrm>
+            <a:off x="3003618" y="72185"/>
+            <a:ext cx="7229139" cy="6709406"/>
+            <a:chOff x="3003618" y="72185"/>
+            <a:chExt cx="7229139" cy="6709406"/>
+          </a:xfrm>
+        </p:grpSpPr>
+        <p:sp>
+          <p:nvSpPr>
+            <p:cNvPr id="2" name="Freeform: Shape 1">
+              <a:extLst>
+                <a:ext uri="{FF2B5EF4-FFF2-40B4-BE49-F238E27FC236}">
+                  <a16:creationId xmlns:a16="http://schemas.microsoft.com/office/drawing/2014/main" id="{2059E4C9-AE06-C2EC-EE01-65CAD14BDA93}"/>
+                </a:ext>
+              </a:extLst>
+            </p:cNvPr>
+            <p:cNvSpPr/>
+            <p:nvPr/>
+          </p:nvSpPr>
+          <p:spPr>
+            <a:xfrm>
+              <a:off x="3003618" y="552917"/>
+              <a:ext cx="7229138" cy="6228674"/>
+            </a:xfrm>
+            <a:custGeom>
+              <a:avLst/>
+              <a:gdLst>
+                <a:gd name="csX0" fmla="*/ -1 w 7229138"/>
+                <a:gd name="csY0" fmla="*/ 3114376 h 6228674"/>
+                <a:gd name="csX1" fmla="*/ 3614568 w 7229138"/>
+                <a:gd name="csY1" fmla="*/ 40 h 6228674"/>
+                <a:gd name="csX2" fmla="*/ 7229137 w 7229138"/>
+                <a:gd name="csY2" fmla="*/ 3114376 h 6228674"/>
+                <a:gd name="csX3" fmla="*/ 3614568 w 7229138"/>
+                <a:gd name="csY3" fmla="*/ 6228715 h 6228674"/>
+                <a:gd name="csX4" fmla="*/ -1 w 7229138"/>
+                <a:gd name="csY4" fmla="*/ 3114376 h 6228674"/>
+              </a:gdLst>
+              <a:ahLst/>
+              <a:cxnLst>
+                <a:cxn ang="0">
+                  <a:pos x="csX0" y="csY0"/>
+                </a:cxn>
+                <a:cxn ang="0">
+                  <a:pos x="csX1" y="csY1"/>
+                </a:cxn>
+                <a:cxn ang="0">
+                  <a:pos x="csX2" y="csY2"/>
+                </a:cxn>
+                <a:cxn ang="0">
+                  <a:pos x="csX3" y="csY3"/>
+                </a:cxn>
+                <a:cxn ang="0">
+                  <a:pos x="csX4" y="csY4"/>
+                </a:cxn>
+              </a:cxnLst>
+              <a:rect l="l" t="t" r="r" b="b"/>
+              <a:pathLst>
+                <a:path w="7229138" h="6228674">
+                  <a:moveTo>
+                    <a:pt x="-1" y="3114376"/>
+                  </a:moveTo>
+                  <a:cubicBezTo>
+                    <a:pt x="-1" y="1394373"/>
+                    <a:pt x="1618301" y="40"/>
+                    <a:pt x="3614568" y="40"/>
+                  </a:cubicBezTo>
+                  <a:cubicBezTo>
+                    <a:pt x="5610843" y="40"/>
+                    <a:pt x="7229137" y="1394373"/>
+                    <a:pt x="7229137" y="3114376"/>
+                  </a:cubicBezTo>
+                  <a:cubicBezTo>
+                    <a:pt x="7229137" y="4834378"/>
+                    <a:pt x="5610843" y="6228715"/>
+                    <a:pt x="3614568" y="6228715"/>
+                  </a:cubicBezTo>
+                  <a:cubicBezTo>
+                    <a:pt x="1618301" y="6228715"/>
+                    <a:pt x="-1" y="4834378"/>
+                    <a:pt x="-1" y="3114376"/>
+                  </a:cubicBezTo>
+                  <a:close/>
+                </a:path>
+              </a:pathLst>
+            </a:custGeom>
+            <a:solidFill>
+              <a:srgbClr val="4472C4">
+                <a:alpha val="15000"/>
+              </a:srgbClr>
+            </a:solidFill>
+            <a:ln w="8067" cap="flat">
+              <a:noFill/>
+              <a:prstDash val="solid"/>
+              <a:miter/>
+            </a:ln>
+          </p:spPr>
+          <p:txBody>
+            <a:bodyPr/>
+            <a:lstStyle/>
+            <a:p>
+              <a:endParaRPr lang="en-US"/>
+            </a:p>
+          </p:txBody>
+        </p:sp>
+        <p:sp>
+          <p:nvSpPr>
+            <p:cNvPr id="9" name="Freeform: Shape 8">
+              <a:extLst>
+                <a:ext uri="{FF2B5EF4-FFF2-40B4-BE49-F238E27FC236}">
+                  <a16:creationId xmlns:a16="http://schemas.microsoft.com/office/drawing/2014/main" id="{DF82AC9D-6D4C-795E-455F-E89F2575BEEF}"/>
+                </a:ext>
+              </a:extLst>
+            </p:cNvPr>
+            <p:cNvSpPr/>
+            <p:nvPr/>
+          </p:nvSpPr>
+          <p:spPr>
+            <a:xfrm>
+              <a:off x="3003618" y="72185"/>
+              <a:ext cx="7229139" cy="6228677"/>
+            </a:xfrm>
+            <a:custGeom>
+              <a:avLst/>
+              <a:gdLst>
+                <a:gd name="csX0" fmla="*/ -1371 w 7229139"/>
+                <a:gd name="csY0" fmla="*/ 3112940 h 6228677"/>
+                <a:gd name="csX1" fmla="*/ 3613199 w 7229139"/>
+                <a:gd name="csY1" fmla="*/ -1399 h 6228677"/>
+                <a:gd name="csX2" fmla="*/ 7227768 w 7229139"/>
+                <a:gd name="csY2" fmla="*/ 3112940 h 6228677"/>
+                <a:gd name="csX3" fmla="*/ 3613199 w 7229139"/>
+                <a:gd name="csY3" fmla="*/ 6227279 h 6228677"/>
+                <a:gd name="csX4" fmla="*/ -1371 w 7229139"/>
+                <a:gd name="csY4" fmla="*/ 3112940 h 6228677"/>
+              </a:gdLst>
+              <a:ahLst/>
+              <a:cxnLst>
+                <a:cxn ang="0">
+                  <a:pos x="csX0" y="csY0"/>
+                </a:cxn>
+                <a:cxn ang="0">
+                  <a:pos x="csX1" y="csY1"/>
+                </a:cxn>
+                <a:cxn ang="0">
+                  <a:pos x="csX2" y="csY2"/>
+                </a:cxn>
+                <a:cxn ang="0">
+                  <a:pos x="csX3" y="csY3"/>
+                </a:cxn>
+                <a:cxn ang="0">
+                  <a:pos x="csX4" y="csY4"/>
+                </a:cxn>
+              </a:cxnLst>
+              <a:rect l="l" t="t" r="r" b="b"/>
+              <a:pathLst>
+                <a:path w="7229139" h="6228677">
+                  <a:moveTo>
+                    <a:pt x="-1371" y="3112940"/>
+                  </a:moveTo>
+                  <a:cubicBezTo>
+                    <a:pt x="-1371" y="1392953"/>
+                    <a:pt x="1616955" y="-1399"/>
+                    <a:pt x="3613199" y="-1399"/>
+                  </a:cubicBezTo>
+                  <a:cubicBezTo>
+                    <a:pt x="5609441" y="-1399"/>
+                    <a:pt x="7227768" y="1392953"/>
+                    <a:pt x="7227768" y="3112940"/>
+                  </a:cubicBezTo>
+                  <a:cubicBezTo>
+                    <a:pt x="7227768" y="4832927"/>
+                    <a:pt x="5609441" y="6227279"/>
+                    <a:pt x="3613199" y="6227279"/>
+                  </a:cubicBezTo>
+                  <a:cubicBezTo>
+                    <a:pt x="1616955" y="6227279"/>
+                    <a:pt x="-1371" y="4832927"/>
+                    <a:pt x="-1371" y="3112940"/>
+                  </a:cubicBezTo>
+                  <a:close/>
+                </a:path>
+              </a:pathLst>
+            </a:custGeom>
+            <a:solidFill>
+              <a:srgbClr val="4472C4">
+                <a:alpha val="15000"/>
+              </a:srgbClr>
+            </a:solidFill>
+            <a:ln w="8067" cap="flat">
+              <a:noFill/>
+              <a:prstDash val="solid"/>
+              <a:miter/>
+            </a:ln>
+          </p:spPr>
+          <p:txBody>
+            <a:bodyPr/>
+            <a:lstStyle/>
+            <a:p>
+              <a:endParaRPr lang="en-US"/>
+            </a:p>
+          </p:txBody>
+        </p:sp>
+        <p:pic>
+          <p:nvPicPr>
+            <p:cNvPr id="11" name="Graphic 10" descr="Money outline">
+              <a:extLst>
+                <a:ext uri="{FF2B5EF4-FFF2-40B4-BE49-F238E27FC236}">
+                  <a16:creationId xmlns:a16="http://schemas.microsoft.com/office/drawing/2014/main" id="{A307EB66-7D70-3B84-3775-A8A661264B58}"/>
+                </a:ext>
+              </a:extLst>
+            </p:cNvPr>
+            <p:cNvPicPr>
+              <a:picLocks noChangeAspect="1"/>
+            </p:cNvPicPr>
+            <p:nvPr/>
+          </p:nvPicPr>
+          <p:blipFill>
+            <a:blip>
+              <a:extLst>
+                <a:ext uri="{96DAC541-7B7A-43D3-8B79-37D633B846F1}">
+                  <asvg:svgBlip xmlns:asvg="http://schemas.microsoft.com/office/drawing/2016/SVG/main" r:embed="rId2"/>
+                </a:ext>
+              </a:extLst>
+            </a:blip>
+            <a:stretch>
+              <a:fillRect/>
+            </a:stretch>
+          </p:blipFill>
+          <p:spPr>
+            <a:xfrm>
+              <a:off x="4103587" y="914400"/>
+              <a:ext cx="5029200" cy="5029200"/>
+            </a:xfrm>
+            <a:prstGeom prst="rect">
+              <a:avLst/>
+            </a:prstGeom>
+            <a:effectLst>
+              <a:outerShdw blurRad="50800" dist="127000" dir="2700000" algn="tl" rotWithShape="0">
+                <a:schemeClr val="accent1">
+                  <a:alpha val="40000"/>
+                </a:schemeClr>
+              </a:outerShdw>
+            </a:effectLst>
+          </p:spPr>
+        </p:pic>
+      </p:grpSp>
+    </p:spTree>
+    <p:extLst>
+      <p:ext uri="{BB962C8B-B14F-4D97-AF65-F5344CB8AC3E}">
+        <p14:creationId xmlns:p14="http://schemas.microsoft.com/office/powerpoint/2010/main" val="903167996"/>
+      </p:ext>
+    </p:extLst>
+  </p:cSld>
+  <p:clrMapOvr>
+    <a:masterClrMapping/>
+  </p:clrMapOvr>
+</p:sld>
+</file>
+
+<file path=ppt/slides/slide12.xml><?xml version="1.0" encoding="utf-8"?>
+<p:sld xmlns:a="http://schemas.openxmlformats.org/drawingml/2006/main" xmlns:r="http://schemas.openxmlformats.org/officeDocument/2006/relationships" xmlns:p="http://schemas.openxmlformats.org/presentationml/2006/main">
+  <p:cSld>
+    <p:spTree>
+      <p:nvGrpSpPr>
+        <p:cNvPr id="1" name="">
+          <a:extLst>
+            <a:ext uri="{FF2B5EF4-FFF2-40B4-BE49-F238E27FC236}">
               <a16:creationId xmlns:a16="http://schemas.microsoft.com/office/drawing/2014/main" id="{5D4DD460-0CDC-CBA1-F691-25B99B5D6484}"/>
             </a:ext>
           </a:extLst>
@@ -4975,7 +5569,7 @@
 </p:sld>
 </file>
 
-<file path=ppt/slides/slide11.xml><?xml version="1.0" encoding="utf-8"?>
+<file path=ppt/slides/slide13.xml><?xml version="1.0" encoding="utf-8"?>
 <p:sld xmlns:a="http://schemas.openxmlformats.org/drawingml/2006/main" xmlns:r="http://schemas.openxmlformats.org/officeDocument/2006/relationships" xmlns:p="http://schemas.openxmlformats.org/presentationml/2006/main">
   <p:cSld>
     <p:spTree>
@@ -5271,7 +5865,7 @@
 </p:sld>
 </file>
 
-<file path=ppt/slides/slide12.xml><?xml version="1.0" encoding="utf-8"?>
+<file path=ppt/slides/slide14.xml><?xml version="1.0" encoding="utf-8"?>
 <p:sld xmlns:a="http://schemas.openxmlformats.org/drawingml/2006/main" xmlns:r="http://schemas.openxmlformats.org/officeDocument/2006/relationships" xmlns:p="http://schemas.openxmlformats.org/presentationml/2006/main">
   <p:cSld>
     <p:spTree>
@@ -5503,7 +6097,7 @@
 </p:sld>
 </file>
 
-<file path=ppt/slides/slide13.xml><?xml version="1.0" encoding="utf-8"?>
+<file path=ppt/slides/slide15.xml><?xml version="1.0" encoding="utf-8"?>
 <p:sld xmlns:a="http://schemas.openxmlformats.org/drawingml/2006/main" xmlns:r="http://schemas.openxmlformats.org/officeDocument/2006/relationships" xmlns:p="http://schemas.openxmlformats.org/presentationml/2006/main">
   <p:cSld>
     <p:spTree>
@@ -5799,7 +6393,7 @@
 </p:sld>
 </file>
 
-<file path=ppt/slides/slide14.xml><?xml version="1.0" encoding="utf-8"?>
+<file path=ppt/slides/slide16.xml><?xml version="1.0" encoding="utf-8"?>
 <p:sld xmlns:a="http://schemas.openxmlformats.org/drawingml/2006/main" xmlns:r="http://schemas.openxmlformats.org/officeDocument/2006/relationships" xmlns:p="http://schemas.openxmlformats.org/presentationml/2006/main">
   <p:cSld>
     <p:spTree>
@@ -6097,7 +6691,7 @@
 </p:sld>
 </file>
 
-<file path=ppt/slides/slide15.xml><?xml version="1.0" encoding="utf-8"?>
+<file path=ppt/slides/slide17.xml><?xml version="1.0" encoding="utf-8"?>
 <p:sld xmlns:a="http://schemas.openxmlformats.org/drawingml/2006/main" xmlns:r="http://schemas.openxmlformats.org/officeDocument/2006/relationships" xmlns:p="http://schemas.openxmlformats.org/presentationml/2006/main">
   <p:cSld>
     <p:spTree>
@@ -6395,7 +6989,7 @@
 </p:sld>
 </file>
 
-<file path=ppt/slides/slide16.xml><?xml version="1.0" encoding="utf-8"?>
+<file path=ppt/slides/slide18.xml><?xml version="1.0" encoding="utf-8"?>
 <p:sld xmlns:a="http://schemas.openxmlformats.org/drawingml/2006/main" xmlns:r="http://schemas.openxmlformats.org/officeDocument/2006/relationships" xmlns:p="http://schemas.openxmlformats.org/presentationml/2006/main">
   <p:cSld>
     <p:spTree>
@@ -6691,7 +7285,7 @@
 </p:sld>
 </file>
 
-<file path=ppt/slides/slide17.xml><?xml version="1.0" encoding="utf-8"?>
+<file path=ppt/slides/slide19.xml><?xml version="1.0" encoding="utf-8"?>
 <p:sld xmlns:a="http://schemas.openxmlformats.org/drawingml/2006/main" xmlns:r="http://schemas.openxmlformats.org/officeDocument/2006/relationships" xmlns:p="http://schemas.openxmlformats.org/presentationml/2006/main">
   <p:cSld>
     <p:spTree>
@@ -6923,7 +7517,1439 @@
 </p:sld>
 </file>
 
-<file path=ppt/slides/slide18.xml><?xml version="1.0" encoding="utf-8"?>
+<file path=ppt/slides/slide2.xml><?xml version="1.0" encoding="utf-8"?>
+<p:sld xmlns:a="http://schemas.openxmlformats.org/drawingml/2006/main" xmlns:r="http://schemas.openxmlformats.org/officeDocument/2006/relationships" xmlns:p="http://schemas.openxmlformats.org/presentationml/2006/main">
+  <p:cSld>
+    <p:spTree>
+      <p:nvGrpSpPr>
+        <p:cNvPr id="1" name=""/>
+        <p:cNvGrpSpPr/>
+        <p:nvPr/>
+      </p:nvGrpSpPr>
+      <p:grpSpPr>
+        <a:xfrm>
+          <a:off x="0" y="0"/>
+          <a:ext cx="0" cy="0"/>
+          <a:chOff x="0" y="0"/>
+          <a:chExt cx="0" cy="0"/>
+        </a:xfrm>
+      </p:grpSpPr>
+      <p:sp>
+        <p:nvSpPr>
+          <p:cNvPr id="14" name="Rectangle 13">
+            <a:extLst>
+              <a:ext uri="{FF2B5EF4-FFF2-40B4-BE49-F238E27FC236}">
+                <a16:creationId xmlns:a16="http://schemas.microsoft.com/office/drawing/2014/main" id="{8DD21041-9BF6-0D90-0159-1E9C2CC5D860}"/>
+              </a:ext>
+            </a:extLst>
+          </p:cNvPr>
+          <p:cNvSpPr/>
+          <p:nvPr/>
+        </p:nvSpPr>
+        <p:spPr>
+          <a:xfrm>
+            <a:off x="271387" y="263345"/>
+            <a:ext cx="10461812" cy="985498"/>
+          </a:xfrm>
+          <a:prstGeom prst="rect">
+            <a:avLst/>
+          </a:prstGeom>
+          <a:solidFill>
+            <a:schemeClr val="bg1">
+              <a:lumMod val="85000"/>
+              <a:alpha val="47000"/>
+            </a:schemeClr>
+          </a:solidFill>
+        </p:spPr>
+        <p:style>
+          <a:lnRef idx="2">
+            <a:schemeClr val="accent1">
+              <a:shade val="15000"/>
+            </a:schemeClr>
+          </a:lnRef>
+          <a:fillRef idx="1">
+            <a:schemeClr val="accent1"/>
+          </a:fillRef>
+          <a:effectRef idx="0">
+            <a:schemeClr val="accent1"/>
+          </a:effectRef>
+          <a:fontRef idx="minor">
+            <a:schemeClr val="lt1"/>
+          </a:fontRef>
+        </p:style>
+        <p:txBody>
+          <a:bodyPr rtlCol="0" anchor="ctr"/>
+          <a:lstStyle/>
+          <a:p>
+            <a:r>
+              <a:rPr lang="en-AU" dirty="0" err="1">
+                <a:solidFill>
+                  <a:schemeClr val="tx2"/>
+                </a:solidFill>
+              </a:rPr>
+              <a:t>BestFit</a:t>
+            </a:r>
+            <a:endParaRPr lang="en-US" dirty="0">
+              <a:solidFill>
+                <a:schemeClr val="tx2"/>
+              </a:solidFill>
+            </a:endParaRPr>
+          </a:p>
+        </p:txBody>
+      </p:sp>
+      <p:sp>
+        <p:nvSpPr>
+          <p:cNvPr id="12" name="Rectangle 11">
+            <a:extLst>
+              <a:ext uri="{FF2B5EF4-FFF2-40B4-BE49-F238E27FC236}">
+                <a16:creationId xmlns:a16="http://schemas.microsoft.com/office/drawing/2014/main" id="{8030EC64-EF9A-BF48-4413-6599A8DCD81B}"/>
+              </a:ext>
+            </a:extLst>
+          </p:cNvPr>
+          <p:cNvSpPr/>
+          <p:nvPr/>
+        </p:nvSpPr>
+        <p:spPr>
+          <a:xfrm>
+            <a:off x="340659" y="1650125"/>
+            <a:ext cx="10461812" cy="2386166"/>
+          </a:xfrm>
+          <a:prstGeom prst="rect">
+            <a:avLst/>
+          </a:prstGeom>
+          <a:solidFill>
+            <a:schemeClr val="accent1">
+              <a:alpha val="47000"/>
+            </a:schemeClr>
+          </a:solidFill>
+        </p:spPr>
+        <p:style>
+          <a:lnRef idx="2">
+            <a:schemeClr val="accent1">
+              <a:shade val="15000"/>
+            </a:schemeClr>
+          </a:lnRef>
+          <a:fillRef idx="1">
+            <a:schemeClr val="accent1"/>
+          </a:fillRef>
+          <a:effectRef idx="0">
+            <a:schemeClr val="accent1"/>
+          </a:effectRef>
+          <a:fontRef idx="minor">
+            <a:schemeClr val="lt1"/>
+          </a:fontRef>
+        </p:style>
+        <p:txBody>
+          <a:bodyPr rtlCol="0" anchor="ctr"/>
+          <a:lstStyle/>
+          <a:p>
+            <a:r>
+              <a:rPr lang="en-AU" dirty="0"/>
+              <a:t>Tenant</a:t>
+            </a:r>
+            <a:endParaRPr lang="en-US" dirty="0"/>
+          </a:p>
+        </p:txBody>
+      </p:sp>
+      <p:sp>
+        <p:nvSpPr>
+          <p:cNvPr id="5" name="Rectangle: Rounded Corners 4">
+            <a:extLst>
+              <a:ext uri="{FF2B5EF4-FFF2-40B4-BE49-F238E27FC236}">
+                <a16:creationId xmlns:a16="http://schemas.microsoft.com/office/drawing/2014/main" id="{333B4AA0-B3A0-58D3-C3A0-E4A3840A070D}"/>
+              </a:ext>
+            </a:extLst>
+          </p:cNvPr>
+          <p:cNvSpPr/>
+          <p:nvPr/>
+        </p:nvSpPr>
+        <p:spPr>
+          <a:xfrm>
+            <a:off x="7943030" y="377953"/>
+            <a:ext cx="2333296" cy="735726"/>
+          </a:xfrm>
+          <a:prstGeom prst="roundRect">
+            <a:avLst/>
+          </a:prstGeom>
+          <a:solidFill>
+            <a:schemeClr val="bg1">
+              <a:lumMod val="85000"/>
+              <a:alpha val="21000"/>
+            </a:schemeClr>
+          </a:solidFill>
+        </p:spPr>
+        <p:style>
+          <a:lnRef idx="2">
+            <a:schemeClr val="accent1">
+              <a:shade val="15000"/>
+            </a:schemeClr>
+          </a:lnRef>
+          <a:fillRef idx="1">
+            <a:schemeClr val="accent1"/>
+          </a:fillRef>
+          <a:effectRef idx="0">
+            <a:schemeClr val="accent1"/>
+          </a:effectRef>
+          <a:fontRef idx="minor">
+            <a:schemeClr val="lt1"/>
+          </a:fontRef>
+        </p:style>
+        <p:txBody>
+          <a:bodyPr rtlCol="0" anchor="ctr"/>
+          <a:lstStyle/>
+          <a:p>
+            <a:pPr algn="ctr"/>
+            <a:r>
+              <a:rPr lang="en-AU" sz="1600" dirty="0" err="1">
+                <a:solidFill>
+                  <a:schemeClr val="tx1"/>
+                </a:solidFill>
+              </a:rPr>
+              <a:t>BfsSystem</a:t>
+            </a:r>
+            <a:endParaRPr lang="en-US" sz="1600" dirty="0">
+              <a:solidFill>
+                <a:schemeClr val="tx1"/>
+              </a:solidFill>
+            </a:endParaRPr>
+          </a:p>
+        </p:txBody>
+      </p:sp>
+      <p:sp>
+        <p:nvSpPr>
+          <p:cNvPr id="7" name="Rectangle: Rounded Corners 6">
+            <a:extLst>
+              <a:ext uri="{FF2B5EF4-FFF2-40B4-BE49-F238E27FC236}">
+                <a16:creationId xmlns:a16="http://schemas.microsoft.com/office/drawing/2014/main" id="{EB30A78B-1428-398F-0328-F280D80AE345}"/>
+              </a:ext>
+            </a:extLst>
+          </p:cNvPr>
+          <p:cNvSpPr/>
+          <p:nvPr/>
+        </p:nvSpPr>
+        <p:spPr>
+          <a:xfrm>
+            <a:off x="8210884" y="1833058"/>
+            <a:ext cx="1801334" cy="392906"/>
+          </a:xfrm>
+          <a:prstGeom prst="roundRect">
+            <a:avLst/>
+          </a:prstGeom>
+          <a:solidFill>
+            <a:schemeClr val="accent1">
+              <a:alpha val="21000"/>
+            </a:schemeClr>
+          </a:solidFill>
+        </p:spPr>
+        <p:style>
+          <a:lnRef idx="2">
+            <a:schemeClr val="accent1">
+              <a:shade val="15000"/>
+            </a:schemeClr>
+          </a:lnRef>
+          <a:fillRef idx="1">
+            <a:schemeClr val="accent1"/>
+          </a:fillRef>
+          <a:effectRef idx="0">
+            <a:schemeClr val="accent1"/>
+          </a:effectRef>
+          <a:fontRef idx="minor">
+            <a:schemeClr val="lt1"/>
+          </a:fontRef>
+        </p:style>
+        <p:txBody>
+          <a:bodyPr rtlCol="0" anchor="ctr"/>
+          <a:lstStyle/>
+          <a:p>
+            <a:pPr algn="ctr"/>
+            <a:r>
+              <a:rPr lang="en-AU" sz="1600" dirty="0">
+                <a:solidFill>
+                  <a:schemeClr val="tx1"/>
+                </a:solidFill>
+              </a:rPr>
+              <a:t>Application</a:t>
+            </a:r>
+            <a:endParaRPr lang="en-US" sz="1600" dirty="0">
+              <a:solidFill>
+                <a:schemeClr val="tx1"/>
+              </a:solidFill>
+            </a:endParaRPr>
+          </a:p>
+        </p:txBody>
+      </p:sp>
+      <p:sp>
+        <p:nvSpPr>
+          <p:cNvPr id="9" name="Rectangle: Rounded Corners 8">
+            <a:extLst>
+              <a:ext uri="{FF2B5EF4-FFF2-40B4-BE49-F238E27FC236}">
+                <a16:creationId xmlns:a16="http://schemas.microsoft.com/office/drawing/2014/main" id="{F8260DF7-87C4-62F8-DD93-C902D73FE3BC}"/>
+              </a:ext>
+            </a:extLst>
+          </p:cNvPr>
+          <p:cNvSpPr/>
+          <p:nvPr/>
+        </p:nvSpPr>
+        <p:spPr>
+          <a:xfrm>
+            <a:off x="5449754" y="1833058"/>
+            <a:ext cx="1801334" cy="392906"/>
+          </a:xfrm>
+          <a:prstGeom prst="roundRect">
+            <a:avLst/>
+          </a:prstGeom>
+          <a:solidFill>
+            <a:schemeClr val="accent1">
+              <a:alpha val="21000"/>
+            </a:schemeClr>
+          </a:solidFill>
+        </p:spPr>
+        <p:style>
+          <a:lnRef idx="2">
+            <a:schemeClr val="accent1">
+              <a:shade val="15000"/>
+            </a:schemeClr>
+          </a:lnRef>
+          <a:fillRef idx="1">
+            <a:schemeClr val="accent1"/>
+          </a:fillRef>
+          <a:effectRef idx="0">
+            <a:schemeClr val="accent1"/>
+          </a:effectRef>
+          <a:fontRef idx="minor">
+            <a:schemeClr val="lt1"/>
+          </a:fontRef>
+        </p:style>
+        <p:txBody>
+          <a:bodyPr rtlCol="0" anchor="ctr"/>
+          <a:lstStyle/>
+          <a:p>
+            <a:pPr algn="ctr"/>
+            <a:r>
+              <a:rPr lang="en-AU" sz="1600" dirty="0">
+                <a:solidFill>
+                  <a:schemeClr val="tx1"/>
+                </a:solidFill>
+              </a:rPr>
+              <a:t>Role</a:t>
+            </a:r>
+            <a:endParaRPr lang="en-US" sz="1600" dirty="0">
+              <a:solidFill>
+                <a:schemeClr val="tx1"/>
+              </a:solidFill>
+            </a:endParaRPr>
+          </a:p>
+        </p:txBody>
+      </p:sp>
+      <p:sp>
+        <p:nvSpPr>
+          <p:cNvPr id="11" name="Rectangle: Rounded Corners 10">
+            <a:extLst>
+              <a:ext uri="{FF2B5EF4-FFF2-40B4-BE49-F238E27FC236}">
+                <a16:creationId xmlns:a16="http://schemas.microsoft.com/office/drawing/2014/main" id="{24E973F8-F2A6-E754-4836-B8AF676D186E}"/>
+              </a:ext>
+            </a:extLst>
+          </p:cNvPr>
+          <p:cNvSpPr/>
+          <p:nvPr/>
+        </p:nvSpPr>
+        <p:spPr>
+          <a:xfrm>
+            <a:off x="2570434" y="1833058"/>
+            <a:ext cx="1801334" cy="392906"/>
+          </a:xfrm>
+          <a:prstGeom prst="roundRect">
+            <a:avLst/>
+          </a:prstGeom>
+          <a:solidFill>
+            <a:schemeClr val="accent1">
+              <a:alpha val="21000"/>
+            </a:schemeClr>
+          </a:solidFill>
+        </p:spPr>
+        <p:style>
+          <a:lnRef idx="2">
+            <a:schemeClr val="accent1">
+              <a:shade val="15000"/>
+            </a:schemeClr>
+          </a:lnRef>
+          <a:fillRef idx="1">
+            <a:schemeClr val="accent1"/>
+          </a:fillRef>
+          <a:effectRef idx="0">
+            <a:schemeClr val="accent1"/>
+          </a:effectRef>
+          <a:fontRef idx="minor">
+            <a:schemeClr val="lt1"/>
+          </a:fontRef>
+        </p:style>
+        <p:txBody>
+          <a:bodyPr rtlCol="0" anchor="ctr"/>
+          <a:lstStyle/>
+          <a:p>
+            <a:pPr algn="ctr"/>
+            <a:r>
+              <a:rPr lang="en-AU" sz="1600" dirty="0">
+                <a:solidFill>
+                  <a:schemeClr val="tx1"/>
+                </a:solidFill>
+              </a:rPr>
+              <a:t>User</a:t>
+            </a:r>
+            <a:endParaRPr lang="en-US" sz="1600" dirty="0">
+              <a:solidFill>
+                <a:schemeClr val="tx1"/>
+              </a:solidFill>
+            </a:endParaRPr>
+          </a:p>
+        </p:txBody>
+      </p:sp>
+      <p:sp>
+        <p:nvSpPr>
+          <p:cNvPr id="24" name="Rectangle: Rounded Corners 23">
+            <a:extLst>
+              <a:ext uri="{FF2B5EF4-FFF2-40B4-BE49-F238E27FC236}">
+                <a16:creationId xmlns:a16="http://schemas.microsoft.com/office/drawing/2014/main" id="{2199673F-629D-5CAF-93C6-E8854CCD81D2}"/>
+              </a:ext>
+            </a:extLst>
+          </p:cNvPr>
+          <p:cNvSpPr/>
+          <p:nvPr/>
+        </p:nvSpPr>
+        <p:spPr>
+          <a:xfrm>
+            <a:off x="5181900" y="388231"/>
+            <a:ext cx="2333296" cy="735726"/>
+          </a:xfrm>
+          <a:prstGeom prst="roundRect">
+            <a:avLst/>
+          </a:prstGeom>
+          <a:solidFill>
+            <a:schemeClr val="bg1">
+              <a:lumMod val="85000"/>
+              <a:alpha val="21000"/>
+            </a:schemeClr>
+          </a:solidFill>
+        </p:spPr>
+        <p:style>
+          <a:lnRef idx="2">
+            <a:schemeClr val="accent1">
+              <a:shade val="15000"/>
+            </a:schemeClr>
+          </a:lnRef>
+          <a:fillRef idx="1">
+            <a:schemeClr val="accent1"/>
+          </a:fillRef>
+          <a:effectRef idx="0">
+            <a:schemeClr val="accent1"/>
+          </a:effectRef>
+          <a:fontRef idx="minor">
+            <a:schemeClr val="lt1"/>
+          </a:fontRef>
+        </p:style>
+        <p:txBody>
+          <a:bodyPr rtlCol="0" anchor="ctr"/>
+          <a:lstStyle/>
+          <a:p>
+            <a:pPr algn="ctr"/>
+            <a:r>
+              <a:rPr lang="en-AU" sz="1600" dirty="0" err="1">
+                <a:solidFill>
+                  <a:schemeClr val="tx1"/>
+                </a:solidFill>
+              </a:rPr>
+              <a:t>BfsTenant</a:t>
+            </a:r>
+            <a:endParaRPr lang="en-US" sz="1600" dirty="0">
+              <a:solidFill>
+                <a:schemeClr val="tx1"/>
+              </a:solidFill>
+            </a:endParaRPr>
+          </a:p>
+        </p:txBody>
+      </p:sp>
+      <p:sp>
+        <p:nvSpPr>
+          <p:cNvPr id="26" name="Rectangle: Rounded Corners 25">
+            <a:extLst>
+              <a:ext uri="{FF2B5EF4-FFF2-40B4-BE49-F238E27FC236}">
+                <a16:creationId xmlns:a16="http://schemas.microsoft.com/office/drawing/2014/main" id="{F410340E-C040-3537-89DE-8B5C317E0055}"/>
+              </a:ext>
+            </a:extLst>
+          </p:cNvPr>
+          <p:cNvSpPr/>
+          <p:nvPr/>
+        </p:nvSpPr>
+        <p:spPr>
+          <a:xfrm>
+            <a:off x="2279495" y="388231"/>
+            <a:ext cx="2333296" cy="735726"/>
+          </a:xfrm>
+          <a:prstGeom prst="roundRect">
+            <a:avLst/>
+          </a:prstGeom>
+          <a:solidFill>
+            <a:schemeClr val="bg1">
+              <a:lumMod val="85000"/>
+              <a:alpha val="21000"/>
+            </a:schemeClr>
+          </a:solidFill>
+        </p:spPr>
+        <p:style>
+          <a:lnRef idx="2">
+            <a:schemeClr val="accent1">
+              <a:shade val="15000"/>
+            </a:schemeClr>
+          </a:lnRef>
+          <a:fillRef idx="1">
+            <a:schemeClr val="accent1"/>
+          </a:fillRef>
+          <a:effectRef idx="0">
+            <a:schemeClr val="accent1"/>
+          </a:effectRef>
+          <a:fontRef idx="minor">
+            <a:schemeClr val="lt1"/>
+          </a:fontRef>
+        </p:style>
+        <p:txBody>
+          <a:bodyPr rtlCol="0" anchor="ctr"/>
+          <a:lstStyle/>
+          <a:p>
+            <a:pPr algn="ctr"/>
+            <a:r>
+              <a:rPr lang="en-AU" sz="1600" dirty="0" err="1">
+                <a:solidFill>
+                  <a:schemeClr val="tx1"/>
+                </a:solidFill>
+              </a:rPr>
+              <a:t>AspNetUser</a:t>
+            </a:r>
+            <a:endParaRPr lang="en-US" sz="1600" dirty="0">
+              <a:solidFill>
+                <a:schemeClr val="tx1"/>
+              </a:solidFill>
+            </a:endParaRPr>
+          </a:p>
+        </p:txBody>
+      </p:sp>
+      <p:cxnSp>
+        <p:nvCxnSpPr>
+          <p:cNvPr id="28" name="Straight Arrow Connector 27">
+            <a:extLst>
+              <a:ext uri="{FF2B5EF4-FFF2-40B4-BE49-F238E27FC236}">
+                <a16:creationId xmlns:a16="http://schemas.microsoft.com/office/drawing/2014/main" id="{42B2A66F-60C1-BAF0-54E7-7A86C4DB40A6}"/>
+              </a:ext>
+            </a:extLst>
+          </p:cNvPr>
+          <p:cNvCxnSpPr>
+            <a:cxnSpLocks/>
+            <a:stCxn id="26" idx="2"/>
+            <a:endCxn id="11" idx="0"/>
+          </p:cNvCxnSpPr>
+          <p:nvPr/>
+        </p:nvCxnSpPr>
+        <p:spPr>
+          <a:xfrm>
+            <a:off x="3446143" y="1123957"/>
+            <a:ext cx="24958" cy="709101"/>
+          </a:xfrm>
+          <a:prstGeom prst="straightConnector1">
+            <a:avLst/>
+          </a:prstGeom>
+          <a:ln>
+            <a:tailEnd type="triangle"/>
+          </a:ln>
+        </p:spPr>
+        <p:style>
+          <a:lnRef idx="2">
+            <a:schemeClr val="accent1"/>
+          </a:lnRef>
+          <a:fillRef idx="0">
+            <a:schemeClr val="accent1"/>
+          </a:fillRef>
+          <a:effectRef idx="1">
+            <a:schemeClr val="accent1"/>
+          </a:effectRef>
+          <a:fontRef idx="minor">
+            <a:schemeClr val="tx1"/>
+          </a:fontRef>
+        </p:style>
+      </p:cxnSp>
+      <p:sp>
+        <p:nvSpPr>
+          <p:cNvPr id="41" name="Rectangle: Rounded Corners 40">
+            <a:extLst>
+              <a:ext uri="{FF2B5EF4-FFF2-40B4-BE49-F238E27FC236}">
+                <a16:creationId xmlns:a16="http://schemas.microsoft.com/office/drawing/2014/main" id="{80892785-EB90-D2EE-A1A2-AF2628C53879}"/>
+              </a:ext>
+            </a:extLst>
+          </p:cNvPr>
+          <p:cNvSpPr/>
+          <p:nvPr/>
+        </p:nvSpPr>
+        <p:spPr>
+          <a:xfrm>
+            <a:off x="8210884" y="2583692"/>
+            <a:ext cx="1801334" cy="392906"/>
+          </a:xfrm>
+          <a:prstGeom prst="roundRect">
+            <a:avLst/>
+          </a:prstGeom>
+          <a:solidFill>
+            <a:schemeClr val="accent2">
+              <a:alpha val="21000"/>
+            </a:schemeClr>
+          </a:solidFill>
+        </p:spPr>
+        <p:style>
+          <a:lnRef idx="2">
+            <a:schemeClr val="accent1">
+              <a:shade val="15000"/>
+            </a:schemeClr>
+          </a:lnRef>
+          <a:fillRef idx="1">
+            <a:schemeClr val="accent1"/>
+          </a:fillRef>
+          <a:effectRef idx="0">
+            <a:schemeClr val="accent1"/>
+          </a:effectRef>
+          <a:fontRef idx="minor">
+            <a:schemeClr val="lt1"/>
+          </a:fontRef>
+        </p:style>
+        <p:txBody>
+          <a:bodyPr rtlCol="0" anchor="ctr"/>
+          <a:lstStyle/>
+          <a:p>
+            <a:pPr algn="ctr"/>
+            <a:r>
+              <a:rPr lang="en-AU" sz="1600" dirty="0">
+                <a:solidFill>
+                  <a:schemeClr val="tx1"/>
+                </a:solidFill>
+              </a:rPr>
+              <a:t>Investor</a:t>
+            </a:r>
+            <a:endParaRPr lang="en-US" sz="1600" dirty="0">
+              <a:solidFill>
+                <a:schemeClr val="tx1"/>
+              </a:solidFill>
+            </a:endParaRPr>
+          </a:p>
+        </p:txBody>
+      </p:sp>
+      <p:sp>
+        <p:nvSpPr>
+          <p:cNvPr id="43" name="Rectangle: Rounded Corners 42">
+            <a:extLst>
+              <a:ext uri="{FF2B5EF4-FFF2-40B4-BE49-F238E27FC236}">
+                <a16:creationId xmlns:a16="http://schemas.microsoft.com/office/drawing/2014/main" id="{EA2B2F91-742F-0386-4935-6AFD88BBBFA6}"/>
+              </a:ext>
+            </a:extLst>
+          </p:cNvPr>
+          <p:cNvSpPr/>
+          <p:nvPr/>
+        </p:nvSpPr>
+        <p:spPr>
+          <a:xfrm>
+            <a:off x="5449754" y="2583692"/>
+            <a:ext cx="1801334" cy="392906"/>
+          </a:xfrm>
+          <a:prstGeom prst="roundRect">
+            <a:avLst/>
+          </a:prstGeom>
+          <a:solidFill>
+            <a:schemeClr val="accent2">
+              <a:alpha val="21000"/>
+            </a:schemeClr>
+          </a:solidFill>
+        </p:spPr>
+        <p:style>
+          <a:lnRef idx="2">
+            <a:schemeClr val="accent1">
+              <a:shade val="15000"/>
+            </a:schemeClr>
+          </a:lnRef>
+          <a:fillRef idx="1">
+            <a:schemeClr val="accent1"/>
+          </a:fillRef>
+          <a:effectRef idx="0">
+            <a:schemeClr val="accent1"/>
+          </a:effectRef>
+          <a:fontRef idx="minor">
+            <a:schemeClr val="lt1"/>
+          </a:fontRef>
+        </p:style>
+        <p:txBody>
+          <a:bodyPr rtlCol="0" anchor="ctr"/>
+          <a:lstStyle/>
+          <a:p>
+            <a:pPr algn="ctr"/>
+            <a:r>
+              <a:rPr lang="en-AU" sz="1600" dirty="0">
+                <a:solidFill>
+                  <a:schemeClr val="tx1"/>
+                </a:solidFill>
+              </a:rPr>
+              <a:t>Broker</a:t>
+            </a:r>
+            <a:endParaRPr lang="en-US" sz="1600" dirty="0">
+              <a:solidFill>
+                <a:schemeClr val="tx1"/>
+              </a:solidFill>
+            </a:endParaRPr>
+          </a:p>
+        </p:txBody>
+      </p:sp>
+      <p:sp>
+        <p:nvSpPr>
+          <p:cNvPr id="45" name="Rectangle: Rounded Corners 44">
+            <a:extLst>
+              <a:ext uri="{FF2B5EF4-FFF2-40B4-BE49-F238E27FC236}">
+                <a16:creationId xmlns:a16="http://schemas.microsoft.com/office/drawing/2014/main" id="{A433504C-268F-B8E1-9745-46D47F062BA1}"/>
+              </a:ext>
+            </a:extLst>
+          </p:cNvPr>
+          <p:cNvSpPr/>
+          <p:nvPr/>
+        </p:nvSpPr>
+        <p:spPr>
+          <a:xfrm>
+            <a:off x="2570434" y="2583692"/>
+            <a:ext cx="1801334" cy="392906"/>
+          </a:xfrm>
+          <a:prstGeom prst="roundRect">
+            <a:avLst/>
+          </a:prstGeom>
+          <a:solidFill>
+            <a:schemeClr val="accent2">
+              <a:alpha val="21000"/>
+            </a:schemeClr>
+          </a:solidFill>
+        </p:spPr>
+        <p:style>
+          <a:lnRef idx="2">
+            <a:schemeClr val="accent1">
+              <a:shade val="15000"/>
+            </a:schemeClr>
+          </a:lnRef>
+          <a:fillRef idx="1">
+            <a:schemeClr val="accent1"/>
+          </a:fillRef>
+          <a:effectRef idx="0">
+            <a:schemeClr val="accent1"/>
+          </a:effectRef>
+          <a:fontRef idx="minor">
+            <a:schemeClr val="lt1"/>
+          </a:fontRef>
+        </p:style>
+        <p:txBody>
+          <a:bodyPr rtlCol="0" anchor="ctr"/>
+          <a:lstStyle/>
+          <a:p>
+            <a:pPr algn="ctr"/>
+            <a:r>
+              <a:rPr lang="en-AU" sz="1600" dirty="0" err="1">
+                <a:solidFill>
+                  <a:schemeClr val="tx1"/>
+                </a:solidFill>
+              </a:rPr>
+              <a:t>TradingRoom</a:t>
+            </a:r>
+            <a:endParaRPr lang="en-US" sz="1600" dirty="0">
+              <a:solidFill>
+                <a:schemeClr val="tx1"/>
+              </a:solidFill>
+            </a:endParaRPr>
+          </a:p>
+        </p:txBody>
+      </p:sp>
+      <p:sp>
+        <p:nvSpPr>
+          <p:cNvPr id="47" name="Rectangle: Rounded Corners 46">
+            <a:extLst>
+              <a:ext uri="{FF2B5EF4-FFF2-40B4-BE49-F238E27FC236}">
+                <a16:creationId xmlns:a16="http://schemas.microsoft.com/office/drawing/2014/main" id="{DECB229A-5988-5AB3-BD89-C40E3C4E1E00}"/>
+              </a:ext>
+            </a:extLst>
+          </p:cNvPr>
+          <p:cNvSpPr/>
+          <p:nvPr/>
+        </p:nvSpPr>
+        <p:spPr>
+          <a:xfrm>
+            <a:off x="8210884" y="3334326"/>
+            <a:ext cx="1801334" cy="392906"/>
+          </a:xfrm>
+          <a:prstGeom prst="roundRect">
+            <a:avLst/>
+          </a:prstGeom>
+          <a:solidFill>
+            <a:srgbClr val="FF0000">
+              <a:alpha val="21000"/>
+            </a:srgbClr>
+          </a:solidFill>
+        </p:spPr>
+        <p:style>
+          <a:lnRef idx="2">
+            <a:schemeClr val="accent1">
+              <a:shade val="15000"/>
+            </a:schemeClr>
+          </a:lnRef>
+          <a:fillRef idx="1">
+            <a:schemeClr val="accent1"/>
+          </a:fillRef>
+          <a:effectRef idx="0">
+            <a:schemeClr val="accent1"/>
+          </a:effectRef>
+          <a:fontRef idx="minor">
+            <a:schemeClr val="lt1"/>
+          </a:fontRef>
+        </p:style>
+        <p:txBody>
+          <a:bodyPr rtlCol="0" anchor="ctr"/>
+          <a:lstStyle/>
+          <a:p>
+            <a:pPr algn="ctr"/>
+            <a:r>
+              <a:rPr lang="en-AU" sz="1600" dirty="0" err="1">
+                <a:solidFill>
+                  <a:schemeClr val="tx1"/>
+                </a:solidFill>
+              </a:rPr>
+              <a:t>MonthlyItem</a:t>
+            </a:r>
+            <a:endParaRPr lang="en-US" sz="1600" dirty="0">
+              <a:solidFill>
+                <a:schemeClr val="tx1"/>
+              </a:solidFill>
+            </a:endParaRPr>
+          </a:p>
+        </p:txBody>
+      </p:sp>
+      <p:sp>
+        <p:nvSpPr>
+          <p:cNvPr id="49" name="Rectangle: Rounded Corners 48">
+            <a:extLst>
+              <a:ext uri="{FF2B5EF4-FFF2-40B4-BE49-F238E27FC236}">
+                <a16:creationId xmlns:a16="http://schemas.microsoft.com/office/drawing/2014/main" id="{7173D389-5470-FEB4-A7DA-5DD0365B556B}"/>
+              </a:ext>
+            </a:extLst>
+          </p:cNvPr>
+          <p:cNvSpPr/>
+          <p:nvPr/>
+        </p:nvSpPr>
+        <p:spPr>
+          <a:xfrm>
+            <a:off x="5449754" y="3334326"/>
+            <a:ext cx="1801334" cy="392906"/>
+          </a:xfrm>
+          <a:prstGeom prst="roundRect">
+            <a:avLst/>
+          </a:prstGeom>
+          <a:solidFill>
+            <a:srgbClr val="FF0000">
+              <a:alpha val="21000"/>
+            </a:srgbClr>
+          </a:solidFill>
+        </p:spPr>
+        <p:style>
+          <a:lnRef idx="2">
+            <a:schemeClr val="accent1">
+              <a:shade val="15000"/>
+            </a:schemeClr>
+          </a:lnRef>
+          <a:fillRef idx="1">
+            <a:schemeClr val="accent1"/>
+          </a:fillRef>
+          <a:effectRef idx="0">
+            <a:schemeClr val="accent1"/>
+          </a:effectRef>
+          <a:fontRef idx="minor">
+            <a:schemeClr val="lt1"/>
+          </a:fontRef>
+        </p:style>
+        <p:txBody>
+          <a:bodyPr rtlCol="0" anchor="ctr"/>
+          <a:lstStyle/>
+          <a:p>
+            <a:pPr algn="ctr"/>
+            <a:r>
+              <a:rPr lang="en-AU" sz="1600" dirty="0" err="1">
+                <a:solidFill>
+                  <a:schemeClr val="tx1"/>
+                </a:solidFill>
+              </a:rPr>
+              <a:t>SalaryItem</a:t>
+            </a:r>
+            <a:endParaRPr lang="en-US" sz="1600" dirty="0">
+              <a:solidFill>
+                <a:schemeClr val="tx1"/>
+              </a:solidFill>
+            </a:endParaRPr>
+          </a:p>
+        </p:txBody>
+      </p:sp>
+      <p:sp>
+        <p:nvSpPr>
+          <p:cNvPr id="51" name="Rectangle: Rounded Corners 50">
+            <a:extLst>
+              <a:ext uri="{FF2B5EF4-FFF2-40B4-BE49-F238E27FC236}">
+                <a16:creationId xmlns:a16="http://schemas.microsoft.com/office/drawing/2014/main" id="{DA1C6CAD-7557-E477-9FB2-780D252A439F}"/>
+              </a:ext>
+            </a:extLst>
+          </p:cNvPr>
+          <p:cNvSpPr/>
+          <p:nvPr/>
+        </p:nvSpPr>
+        <p:spPr>
+          <a:xfrm>
+            <a:off x="2570434" y="3334326"/>
+            <a:ext cx="1801334" cy="392906"/>
+          </a:xfrm>
+          <a:prstGeom prst="roundRect">
+            <a:avLst/>
+          </a:prstGeom>
+          <a:solidFill>
+            <a:srgbClr val="FF0000">
+              <a:alpha val="21000"/>
+            </a:srgbClr>
+          </a:solidFill>
+        </p:spPr>
+        <p:style>
+          <a:lnRef idx="2">
+            <a:schemeClr val="accent1">
+              <a:shade val="15000"/>
+            </a:schemeClr>
+          </a:lnRef>
+          <a:fillRef idx="1">
+            <a:schemeClr val="accent1"/>
+          </a:fillRef>
+          <a:effectRef idx="0">
+            <a:schemeClr val="accent1"/>
+          </a:effectRef>
+          <a:fontRef idx="minor">
+            <a:schemeClr val="lt1"/>
+          </a:fontRef>
+        </p:style>
+        <p:txBody>
+          <a:bodyPr rtlCol="0" anchor="ctr"/>
+          <a:lstStyle/>
+          <a:p>
+            <a:pPr algn="ctr"/>
+            <a:r>
+              <a:rPr lang="en-AU" sz="1600" dirty="0">
+                <a:solidFill>
+                  <a:schemeClr val="tx1"/>
+                </a:solidFill>
+              </a:rPr>
+              <a:t>Employee</a:t>
+            </a:r>
+            <a:endParaRPr lang="en-US" sz="1600" dirty="0">
+              <a:solidFill>
+                <a:schemeClr val="tx1"/>
+              </a:solidFill>
+            </a:endParaRPr>
+          </a:p>
+        </p:txBody>
+      </p:sp>
+      <p:sp>
+        <p:nvSpPr>
+          <p:cNvPr id="52" name="Scroll: Vertical 51">
+            <a:extLst>
+              <a:ext uri="{FF2B5EF4-FFF2-40B4-BE49-F238E27FC236}">
+                <a16:creationId xmlns:a16="http://schemas.microsoft.com/office/drawing/2014/main" id="{F6C59AFF-B60A-EC42-4110-AF09023C18A6}"/>
+              </a:ext>
+            </a:extLst>
+          </p:cNvPr>
+          <p:cNvSpPr/>
+          <p:nvPr/>
+        </p:nvSpPr>
+        <p:spPr>
+          <a:xfrm>
+            <a:off x="1736436" y="1833058"/>
+            <a:ext cx="443346" cy="392906"/>
+          </a:xfrm>
+          <a:prstGeom prst="verticalScroll">
+            <a:avLst/>
+          </a:prstGeom>
+        </p:spPr>
+        <p:style>
+          <a:lnRef idx="2">
+            <a:schemeClr val="accent1">
+              <a:shade val="15000"/>
+            </a:schemeClr>
+          </a:lnRef>
+          <a:fillRef idx="1">
+            <a:schemeClr val="accent1"/>
+          </a:fillRef>
+          <a:effectRef idx="0">
+            <a:schemeClr val="accent1"/>
+          </a:effectRef>
+          <a:fontRef idx="minor">
+            <a:schemeClr val="lt1"/>
+          </a:fontRef>
+        </p:style>
+        <p:txBody>
+          <a:bodyPr rtlCol="0" anchor="ctr"/>
+          <a:lstStyle/>
+          <a:p>
+            <a:pPr algn="ctr"/>
+            <a:endParaRPr lang="en-US"/>
+          </a:p>
+        </p:txBody>
+      </p:sp>
+      <p:sp>
+        <p:nvSpPr>
+          <p:cNvPr id="54" name="Scroll: Vertical 53">
+            <a:extLst>
+              <a:ext uri="{FF2B5EF4-FFF2-40B4-BE49-F238E27FC236}">
+                <a16:creationId xmlns:a16="http://schemas.microsoft.com/office/drawing/2014/main" id="{E6A38B9F-D8A5-7A81-ACE1-58AAD136423B}"/>
+              </a:ext>
+            </a:extLst>
+          </p:cNvPr>
+          <p:cNvSpPr/>
+          <p:nvPr/>
+        </p:nvSpPr>
+        <p:spPr>
+          <a:xfrm>
+            <a:off x="1789967" y="2542825"/>
+            <a:ext cx="443346" cy="392906"/>
+          </a:xfrm>
+          <a:prstGeom prst="verticalScroll">
+            <a:avLst/>
+          </a:prstGeom>
+        </p:spPr>
+        <p:style>
+          <a:lnRef idx="2">
+            <a:schemeClr val="accent1">
+              <a:shade val="15000"/>
+            </a:schemeClr>
+          </a:lnRef>
+          <a:fillRef idx="1">
+            <a:schemeClr val="accent1"/>
+          </a:fillRef>
+          <a:effectRef idx="0">
+            <a:schemeClr val="accent1"/>
+          </a:effectRef>
+          <a:fontRef idx="minor">
+            <a:schemeClr val="lt1"/>
+          </a:fontRef>
+        </p:style>
+        <p:txBody>
+          <a:bodyPr rtlCol="0" anchor="ctr"/>
+          <a:lstStyle/>
+          <a:p>
+            <a:pPr algn="ctr"/>
+            <a:endParaRPr lang="en-US"/>
+          </a:p>
+        </p:txBody>
+      </p:sp>
+      <p:sp>
+        <p:nvSpPr>
+          <p:cNvPr id="56" name="Scroll: Vertical 55">
+            <a:extLst>
+              <a:ext uri="{FF2B5EF4-FFF2-40B4-BE49-F238E27FC236}">
+                <a16:creationId xmlns:a16="http://schemas.microsoft.com/office/drawing/2014/main" id="{A3B48AED-67C8-DEFB-1743-FEDCB0885FE7}"/>
+              </a:ext>
+            </a:extLst>
+          </p:cNvPr>
+          <p:cNvSpPr/>
+          <p:nvPr/>
+        </p:nvSpPr>
+        <p:spPr>
+          <a:xfrm>
+            <a:off x="1789967" y="3334326"/>
+            <a:ext cx="443346" cy="392906"/>
+          </a:xfrm>
+          <a:prstGeom prst="verticalScroll">
+            <a:avLst/>
+          </a:prstGeom>
+        </p:spPr>
+        <p:style>
+          <a:lnRef idx="2">
+            <a:schemeClr val="accent1">
+              <a:shade val="15000"/>
+            </a:schemeClr>
+          </a:lnRef>
+          <a:fillRef idx="1">
+            <a:schemeClr val="accent1"/>
+          </a:fillRef>
+          <a:effectRef idx="0">
+            <a:schemeClr val="accent1"/>
+          </a:effectRef>
+          <a:fontRef idx="minor">
+            <a:schemeClr val="lt1"/>
+          </a:fontRef>
+        </p:style>
+        <p:txBody>
+          <a:bodyPr rtlCol="0" anchor="ctr"/>
+          <a:lstStyle/>
+          <a:p>
+            <a:pPr algn="ctr"/>
+            <a:endParaRPr lang="en-US"/>
+          </a:p>
+        </p:txBody>
+      </p:sp>
+      <p:sp>
+        <p:nvSpPr>
+          <p:cNvPr id="58" name="Scroll: Vertical 57">
+            <a:extLst>
+              <a:ext uri="{FF2B5EF4-FFF2-40B4-BE49-F238E27FC236}">
+                <a16:creationId xmlns:a16="http://schemas.microsoft.com/office/drawing/2014/main" id="{640DC75B-08C6-212C-1AAE-126C11DB511C}"/>
+              </a:ext>
+            </a:extLst>
+          </p:cNvPr>
+          <p:cNvSpPr/>
+          <p:nvPr/>
+        </p:nvSpPr>
+        <p:spPr>
+          <a:xfrm>
+            <a:off x="90475" y="4513354"/>
+            <a:ext cx="2978965" cy="2210719"/>
+          </a:xfrm>
+          <a:prstGeom prst="verticalScroll">
+            <a:avLst/>
+          </a:prstGeom>
+        </p:spPr>
+        <p:style>
+          <a:lnRef idx="2">
+            <a:schemeClr val="accent1">
+              <a:shade val="15000"/>
+            </a:schemeClr>
+          </a:lnRef>
+          <a:fillRef idx="1">
+            <a:schemeClr val="accent1"/>
+          </a:fillRef>
+          <a:effectRef idx="0">
+            <a:schemeClr val="accent1"/>
+          </a:effectRef>
+          <a:fontRef idx="minor">
+            <a:schemeClr val="lt1"/>
+          </a:fontRef>
+        </p:style>
+        <p:txBody>
+          <a:bodyPr rtlCol="0" anchor="ctr"/>
+          <a:lstStyle/>
+          <a:p>
+            <a:pPr algn="ctr"/>
+            <a:r>
+              <a:rPr lang="en-AU" dirty="0" err="1"/>
+              <a:t>MenuItem</a:t>
+            </a:r>
+            <a:endParaRPr lang="en-US" dirty="0"/>
+          </a:p>
+        </p:txBody>
+      </p:sp>
+      <p:sp>
+        <p:nvSpPr>
+          <p:cNvPr id="60" name="Rectangle: Rounded Corners 59">
+            <a:extLst>
+              <a:ext uri="{FF2B5EF4-FFF2-40B4-BE49-F238E27FC236}">
+                <a16:creationId xmlns:a16="http://schemas.microsoft.com/office/drawing/2014/main" id="{1F04ECC2-2618-4660-9F5B-A1B884E4CD4F}"/>
+              </a:ext>
+            </a:extLst>
+          </p:cNvPr>
+          <p:cNvSpPr/>
+          <p:nvPr/>
+        </p:nvSpPr>
+        <p:spPr>
+          <a:xfrm>
+            <a:off x="4081578" y="5537590"/>
+            <a:ext cx="1220394" cy="392906"/>
+          </a:xfrm>
+          <a:prstGeom prst="roundRect">
+            <a:avLst/>
+          </a:prstGeom>
+          <a:solidFill>
+            <a:schemeClr val="accent1">
+              <a:alpha val="21000"/>
+            </a:schemeClr>
+          </a:solidFill>
+        </p:spPr>
+        <p:style>
+          <a:lnRef idx="2">
+            <a:schemeClr val="accent1">
+              <a:shade val="15000"/>
+            </a:schemeClr>
+          </a:lnRef>
+          <a:fillRef idx="1">
+            <a:schemeClr val="accent1"/>
+          </a:fillRef>
+          <a:effectRef idx="0">
+            <a:schemeClr val="accent1"/>
+          </a:effectRef>
+          <a:fontRef idx="minor">
+            <a:schemeClr val="lt1"/>
+          </a:fontRef>
+        </p:style>
+        <p:txBody>
+          <a:bodyPr rtlCol="0" anchor="ctr"/>
+          <a:lstStyle/>
+          <a:p>
+            <a:pPr algn="ctr"/>
+            <a:r>
+              <a:rPr lang="en-AU" sz="1400" dirty="0">
+                <a:solidFill>
+                  <a:schemeClr val="tx1"/>
+                </a:solidFill>
+              </a:rPr>
+              <a:t>Application</a:t>
+            </a:r>
+            <a:endParaRPr lang="en-US" sz="1400" dirty="0">
+              <a:solidFill>
+                <a:schemeClr val="tx1"/>
+              </a:solidFill>
+            </a:endParaRPr>
+          </a:p>
+        </p:txBody>
+      </p:sp>
+      <p:sp>
+        <p:nvSpPr>
+          <p:cNvPr id="62" name="Rectangle: Rounded Corners 61">
+            <a:extLst>
+              <a:ext uri="{FF2B5EF4-FFF2-40B4-BE49-F238E27FC236}">
+                <a16:creationId xmlns:a16="http://schemas.microsoft.com/office/drawing/2014/main" id="{541E2CE8-0378-5B6E-D4E0-9F176614F40E}"/>
+              </a:ext>
+            </a:extLst>
+          </p:cNvPr>
+          <p:cNvSpPr/>
+          <p:nvPr/>
+        </p:nvSpPr>
+        <p:spPr>
+          <a:xfrm>
+            <a:off x="2823268" y="5537590"/>
+            <a:ext cx="1220394" cy="392906"/>
+          </a:xfrm>
+          <a:prstGeom prst="roundRect">
+            <a:avLst/>
+          </a:prstGeom>
+          <a:solidFill>
+            <a:schemeClr val="accent1">
+              <a:alpha val="21000"/>
+            </a:schemeClr>
+          </a:solidFill>
+        </p:spPr>
+        <p:style>
+          <a:lnRef idx="2">
+            <a:schemeClr val="accent1">
+              <a:shade val="15000"/>
+            </a:schemeClr>
+          </a:lnRef>
+          <a:fillRef idx="1">
+            <a:schemeClr val="accent1"/>
+          </a:fillRef>
+          <a:effectRef idx="0">
+            <a:schemeClr val="accent1"/>
+          </a:effectRef>
+          <a:fontRef idx="minor">
+            <a:schemeClr val="lt1"/>
+          </a:fontRef>
+        </p:style>
+        <p:txBody>
+          <a:bodyPr rtlCol="0" anchor="ctr"/>
+          <a:lstStyle/>
+          <a:p>
+            <a:pPr algn="ctr"/>
+            <a:r>
+              <a:rPr lang="en-AU" sz="1400" dirty="0">
+                <a:solidFill>
+                  <a:schemeClr val="tx1"/>
+                </a:solidFill>
+              </a:rPr>
+              <a:t>Role</a:t>
+            </a:r>
+            <a:endParaRPr lang="en-US" sz="1400" dirty="0">
+              <a:solidFill>
+                <a:schemeClr val="tx1"/>
+              </a:solidFill>
+            </a:endParaRPr>
+          </a:p>
+        </p:txBody>
+      </p:sp>
+      <p:pic>
+        <p:nvPicPr>
+          <p:cNvPr id="64" name="Graphic 63" descr="Programmer male outline">
+            <a:extLst>
+              <a:ext uri="{FF2B5EF4-FFF2-40B4-BE49-F238E27FC236}">
+                <a16:creationId xmlns:a16="http://schemas.microsoft.com/office/drawing/2014/main" id="{CC7F26EA-1F0D-F9E2-3B28-3240CBC0AA59}"/>
+              </a:ext>
+            </a:extLst>
+          </p:cNvPr>
+          <p:cNvPicPr>
+            <a:picLocks noChangeAspect="1"/>
+          </p:cNvPicPr>
+          <p:nvPr/>
+        </p:nvPicPr>
+        <p:blipFill>
+          <a:blip>
+            <a:extLst>
+              <a:ext uri="{96DAC541-7B7A-43D3-8B79-37D633B846F1}">
+                <asvg:svgBlip xmlns:asvg="http://schemas.microsoft.com/office/drawing/2016/SVG/main" r:embed="rId2"/>
+              </a:ext>
+            </a:extLst>
+          </a:blip>
+          <a:stretch>
+            <a:fillRect/>
+          </a:stretch>
+        </p:blipFill>
+        <p:spPr>
+          <a:xfrm>
+            <a:off x="9276110" y="4293158"/>
+            <a:ext cx="2255545" cy="2255545"/>
+          </a:xfrm>
+          <a:prstGeom prst="rect">
+            <a:avLst/>
+          </a:prstGeom>
+          <a:effectLst>
+            <a:outerShdw blurRad="50800" dist="127000" dir="2700000" algn="tl" rotWithShape="0">
+              <a:schemeClr val="accent1">
+                <a:alpha val="40000"/>
+              </a:schemeClr>
+            </a:outerShdw>
+          </a:effectLst>
+        </p:spPr>
+      </p:pic>
+      <p:sp>
+        <p:nvSpPr>
+          <p:cNvPr id="66" name="Rectangle: Rounded Corners 65">
+            <a:extLst>
+              <a:ext uri="{FF2B5EF4-FFF2-40B4-BE49-F238E27FC236}">
+                <a16:creationId xmlns:a16="http://schemas.microsoft.com/office/drawing/2014/main" id="{6BB1E8C6-ACD2-D8C8-000F-C8EF8B1241FC}"/>
+              </a:ext>
+            </a:extLst>
+          </p:cNvPr>
+          <p:cNvSpPr/>
+          <p:nvPr/>
+        </p:nvSpPr>
+        <p:spPr>
+          <a:xfrm>
+            <a:off x="8481989" y="5537590"/>
+            <a:ext cx="1220394" cy="392906"/>
+          </a:xfrm>
+          <a:prstGeom prst="roundRect">
+            <a:avLst/>
+          </a:prstGeom>
+          <a:solidFill>
+            <a:schemeClr val="accent1">
+              <a:alpha val="21000"/>
+            </a:schemeClr>
+          </a:solidFill>
+        </p:spPr>
+        <p:style>
+          <a:lnRef idx="2">
+            <a:schemeClr val="accent1">
+              <a:shade val="15000"/>
+            </a:schemeClr>
+          </a:lnRef>
+          <a:fillRef idx="1">
+            <a:schemeClr val="accent1"/>
+          </a:fillRef>
+          <a:effectRef idx="0">
+            <a:schemeClr val="accent1"/>
+          </a:effectRef>
+          <a:fontRef idx="minor">
+            <a:schemeClr val="lt1"/>
+          </a:fontRef>
+        </p:style>
+        <p:txBody>
+          <a:bodyPr rtlCol="0" anchor="ctr"/>
+          <a:lstStyle/>
+          <a:p>
+            <a:pPr algn="ctr"/>
+            <a:r>
+              <a:rPr lang="en-AU" sz="1400" dirty="0">
+                <a:solidFill>
+                  <a:schemeClr val="tx1"/>
+                </a:solidFill>
+              </a:rPr>
+              <a:t>Application</a:t>
+            </a:r>
+            <a:endParaRPr lang="en-US" sz="1400" dirty="0">
+              <a:solidFill>
+                <a:schemeClr val="tx1"/>
+              </a:solidFill>
+            </a:endParaRPr>
+          </a:p>
+        </p:txBody>
+      </p:sp>
+      <p:sp>
+        <p:nvSpPr>
+          <p:cNvPr id="68" name="Rectangle: Rounded Corners 67">
+            <a:extLst>
+              <a:ext uri="{FF2B5EF4-FFF2-40B4-BE49-F238E27FC236}">
+                <a16:creationId xmlns:a16="http://schemas.microsoft.com/office/drawing/2014/main" id="{8DA47CAB-1028-4D11-BDCA-3953B50F9B18}"/>
+              </a:ext>
+            </a:extLst>
+          </p:cNvPr>
+          <p:cNvSpPr/>
+          <p:nvPr/>
+        </p:nvSpPr>
+        <p:spPr>
+          <a:xfrm>
+            <a:off x="7223679" y="5537590"/>
+            <a:ext cx="1220394" cy="392906"/>
+          </a:xfrm>
+          <a:prstGeom prst="roundRect">
+            <a:avLst/>
+          </a:prstGeom>
+          <a:solidFill>
+            <a:schemeClr val="accent1">
+              <a:alpha val="21000"/>
+            </a:schemeClr>
+          </a:solidFill>
+        </p:spPr>
+        <p:style>
+          <a:lnRef idx="2">
+            <a:schemeClr val="accent1">
+              <a:shade val="15000"/>
+            </a:schemeClr>
+          </a:lnRef>
+          <a:fillRef idx="1">
+            <a:schemeClr val="accent1"/>
+          </a:fillRef>
+          <a:effectRef idx="0">
+            <a:schemeClr val="accent1"/>
+          </a:effectRef>
+          <a:fontRef idx="minor">
+            <a:schemeClr val="lt1"/>
+          </a:fontRef>
+        </p:style>
+        <p:txBody>
+          <a:bodyPr rtlCol="0" anchor="ctr"/>
+          <a:lstStyle/>
+          <a:p>
+            <a:pPr algn="ctr"/>
+            <a:r>
+              <a:rPr lang="en-AU" sz="1400" dirty="0">
+                <a:solidFill>
+                  <a:schemeClr val="tx1"/>
+                </a:solidFill>
+              </a:rPr>
+              <a:t>Role</a:t>
+            </a:r>
+            <a:endParaRPr lang="en-US" sz="1400" dirty="0">
+              <a:solidFill>
+                <a:schemeClr val="tx1"/>
+              </a:solidFill>
+            </a:endParaRPr>
+          </a:p>
+        </p:txBody>
+      </p:sp>
+    </p:spTree>
+    <p:extLst>
+      <p:ext uri="{BB962C8B-B14F-4D97-AF65-F5344CB8AC3E}">
+        <p14:creationId xmlns:p14="http://schemas.microsoft.com/office/powerpoint/2010/main" val="4033068262"/>
+      </p:ext>
+    </p:extLst>
+  </p:cSld>
+  <p:clrMapOvr>
+    <a:masterClrMapping/>
+  </p:clrMapOvr>
+</p:sld>
+</file>
+
+<file path=ppt/slides/slide20.xml><?xml version="1.0" encoding="utf-8"?>
 <p:sld xmlns:a="http://schemas.openxmlformats.org/drawingml/2006/main" xmlns:r="http://schemas.openxmlformats.org/officeDocument/2006/relationships" xmlns:p="http://schemas.openxmlformats.org/presentationml/2006/main">
   <p:cSld>
     <p:spTree>
@@ -7223,7 +9249,7 @@
 </p:sld>
 </file>
 
-<file path=ppt/slides/slide19.xml><?xml version="1.0" encoding="utf-8"?>
+<file path=ppt/slides/slide21.xml><?xml version="1.0" encoding="utf-8"?>
 <p:sld xmlns:a="http://schemas.openxmlformats.org/drawingml/2006/main" xmlns:r="http://schemas.openxmlformats.org/officeDocument/2006/relationships" xmlns:p="http://schemas.openxmlformats.org/presentationml/2006/main">
   <p:cSld>
     <p:spTree>
@@ -7523,757 +9549,7 @@
 </p:sld>
 </file>
 
-<file path=ppt/slides/slide2.xml><?xml version="1.0" encoding="utf-8"?>
-<p:sld xmlns:a="http://schemas.openxmlformats.org/drawingml/2006/main" xmlns:r="http://schemas.openxmlformats.org/officeDocument/2006/relationships" xmlns:p="http://schemas.openxmlformats.org/presentationml/2006/main">
-  <p:cSld>
-    <p:spTree>
-      <p:nvGrpSpPr>
-        <p:cNvPr id="1" name=""/>
-        <p:cNvGrpSpPr/>
-        <p:nvPr/>
-      </p:nvGrpSpPr>
-      <p:grpSpPr>
-        <a:xfrm>
-          <a:off x="0" y="0"/>
-          <a:ext cx="0" cy="0"/>
-          <a:chOff x="0" y="0"/>
-          <a:chExt cx="0" cy="0"/>
-        </a:xfrm>
-      </p:grpSpPr>
-      <p:pic>
-        <p:nvPicPr>
-          <p:cNvPr id="7" name="Graphic 6" descr="Bar graph with upward trend outline">
-            <a:extLst>
-              <a:ext uri="{FF2B5EF4-FFF2-40B4-BE49-F238E27FC236}">
-                <a16:creationId xmlns:a16="http://schemas.microsoft.com/office/drawing/2014/main" id="{9319D6AB-12E8-1C6C-C8CD-D00F53FDE481}"/>
-              </a:ext>
-            </a:extLst>
-          </p:cNvPr>
-          <p:cNvPicPr>
-            <a:picLocks noChangeAspect="1"/>
-          </p:cNvPicPr>
-          <p:nvPr/>
-        </p:nvPicPr>
-        <p:blipFill>
-          <a:blip>
-            <a:extLst>
-              <a:ext uri="{96DAC541-7B7A-43D3-8B79-37D633B846F1}">
-                <asvg:svgBlip xmlns:asvg="http://schemas.microsoft.com/office/drawing/2016/SVG/main" r:embed="rId2"/>
-              </a:ext>
-            </a:extLst>
-          </a:blip>
-          <a:stretch>
-            <a:fillRect/>
-          </a:stretch>
-        </p:blipFill>
-        <p:spPr>
-          <a:xfrm>
-            <a:off x="272750" y="949706"/>
-            <a:ext cx="914400" cy="914400"/>
-          </a:xfrm>
-          <a:prstGeom prst="rect">
-            <a:avLst/>
-          </a:prstGeom>
-        </p:spPr>
-      </p:pic>
-      <p:pic>
-        <p:nvPicPr>
-          <p:cNvPr id="9" name="Graphic 8" descr="Safe outline">
-            <a:extLst>
-              <a:ext uri="{FF2B5EF4-FFF2-40B4-BE49-F238E27FC236}">
-                <a16:creationId xmlns:a16="http://schemas.microsoft.com/office/drawing/2014/main" id="{3B13AFE1-EAA2-53CE-3AFF-4DF00A478155}"/>
-              </a:ext>
-            </a:extLst>
-          </p:cNvPr>
-          <p:cNvPicPr>
-            <a:picLocks noChangeAspect="1"/>
-          </p:cNvPicPr>
-          <p:nvPr/>
-        </p:nvPicPr>
-        <p:blipFill>
-          <a:blip>
-            <a:extLst>
-              <a:ext uri="{96DAC541-7B7A-43D3-8B79-37D633B846F1}">
-                <asvg:svgBlip xmlns:asvg="http://schemas.microsoft.com/office/drawing/2016/SVG/main" r:embed="rId3"/>
-              </a:ext>
-            </a:extLst>
-          </a:blip>
-          <a:stretch>
-            <a:fillRect/>
-          </a:stretch>
-        </p:blipFill>
-        <p:spPr>
-          <a:xfrm>
-            <a:off x="2117591" y="949706"/>
-            <a:ext cx="914400" cy="914400"/>
-          </a:xfrm>
-          <a:prstGeom prst="rect">
-            <a:avLst/>
-          </a:prstGeom>
-        </p:spPr>
-      </p:pic>
-      <p:pic>
-        <p:nvPicPr>
-          <p:cNvPr id="11" name="Graphic 10" descr="Money outline">
-            <a:extLst>
-              <a:ext uri="{FF2B5EF4-FFF2-40B4-BE49-F238E27FC236}">
-                <a16:creationId xmlns:a16="http://schemas.microsoft.com/office/drawing/2014/main" id="{250D3CC7-C146-7851-DA01-3218FD0DC76A}"/>
-              </a:ext>
-            </a:extLst>
-          </p:cNvPr>
-          <p:cNvPicPr>
-            <a:picLocks noChangeAspect="1"/>
-          </p:cNvPicPr>
-          <p:nvPr/>
-        </p:nvPicPr>
-        <p:blipFill>
-          <a:blip>
-            <a:extLst>
-              <a:ext uri="{96DAC541-7B7A-43D3-8B79-37D633B846F1}">
-                <asvg:svgBlip xmlns:asvg="http://schemas.microsoft.com/office/drawing/2016/SVG/main" r:embed="rId4"/>
-              </a:ext>
-            </a:extLst>
-          </a:blip>
-          <a:stretch>
-            <a:fillRect/>
-          </a:stretch>
-        </p:blipFill>
-        <p:spPr>
-          <a:xfrm>
-            <a:off x="920843" y="5208095"/>
-            <a:ext cx="914400" cy="914400"/>
-          </a:xfrm>
-          <a:prstGeom prst="rect">
-            <a:avLst/>
-          </a:prstGeom>
-        </p:spPr>
-      </p:pic>
-      <p:pic>
-        <p:nvPicPr>
-          <p:cNvPr id="13" name="Graphic 12" descr="Box trolley outline">
-            <a:extLst>
-              <a:ext uri="{FF2B5EF4-FFF2-40B4-BE49-F238E27FC236}">
-                <a16:creationId xmlns:a16="http://schemas.microsoft.com/office/drawing/2014/main" id="{B7677CDD-FC0D-E0CC-FA3D-071CE5911268}"/>
-              </a:ext>
-            </a:extLst>
-          </p:cNvPr>
-          <p:cNvPicPr>
-            <a:picLocks noChangeAspect="1"/>
-          </p:cNvPicPr>
-          <p:nvPr/>
-        </p:nvPicPr>
-        <p:blipFill>
-          <a:blip>
-            <a:extLst>
-              <a:ext uri="{96DAC541-7B7A-43D3-8B79-37D633B846F1}">
-                <asvg:svgBlip xmlns:asvg="http://schemas.microsoft.com/office/drawing/2016/SVG/main" r:embed="rId5"/>
-              </a:ext>
-            </a:extLst>
-          </a:blip>
-          <a:stretch>
-            <a:fillRect/>
-          </a:stretch>
-        </p:blipFill>
-        <p:spPr>
-          <a:xfrm>
-            <a:off x="2079427" y="3472105"/>
-            <a:ext cx="914400" cy="914400"/>
-          </a:xfrm>
-          <a:prstGeom prst="rect">
-            <a:avLst/>
-          </a:prstGeom>
-        </p:spPr>
-      </p:pic>
-      <p:pic>
-        <p:nvPicPr>
-          <p:cNvPr id="19" name="Graphic 18" descr="Gears outline">
-            <a:extLst>
-              <a:ext uri="{FF2B5EF4-FFF2-40B4-BE49-F238E27FC236}">
-                <a16:creationId xmlns:a16="http://schemas.microsoft.com/office/drawing/2014/main" id="{0FE9C919-D0B5-6EBD-13D6-39F63B6D5B8D}"/>
-              </a:ext>
-            </a:extLst>
-          </p:cNvPr>
-          <p:cNvPicPr>
-            <a:picLocks noChangeAspect="1"/>
-          </p:cNvPicPr>
-          <p:nvPr/>
-        </p:nvPicPr>
-        <p:blipFill>
-          <a:blip>
-            <a:extLst>
-              <a:ext uri="{96DAC541-7B7A-43D3-8B79-37D633B846F1}">
-                <asvg:svgBlip xmlns:asvg="http://schemas.microsoft.com/office/drawing/2016/SVG/main" r:embed="rId6"/>
-              </a:ext>
-            </a:extLst>
-          </a:blip>
-          <a:stretch>
-            <a:fillRect/>
-          </a:stretch>
-        </p:blipFill>
-        <p:spPr>
-          <a:xfrm>
-            <a:off x="351382" y="3316888"/>
-            <a:ext cx="914400" cy="914400"/>
-          </a:xfrm>
-          <a:prstGeom prst="rect">
-            <a:avLst/>
-          </a:prstGeom>
-        </p:spPr>
-      </p:pic>
-      <p:pic>
-        <p:nvPicPr>
-          <p:cNvPr id="45" name="Graphic 44" descr="Programmer male outline">
-            <a:extLst>
-              <a:ext uri="{FF2B5EF4-FFF2-40B4-BE49-F238E27FC236}">
-                <a16:creationId xmlns:a16="http://schemas.microsoft.com/office/drawing/2014/main" id="{AD64E529-55A1-89E6-614C-32967B57EED6}"/>
-              </a:ext>
-            </a:extLst>
-          </p:cNvPr>
-          <p:cNvPicPr>
-            <a:picLocks noChangeAspect="1"/>
-          </p:cNvPicPr>
-          <p:nvPr/>
-        </p:nvPicPr>
-        <p:blipFill>
-          <a:blip>
-            <a:extLst>
-              <a:ext uri="{96DAC541-7B7A-43D3-8B79-37D633B846F1}">
-                <asvg:svgBlip xmlns:asvg="http://schemas.microsoft.com/office/drawing/2016/SVG/main" r:embed="rId7"/>
-              </a:ext>
-            </a:extLst>
-          </a:blip>
-          <a:stretch>
-            <a:fillRect/>
-          </a:stretch>
-        </p:blipFill>
-        <p:spPr>
-          <a:xfrm>
-            <a:off x="5527313" y="2443779"/>
-            <a:ext cx="914400" cy="914400"/>
-          </a:xfrm>
-          <a:prstGeom prst="rect">
-            <a:avLst/>
-          </a:prstGeom>
-        </p:spPr>
-      </p:pic>
-      <p:pic>
-        <p:nvPicPr>
-          <p:cNvPr id="47" name="Graphic 46" descr="Programmer female outline">
-            <a:extLst>
-              <a:ext uri="{FF2B5EF4-FFF2-40B4-BE49-F238E27FC236}">
-                <a16:creationId xmlns:a16="http://schemas.microsoft.com/office/drawing/2014/main" id="{22879E9B-440C-4380-CFB4-1826E3C458BE}"/>
-              </a:ext>
-            </a:extLst>
-          </p:cNvPr>
-          <p:cNvPicPr>
-            <a:picLocks noChangeAspect="1"/>
-          </p:cNvPicPr>
-          <p:nvPr/>
-        </p:nvPicPr>
-        <p:blipFill>
-          <a:blip>
-            <a:extLst>
-              <a:ext uri="{96DAC541-7B7A-43D3-8B79-37D633B846F1}">
-                <asvg:svgBlip xmlns:asvg="http://schemas.microsoft.com/office/drawing/2016/SVG/main" r:embed="rId8"/>
-              </a:ext>
-            </a:extLst>
-          </a:blip>
-          <a:stretch>
-            <a:fillRect/>
-          </a:stretch>
-        </p:blipFill>
-        <p:spPr>
-          <a:xfrm>
-            <a:off x="4304556" y="2402488"/>
-            <a:ext cx="914400" cy="914400"/>
-          </a:xfrm>
-          <a:prstGeom prst="rect">
-            <a:avLst/>
-          </a:prstGeom>
-        </p:spPr>
-      </p:pic>
-      <p:pic>
-        <p:nvPicPr>
-          <p:cNvPr id="49" name="Graphic 48" descr="Cloud Computing outline">
-            <a:extLst>
-              <a:ext uri="{FF2B5EF4-FFF2-40B4-BE49-F238E27FC236}">
-                <a16:creationId xmlns:a16="http://schemas.microsoft.com/office/drawing/2014/main" id="{DF1251D9-CCFF-EE79-D051-F99B1DC3269B}"/>
-              </a:ext>
-            </a:extLst>
-          </p:cNvPr>
-          <p:cNvPicPr>
-            <a:picLocks noChangeAspect="1"/>
-          </p:cNvPicPr>
-          <p:nvPr/>
-        </p:nvPicPr>
-        <p:blipFill>
-          <a:blip>
-            <a:extLst>
-              <a:ext uri="{96DAC541-7B7A-43D3-8B79-37D633B846F1}">
-                <asvg:svgBlip xmlns:asvg="http://schemas.microsoft.com/office/drawing/2016/SVG/main" r:embed="rId9"/>
-              </a:ext>
-            </a:extLst>
-          </a:blip>
-          <a:stretch>
-            <a:fillRect/>
-          </a:stretch>
-        </p:blipFill>
-        <p:spPr>
-          <a:xfrm>
-            <a:off x="6757349" y="1099895"/>
-            <a:ext cx="914400" cy="914400"/>
-          </a:xfrm>
-          <a:prstGeom prst="rect">
-            <a:avLst/>
-          </a:prstGeom>
-        </p:spPr>
-      </p:pic>
-      <p:pic>
-        <p:nvPicPr>
-          <p:cNvPr id="51" name="Graphic 50" descr="Laptop outline">
-            <a:extLst>
-              <a:ext uri="{FF2B5EF4-FFF2-40B4-BE49-F238E27FC236}">
-                <a16:creationId xmlns:a16="http://schemas.microsoft.com/office/drawing/2014/main" id="{F812DC0F-948E-2D52-41C0-0C3B22E4BB23}"/>
-              </a:ext>
-            </a:extLst>
-          </p:cNvPr>
-          <p:cNvPicPr>
-            <a:picLocks noChangeAspect="1"/>
-          </p:cNvPicPr>
-          <p:nvPr/>
-        </p:nvPicPr>
-        <p:blipFill>
-          <a:blip>
-            <a:extLst>
-              <a:ext uri="{96DAC541-7B7A-43D3-8B79-37D633B846F1}">
-                <asvg:svgBlip xmlns:asvg="http://schemas.microsoft.com/office/drawing/2016/SVG/main" r:embed="rId10"/>
-              </a:ext>
-            </a:extLst>
-          </a:blip>
-          <a:stretch>
-            <a:fillRect/>
-          </a:stretch>
-        </p:blipFill>
-        <p:spPr>
-          <a:xfrm>
-            <a:off x="8808241" y="4278893"/>
-            <a:ext cx="914400" cy="914400"/>
-          </a:xfrm>
-          <a:prstGeom prst="rect">
-            <a:avLst/>
-          </a:prstGeom>
-        </p:spPr>
-      </p:pic>
-      <p:pic>
-        <p:nvPicPr>
-          <p:cNvPr id="53" name="Graphic 52" descr="Hierarchy outline">
-            <a:extLst>
-              <a:ext uri="{FF2B5EF4-FFF2-40B4-BE49-F238E27FC236}">
-                <a16:creationId xmlns:a16="http://schemas.microsoft.com/office/drawing/2014/main" id="{4B7FD792-AC35-D53F-D1A5-E0845F6DC2FC}"/>
-              </a:ext>
-            </a:extLst>
-          </p:cNvPr>
-          <p:cNvPicPr>
-            <a:picLocks noChangeAspect="1"/>
-          </p:cNvPicPr>
-          <p:nvPr/>
-        </p:nvPicPr>
-        <p:blipFill>
-          <a:blip>
-            <a:extLst>
-              <a:ext uri="{96DAC541-7B7A-43D3-8B79-37D633B846F1}">
-                <asvg:svgBlip xmlns:asvg="http://schemas.microsoft.com/office/drawing/2016/SVG/main" r:embed="rId11"/>
-              </a:ext>
-            </a:extLst>
-          </a:blip>
-          <a:stretch>
-            <a:fillRect/>
-          </a:stretch>
-        </p:blipFill>
-        <p:spPr>
-          <a:xfrm>
-            <a:off x="3232142" y="5531803"/>
-            <a:ext cx="914400" cy="914400"/>
-          </a:xfrm>
-          <a:prstGeom prst="rect">
-            <a:avLst/>
-          </a:prstGeom>
-        </p:spPr>
-      </p:pic>
-      <p:pic>
-        <p:nvPicPr>
-          <p:cNvPr id="55" name="Graphic 54" descr="Upward trend outline">
-            <a:extLst>
-              <a:ext uri="{FF2B5EF4-FFF2-40B4-BE49-F238E27FC236}">
-                <a16:creationId xmlns:a16="http://schemas.microsoft.com/office/drawing/2014/main" id="{2A8DDF75-7A9D-F0CE-0A36-421A4E64C1CE}"/>
-              </a:ext>
-            </a:extLst>
-          </p:cNvPr>
-          <p:cNvPicPr>
-            <a:picLocks noChangeAspect="1"/>
-          </p:cNvPicPr>
-          <p:nvPr/>
-        </p:nvPicPr>
-        <p:blipFill>
-          <a:blip>
-            <a:extLst>
-              <a:ext uri="{96DAC541-7B7A-43D3-8B79-37D633B846F1}">
-                <asvg:svgBlip xmlns:asvg="http://schemas.microsoft.com/office/drawing/2016/SVG/main" r:embed="rId12"/>
-              </a:ext>
-            </a:extLst>
-          </a:blip>
-          <a:stretch>
-            <a:fillRect/>
-          </a:stretch>
-        </p:blipFill>
-        <p:spPr>
-          <a:xfrm>
-            <a:off x="5638800" y="5075487"/>
-            <a:ext cx="914400" cy="914400"/>
-          </a:xfrm>
-          <a:prstGeom prst="rect">
-            <a:avLst/>
-          </a:prstGeom>
-        </p:spPr>
-      </p:pic>
-      <p:pic>
-        <p:nvPicPr>
-          <p:cNvPr id="59" name="Graphic 58" descr="Office worker female outline">
-            <a:extLst>
-              <a:ext uri="{FF2B5EF4-FFF2-40B4-BE49-F238E27FC236}">
-                <a16:creationId xmlns:a16="http://schemas.microsoft.com/office/drawing/2014/main" id="{E6DBE0BD-218F-0999-4E32-0FAE8E505A50}"/>
-              </a:ext>
-            </a:extLst>
-          </p:cNvPr>
-          <p:cNvPicPr>
-            <a:picLocks noChangeAspect="1"/>
-          </p:cNvPicPr>
-          <p:nvPr/>
-        </p:nvPicPr>
-        <p:blipFill>
-          <a:blip>
-            <a:extLst>
-              <a:ext uri="{96DAC541-7B7A-43D3-8B79-37D633B846F1}">
-                <asvg:svgBlip xmlns:asvg="http://schemas.microsoft.com/office/drawing/2016/SVG/main" r:embed="rId13"/>
-              </a:ext>
-            </a:extLst>
-          </a:blip>
-          <a:stretch>
-            <a:fillRect/>
-          </a:stretch>
-        </p:blipFill>
-        <p:spPr>
-          <a:xfrm>
-            <a:off x="8055160" y="2402488"/>
-            <a:ext cx="914400" cy="914400"/>
-          </a:xfrm>
-          <a:prstGeom prst="rect">
-            <a:avLst/>
-          </a:prstGeom>
-        </p:spPr>
-      </p:pic>
-      <p:pic>
-        <p:nvPicPr>
-          <p:cNvPr id="61" name="Graphic 60" descr="Office worker male outline">
-            <a:extLst>
-              <a:ext uri="{FF2B5EF4-FFF2-40B4-BE49-F238E27FC236}">
-                <a16:creationId xmlns:a16="http://schemas.microsoft.com/office/drawing/2014/main" id="{CF2C3399-2123-9D89-8394-24C29FB3031E}"/>
-              </a:ext>
-            </a:extLst>
-          </p:cNvPr>
-          <p:cNvPicPr>
-            <a:picLocks noChangeAspect="1"/>
-          </p:cNvPicPr>
-          <p:nvPr/>
-        </p:nvPicPr>
-        <p:blipFill>
-          <a:blip>
-            <a:extLst>
-              <a:ext uri="{96DAC541-7B7A-43D3-8B79-37D633B846F1}">
-                <asvg:svgBlip xmlns:asvg="http://schemas.microsoft.com/office/drawing/2016/SVG/main" r:embed="rId14"/>
-              </a:ext>
-            </a:extLst>
-          </a:blip>
-          <a:stretch>
-            <a:fillRect/>
-          </a:stretch>
-        </p:blipFill>
-        <p:spPr>
-          <a:xfrm>
-            <a:off x="8980158" y="2528978"/>
-            <a:ext cx="914400" cy="914400"/>
-          </a:xfrm>
-          <a:prstGeom prst="rect">
-            <a:avLst/>
-          </a:prstGeom>
-        </p:spPr>
-      </p:pic>
-      <p:pic>
-        <p:nvPicPr>
-          <p:cNvPr id="65" name="Graphic 64" descr="Medical outline">
-            <a:extLst>
-              <a:ext uri="{FF2B5EF4-FFF2-40B4-BE49-F238E27FC236}">
-                <a16:creationId xmlns:a16="http://schemas.microsoft.com/office/drawing/2014/main" id="{3F13009F-07B0-B4A4-58BE-6FC90C6702ED}"/>
-              </a:ext>
-            </a:extLst>
-          </p:cNvPr>
-          <p:cNvPicPr>
-            <a:picLocks noChangeAspect="1"/>
-          </p:cNvPicPr>
-          <p:nvPr/>
-        </p:nvPicPr>
-        <p:blipFill>
-          <a:blip>
-            <a:extLst>
-              <a:ext uri="{96DAC541-7B7A-43D3-8B79-37D633B846F1}">
-                <asvg:svgBlip xmlns:asvg="http://schemas.microsoft.com/office/drawing/2016/SVG/main" r:embed="rId15"/>
-              </a:ext>
-            </a:extLst>
-          </a:blip>
-          <a:stretch>
-            <a:fillRect/>
-          </a:stretch>
-        </p:blipFill>
-        <p:spPr>
-          <a:xfrm>
-            <a:off x="8033379" y="5222809"/>
-            <a:ext cx="914400" cy="914400"/>
-          </a:xfrm>
-          <a:prstGeom prst="rect">
-            <a:avLst/>
-          </a:prstGeom>
-        </p:spPr>
-      </p:pic>
-      <p:pic>
-        <p:nvPicPr>
-          <p:cNvPr id="67" name="Graphic 66" descr="Stethoscope outline">
-            <a:extLst>
-              <a:ext uri="{FF2B5EF4-FFF2-40B4-BE49-F238E27FC236}">
-                <a16:creationId xmlns:a16="http://schemas.microsoft.com/office/drawing/2014/main" id="{64593343-9EA8-471D-1020-A6D5FDBF66D9}"/>
-              </a:ext>
-            </a:extLst>
-          </p:cNvPr>
-          <p:cNvPicPr>
-            <a:picLocks noChangeAspect="1"/>
-          </p:cNvPicPr>
-          <p:nvPr/>
-        </p:nvPicPr>
-        <p:blipFill>
-          <a:blip>
-            <a:extLst>
-              <a:ext uri="{96DAC541-7B7A-43D3-8B79-37D633B846F1}">
-                <asvg:svgBlip xmlns:asvg="http://schemas.microsoft.com/office/drawing/2016/SVG/main" r:embed="rId16"/>
-              </a:ext>
-            </a:extLst>
-          </a:blip>
-          <a:stretch>
-            <a:fillRect/>
-          </a:stretch>
-        </p:blipFill>
-        <p:spPr>
-          <a:xfrm>
-            <a:off x="9267488" y="5222809"/>
-            <a:ext cx="914400" cy="914400"/>
-          </a:xfrm>
-          <a:prstGeom prst="rect">
-            <a:avLst/>
-          </a:prstGeom>
-        </p:spPr>
-      </p:pic>
-      <p:pic>
-        <p:nvPicPr>
-          <p:cNvPr id="69" name="Graphic 68" descr="Clipboard Checked outline">
-            <a:extLst>
-              <a:ext uri="{FF2B5EF4-FFF2-40B4-BE49-F238E27FC236}">
-                <a16:creationId xmlns:a16="http://schemas.microsoft.com/office/drawing/2014/main" id="{68CD3164-0AD3-1A01-46AE-01EEB305DA78}"/>
-              </a:ext>
-            </a:extLst>
-          </p:cNvPr>
-          <p:cNvPicPr>
-            <a:picLocks noChangeAspect="1"/>
-          </p:cNvPicPr>
-          <p:nvPr/>
-        </p:nvPicPr>
-        <p:blipFill>
-          <a:blip>
-            <a:extLst>
-              <a:ext uri="{96DAC541-7B7A-43D3-8B79-37D633B846F1}">
-                <asvg:svgBlip xmlns:asvg="http://schemas.microsoft.com/office/drawing/2016/SVG/main" r:embed="rId17"/>
-              </a:ext>
-            </a:extLst>
-          </a:blip>
-          <a:stretch>
-            <a:fillRect/>
-          </a:stretch>
-        </p:blipFill>
-        <p:spPr>
-          <a:xfrm>
-            <a:off x="10288570" y="949706"/>
-            <a:ext cx="914400" cy="914400"/>
-          </a:xfrm>
-          <a:prstGeom prst="rect">
-            <a:avLst/>
-          </a:prstGeom>
-        </p:spPr>
-      </p:pic>
-      <p:pic>
-        <p:nvPicPr>
-          <p:cNvPr id="71" name="Graphic 70" descr="Handshake outline">
-            <a:extLst>
-              <a:ext uri="{FF2B5EF4-FFF2-40B4-BE49-F238E27FC236}">
-                <a16:creationId xmlns:a16="http://schemas.microsoft.com/office/drawing/2014/main" id="{D13D95FE-039A-E0B9-A748-C09E8EE2C18D}"/>
-              </a:ext>
-            </a:extLst>
-          </p:cNvPr>
-          <p:cNvPicPr>
-            <a:picLocks noChangeAspect="1"/>
-          </p:cNvPicPr>
-          <p:nvPr/>
-        </p:nvPicPr>
-        <p:blipFill>
-          <a:blip>
-            <a:extLst>
-              <a:ext uri="{96DAC541-7B7A-43D3-8B79-37D633B846F1}">
-                <asvg:svgBlip xmlns:asvg="http://schemas.microsoft.com/office/drawing/2016/SVG/main" r:embed="rId18"/>
-              </a:ext>
-            </a:extLst>
-          </a:blip>
-          <a:stretch>
-            <a:fillRect/>
-          </a:stretch>
-        </p:blipFill>
-        <p:spPr>
-          <a:xfrm>
-            <a:off x="10606082" y="4561749"/>
-            <a:ext cx="914400" cy="914400"/>
-          </a:xfrm>
-          <a:prstGeom prst="rect">
-            <a:avLst/>
-          </a:prstGeom>
-        </p:spPr>
-      </p:pic>
-      <p:pic>
-        <p:nvPicPr>
-          <p:cNvPr id="73" name="Graphic 72" descr="Monthly calendar outline">
-            <a:extLst>
-              <a:ext uri="{FF2B5EF4-FFF2-40B4-BE49-F238E27FC236}">
-                <a16:creationId xmlns:a16="http://schemas.microsoft.com/office/drawing/2014/main" id="{662344A3-E292-490A-550A-C8CF827CB036}"/>
-              </a:ext>
-            </a:extLst>
-          </p:cNvPr>
-          <p:cNvPicPr>
-            <a:picLocks noChangeAspect="1"/>
-          </p:cNvPicPr>
-          <p:nvPr/>
-        </p:nvPicPr>
-        <p:blipFill>
-          <a:blip>
-            <a:extLst>
-              <a:ext uri="{96DAC541-7B7A-43D3-8B79-37D633B846F1}">
-                <asvg:svgBlip xmlns:asvg="http://schemas.microsoft.com/office/drawing/2016/SVG/main" r:embed="rId19"/>
-              </a:ext>
-            </a:extLst>
-          </a:blip>
-          <a:stretch>
-            <a:fillRect/>
-          </a:stretch>
-        </p:blipFill>
-        <p:spPr>
-          <a:xfrm>
-            <a:off x="11012304" y="5836200"/>
-            <a:ext cx="914400" cy="914400"/>
-          </a:xfrm>
-          <a:prstGeom prst="rect">
-            <a:avLst/>
-          </a:prstGeom>
-        </p:spPr>
-      </p:pic>
-      <p:pic>
-        <p:nvPicPr>
-          <p:cNvPr id="75" name="Graphic 74" descr="Unlock outline">
-            <a:extLst>
-              <a:ext uri="{FF2B5EF4-FFF2-40B4-BE49-F238E27FC236}">
-                <a16:creationId xmlns:a16="http://schemas.microsoft.com/office/drawing/2014/main" id="{468485E0-3E41-21AE-7402-01D70A34CAF0}"/>
-              </a:ext>
-            </a:extLst>
-          </p:cNvPr>
-          <p:cNvPicPr>
-            <a:picLocks noChangeAspect="1"/>
-          </p:cNvPicPr>
-          <p:nvPr/>
-        </p:nvPicPr>
-        <p:blipFill>
-          <a:blip>
-            <a:extLst>
-              <a:ext uri="{96DAC541-7B7A-43D3-8B79-37D633B846F1}">
-                <asvg:svgBlip xmlns:asvg="http://schemas.microsoft.com/office/drawing/2016/SVG/main" r:embed="rId20"/>
-              </a:ext>
-            </a:extLst>
-          </a:blip>
-          <a:stretch>
-            <a:fillRect/>
-          </a:stretch>
-        </p:blipFill>
-        <p:spPr>
-          <a:xfrm>
-            <a:off x="4528410" y="3647349"/>
-            <a:ext cx="914400" cy="914400"/>
-          </a:xfrm>
-          <a:prstGeom prst="rect">
-            <a:avLst/>
-          </a:prstGeom>
-        </p:spPr>
-      </p:pic>
-      <p:pic>
-        <p:nvPicPr>
-          <p:cNvPr id="77" name="Graphic 76" descr="Lock outline">
-            <a:extLst>
-              <a:ext uri="{FF2B5EF4-FFF2-40B4-BE49-F238E27FC236}">
-                <a16:creationId xmlns:a16="http://schemas.microsoft.com/office/drawing/2014/main" id="{10871F3B-2629-C43B-68B6-9CAFC5CE6CFA}"/>
-              </a:ext>
-            </a:extLst>
-          </p:cNvPr>
-          <p:cNvPicPr>
-            <a:picLocks noChangeAspect="1"/>
-          </p:cNvPicPr>
-          <p:nvPr/>
-        </p:nvPicPr>
-        <p:blipFill>
-          <a:blip>
-            <a:extLst>
-              <a:ext uri="{96DAC541-7B7A-43D3-8B79-37D633B846F1}">
-                <asvg:svgBlip xmlns:asvg="http://schemas.microsoft.com/office/drawing/2016/SVG/main" r:embed="rId21"/>
-              </a:ext>
-            </a:extLst>
-          </a:blip>
-          <a:stretch>
-            <a:fillRect/>
-          </a:stretch>
-        </p:blipFill>
-        <p:spPr>
-          <a:xfrm>
-            <a:off x="6977394" y="3886200"/>
-            <a:ext cx="914400" cy="914400"/>
-          </a:xfrm>
-          <a:prstGeom prst="rect">
-            <a:avLst/>
-          </a:prstGeom>
-        </p:spPr>
-      </p:pic>
-    </p:spTree>
-    <p:extLst>
-      <p:ext uri="{BB962C8B-B14F-4D97-AF65-F5344CB8AC3E}">
-        <p14:creationId xmlns:p14="http://schemas.microsoft.com/office/powerpoint/2010/main" val="2683265105"/>
-      </p:ext>
-    </p:extLst>
-  </p:cSld>
-  <p:clrMapOvr>
-    <a:masterClrMapping/>
-  </p:clrMapOvr>
-</p:sld>
-</file>
-
-<file path=ppt/slides/slide20.xml><?xml version="1.0" encoding="utf-8"?>
+<file path=ppt/slides/slide22.xml><?xml version="1.0" encoding="utf-8"?>
 <p:sld xmlns:a="http://schemas.openxmlformats.org/drawingml/2006/main" xmlns:r="http://schemas.openxmlformats.org/officeDocument/2006/relationships" xmlns:p="http://schemas.openxmlformats.org/presentationml/2006/main">
   <p:cSld>
     <p:spTree>
@@ -8509,7 +9785,7 @@
 </p:sld>
 </file>
 
-<file path=ppt/slides/slide21.xml><?xml version="1.0" encoding="utf-8"?>
+<file path=ppt/slides/slide23.xml><?xml version="1.0" encoding="utf-8"?>
 <p:sld xmlns:a="http://schemas.openxmlformats.org/drawingml/2006/main" xmlns:r="http://schemas.openxmlformats.org/officeDocument/2006/relationships" xmlns:p="http://schemas.openxmlformats.org/presentationml/2006/main">
   <p:cSld>
     <p:spTree>
@@ -8741,7 +10017,7 @@
 </p:sld>
 </file>
 
-<file path=ppt/slides/slide22.xml><?xml version="1.0" encoding="utf-8"?>
+<file path=ppt/slides/slide24.xml><?xml version="1.0" encoding="utf-8"?>
 <p:sld xmlns:a="http://schemas.openxmlformats.org/drawingml/2006/main" xmlns:r="http://schemas.openxmlformats.org/officeDocument/2006/relationships" xmlns:p="http://schemas.openxmlformats.org/presentationml/2006/main">
   <p:cSld>
     <p:spTree>
@@ -10023,7 +11299,7 @@
 </p:sld>
 </file>
 
-<file path=ppt/slides/slide23.xml><?xml version="1.0" encoding="utf-8"?>
+<file path=ppt/slides/slide25.xml><?xml version="1.0" encoding="utf-8"?>
 <p:sld xmlns:a="http://schemas.openxmlformats.org/drawingml/2006/main" xmlns:r="http://schemas.openxmlformats.org/officeDocument/2006/relationships" xmlns:p="http://schemas.openxmlformats.org/presentationml/2006/main">
   <p:cSld>
     <p:spTree>
@@ -11081,7 +12357,7 @@
 </p:sld>
 </file>
 
-<file path=ppt/slides/slide24.xml><?xml version="1.0" encoding="utf-8"?>
+<file path=ppt/slides/slide26.xml><?xml version="1.0" encoding="utf-8"?>
 <p:sld xmlns:a="http://schemas.openxmlformats.org/drawingml/2006/main" xmlns:r="http://schemas.openxmlformats.org/officeDocument/2006/relationships" xmlns:p="http://schemas.openxmlformats.org/presentationml/2006/main">
   <p:cSld>
     <p:spTree>
@@ -11611,7 +12887,7 @@
 </p:sld>
 </file>
 
-<file path=ppt/slides/slide25.xml><?xml version="1.0" encoding="utf-8"?>
+<file path=ppt/slides/slide27.xml><?xml version="1.0" encoding="utf-8"?>
 <p:sld xmlns:a="http://schemas.openxmlformats.org/drawingml/2006/main" xmlns:r="http://schemas.openxmlformats.org/officeDocument/2006/relationships" xmlns:p="http://schemas.openxmlformats.org/presentationml/2006/main">
   <p:cSld>
     <p:spTree>
@@ -11840,7 +13116,7 @@
 </p:sld>
 </file>
 
-<file path=ppt/slides/slide26.xml><?xml version="1.0" encoding="utf-8"?>
+<file path=ppt/slides/slide28.xml><?xml version="1.0" encoding="utf-8"?>
 <p:sld xmlns:a="http://schemas.openxmlformats.org/drawingml/2006/main" xmlns:r="http://schemas.openxmlformats.org/officeDocument/2006/relationships" xmlns:p="http://schemas.openxmlformats.org/presentationml/2006/main">
   <p:cSld>
     <p:spTree>
@@ -12540,7 +13816,7 @@
 </p:sld>
 </file>
 
-<file path=ppt/slides/slide27.xml><?xml version="1.0" encoding="utf-8"?>
+<file path=ppt/slides/slide29.xml><?xml version="1.0" encoding="utf-8"?>
 <p:sld xmlns:a="http://schemas.openxmlformats.org/drawingml/2006/main" xmlns:r="http://schemas.openxmlformats.org/officeDocument/2006/relationships" xmlns:p="http://schemas.openxmlformats.org/presentationml/2006/main">
   <p:cSld>
     <p:spTree>
@@ -13087,7 +14363,415 @@
 </p:sld>
 </file>
 
-<file path=ppt/slides/slide28.xml><?xml version="1.0" encoding="utf-8"?>
+<file path=ppt/slides/slide3.xml><?xml version="1.0" encoding="utf-8"?>
+<p:sld xmlns:a="http://schemas.openxmlformats.org/drawingml/2006/main" xmlns:r="http://schemas.openxmlformats.org/officeDocument/2006/relationships" xmlns:p="http://schemas.openxmlformats.org/presentationml/2006/main">
+  <p:cSld>
+    <p:spTree>
+      <p:nvGrpSpPr>
+        <p:cNvPr id="1" name=""/>
+        <p:cNvGrpSpPr/>
+        <p:nvPr/>
+      </p:nvGrpSpPr>
+      <p:grpSpPr>
+        <a:xfrm>
+          <a:off x="0" y="0"/>
+          <a:ext cx="0" cy="0"/>
+          <a:chOff x="0" y="0"/>
+          <a:chExt cx="0" cy="0"/>
+        </a:xfrm>
+      </p:grpSpPr>
+      <p:sp>
+        <p:nvSpPr>
+          <p:cNvPr id="2" name="TextBox 1">
+            <a:extLst>
+              <a:ext uri="{FF2B5EF4-FFF2-40B4-BE49-F238E27FC236}">
+                <a16:creationId xmlns:a16="http://schemas.microsoft.com/office/drawing/2014/main" id="{D4E8DBFF-2419-7498-5EEF-89C7C906A03C}"/>
+              </a:ext>
+            </a:extLst>
+          </p:cNvPr>
+          <p:cNvSpPr txBox="1"/>
+          <p:nvPr/>
+        </p:nvSpPr>
+        <p:spPr>
+          <a:xfrm>
+            <a:off x="188259" y="376518"/>
+            <a:ext cx="11878235" cy="2893100"/>
+          </a:xfrm>
+          <a:prstGeom prst="rect">
+            <a:avLst/>
+          </a:prstGeom>
+          <a:noFill/>
+        </p:spPr>
+        <p:txBody>
+          <a:bodyPr wrap="square" rtlCol="0">
+            <a:spAutoFit/>
+          </a:bodyPr>
+          <a:lstStyle/>
+          <a:p>
+            <a:r>
+              <a:rPr lang="en-AU" sz="1400" b="1" dirty="0"/>
+              <a:t>Generate Database Structure</a:t>
+            </a:r>
+            <a:r>
+              <a:rPr lang="en-AU" sz="1400" dirty="0"/>
+              <a:t>.</a:t>
+            </a:r>
+            <a:br>
+              <a:rPr lang="en-AU" sz="1400" dirty="0"/>
+            </a:br>
+            <a:r>
+              <a:rPr lang="en-AU" sz="1400" dirty="0"/>
+              <a:t>------------------------------------------- </a:t>
+            </a:r>
+            <a:br>
+              <a:rPr lang="en-AU" sz="1400" dirty="0"/>
+            </a:br>
+            <a:r>
+              <a:rPr lang="en-AU" sz="1400" dirty="0"/>
+              <a:t>When creating migration script for a system :</a:t>
+            </a:r>
+          </a:p>
+          <a:p>
+            <a:r>
+              <a:rPr lang="en-AU" sz="1400" dirty="0"/>
+              <a:t>1- go to </a:t>
+            </a:r>
+            <a:r>
+              <a:rPr lang="en-AU" sz="1400" dirty="0" err="1"/>
+              <a:t>appsettings.development</a:t>
+            </a:r>
+            <a:r>
+              <a:rPr lang="en-AU" sz="1400" dirty="0"/>
+              <a:t>.</a:t>
+            </a:r>
+          </a:p>
+          <a:p>
+            <a:r>
+              <a:rPr lang="en-AU" sz="1400" dirty="0"/>
+              <a:t>2-Set </a:t>
+            </a:r>
+            <a:r>
+              <a:rPr lang="en-AU" sz="1400" dirty="0" err="1"/>
+              <a:t>isMigrationEnabled</a:t>
+            </a:r>
+            <a:r>
+              <a:rPr lang="en-AU" sz="1400" dirty="0"/>
+              <a:t> = true.</a:t>
+            </a:r>
+          </a:p>
+          <a:p>
+            <a:r>
+              <a:rPr lang="en-AU" sz="1400" dirty="0"/>
+              <a:t>3- open </a:t>
+            </a:r>
+            <a:r>
+              <a:rPr lang="en-AU" sz="1400" dirty="0" err="1"/>
+              <a:t>nuget</a:t>
+            </a:r>
+            <a:r>
+              <a:rPr lang="en-AU" sz="1400" dirty="0"/>
+              <a:t> package console.</a:t>
+            </a:r>
+          </a:p>
+          <a:p>
+            <a:r>
+              <a:rPr lang="en-AU" sz="1400" dirty="0"/>
+              <a:t>4-choose </a:t>
+            </a:r>
+            <a:r>
+              <a:rPr lang="en-AU" sz="1400" dirty="0" err="1"/>
+              <a:t>system.data</a:t>
+            </a:r>
+            <a:r>
+              <a:rPr lang="en-AU" sz="1400" dirty="0"/>
+              <a:t> in console.</a:t>
+            </a:r>
+          </a:p>
+          <a:p>
+            <a:r>
+              <a:rPr lang="en-AU" sz="1400" dirty="0"/>
+              <a:t>5- Write command </a:t>
+            </a:r>
+            <a:r>
+              <a:rPr lang="en-AU" sz="1400" dirty="0">
+                <a:solidFill>
+                  <a:srgbClr val="C00000"/>
+                </a:solidFill>
+              </a:rPr>
+              <a:t>add-migration (</a:t>
+            </a:r>
+            <a:r>
+              <a:rPr lang="en-AU" sz="1400" dirty="0" err="1">
+                <a:solidFill>
+                  <a:srgbClr val="C00000"/>
+                </a:solidFill>
+              </a:rPr>
+              <a:t>migrationScriptName</a:t>
+            </a:r>
+            <a:r>
+              <a:rPr lang="en-AU" sz="1400" dirty="0">
+                <a:solidFill>
+                  <a:srgbClr val="C00000"/>
+                </a:solidFill>
+              </a:rPr>
+              <a:t>) </a:t>
+            </a:r>
+            <a:r>
+              <a:rPr lang="en-AU" sz="1400" dirty="0"/>
+              <a:t>for example </a:t>
+            </a:r>
+            <a:r>
+              <a:rPr lang="en-AU" sz="1400" dirty="0" err="1"/>
+              <a:t>init_stockEx</a:t>
+            </a:r>
+            <a:r>
+              <a:rPr lang="en-AU" sz="1400" dirty="0"/>
+              <a:t>.</a:t>
+            </a:r>
+          </a:p>
+          <a:p>
+            <a:r>
+              <a:rPr lang="en-AU" sz="1400" dirty="0"/>
+              <a:t>6- write command </a:t>
+            </a:r>
+            <a:r>
+              <a:rPr lang="en-AU" sz="1400" dirty="0">
+                <a:solidFill>
+                  <a:srgbClr val="C00000"/>
+                </a:solidFill>
+              </a:rPr>
+              <a:t>update-database</a:t>
+            </a:r>
+            <a:r>
+              <a:rPr lang="en-AU" sz="1400" dirty="0"/>
+              <a:t>. Which applies to the hardcoded connection (migration connection)</a:t>
+            </a:r>
+          </a:p>
+          <a:p>
+            <a:r>
+              <a:rPr lang="en-AU" sz="1400" dirty="0"/>
+              <a:t>7- migration connection only used to keep track of migration scripts and database structure.</a:t>
+            </a:r>
+          </a:p>
+          <a:p>
+            <a:r>
+              <a:rPr lang="en-AU" sz="1400" dirty="0"/>
+              <a:t>8- after running the above </a:t>
+            </a:r>
+            <a:r>
+              <a:rPr lang="en-AU" sz="1400" dirty="0" err="1"/>
+              <a:t>command.run</a:t>
+            </a:r>
+            <a:r>
+              <a:rPr lang="en-AU" sz="1400" dirty="0"/>
+              <a:t> Api. </a:t>
+            </a:r>
+            <a:r>
+              <a:rPr lang="en-AU" sz="1400" dirty="0">
+                <a:solidFill>
+                  <a:srgbClr val="C00000"/>
+                </a:solidFill>
+              </a:rPr>
+              <a:t>Run admin \ migrate </a:t>
+            </a:r>
+            <a:br>
+              <a:rPr lang="en-AU" sz="1400" dirty="0"/>
+            </a:br>
+            <a:r>
+              <a:rPr lang="en-AU" sz="1400" dirty="0"/>
+              <a:t>9- go to </a:t>
+            </a:r>
+            <a:r>
+              <a:rPr lang="en-AU" sz="1400" dirty="0" err="1"/>
+              <a:t>appsettings.development</a:t>
+            </a:r>
+            <a:r>
+              <a:rPr lang="en-AU" sz="1400" dirty="0"/>
+              <a:t>.</a:t>
+            </a:r>
+          </a:p>
+          <a:p>
+            <a:r>
+              <a:rPr lang="en-AU" sz="1400" dirty="0"/>
+              <a:t>10-Set </a:t>
+            </a:r>
+            <a:r>
+              <a:rPr lang="en-AU" sz="1400" dirty="0" err="1"/>
+              <a:t>isMigrationEnabled</a:t>
+            </a:r>
+            <a:r>
+              <a:rPr lang="en-AU" sz="1400" dirty="0"/>
+              <a:t> = false.</a:t>
+            </a:r>
+          </a:p>
+        </p:txBody>
+      </p:sp>
+      <p:sp>
+        <p:nvSpPr>
+          <p:cNvPr id="4" name="TextBox 3">
+            <a:extLst>
+              <a:ext uri="{FF2B5EF4-FFF2-40B4-BE49-F238E27FC236}">
+                <a16:creationId xmlns:a16="http://schemas.microsoft.com/office/drawing/2014/main" id="{0D2DDE2B-283A-57EE-EF72-3C7FB58D76F6}"/>
+              </a:ext>
+            </a:extLst>
+          </p:cNvPr>
+          <p:cNvSpPr txBox="1"/>
+          <p:nvPr/>
+        </p:nvSpPr>
+        <p:spPr>
+          <a:xfrm>
+            <a:off x="188258" y="3588383"/>
+            <a:ext cx="11878235" cy="2462213"/>
+          </a:xfrm>
+          <a:prstGeom prst="rect">
+            <a:avLst/>
+          </a:prstGeom>
+          <a:noFill/>
+        </p:spPr>
+        <p:txBody>
+          <a:bodyPr wrap="square" rtlCol="0">
+            <a:spAutoFit/>
+          </a:bodyPr>
+          <a:lstStyle/>
+          <a:p>
+            <a:r>
+              <a:rPr lang="en-AU" sz="1400" b="1" dirty="0">
+                <a:solidFill>
+                  <a:srgbClr val="C00000"/>
+                </a:solidFill>
+              </a:rPr>
+              <a:t>New Tenant</a:t>
+            </a:r>
+            <a:r>
+              <a:rPr lang="en-AU" sz="1400" dirty="0"/>
+              <a:t>:</a:t>
+            </a:r>
+            <a:br>
+              <a:rPr lang="en-AU" sz="1400" dirty="0"/>
+            </a:br>
+            <a:r>
+              <a:rPr lang="en-AU" sz="1400" b="1" dirty="0"/>
+              <a:t>Definitions</a:t>
+            </a:r>
+            <a:br>
+              <a:rPr lang="en-AU" sz="1400" dirty="0"/>
+            </a:br>
+            <a:r>
+              <a:rPr lang="en-AU" sz="1400" dirty="0"/>
+              <a:t>- Run </a:t>
+            </a:r>
+            <a:r>
+              <a:rPr lang="en-AU" sz="1400" dirty="0" err="1"/>
+              <a:t>Aspire.App</a:t>
+            </a:r>
+            <a:r>
+              <a:rPr lang="en-AU" sz="1400" dirty="0"/>
+              <a:t>.</a:t>
+            </a:r>
+          </a:p>
+          <a:p>
+            <a:pPr marL="285750" indent="-285750">
+              <a:buFontTx/>
+              <a:buChar char="-"/>
+            </a:pPr>
+            <a:r>
+              <a:rPr lang="en-AU" sz="1400" dirty="0"/>
+              <a:t>Select Tenant Amgad</a:t>
+            </a:r>
+            <a:br>
+              <a:rPr lang="en-AU" sz="1400" dirty="0"/>
+            </a:br>
+            <a:r>
+              <a:rPr lang="en-AU" sz="1400" dirty="0"/>
+              <a:t>- Select System Master</a:t>
+            </a:r>
+            <a:br>
+              <a:rPr lang="en-AU" sz="1400" dirty="0"/>
+            </a:br>
+            <a:r>
+              <a:rPr lang="en-AU" sz="1400" dirty="0"/>
+              <a:t>- Select Basic \ Tenants \ New Tenant</a:t>
+            </a:r>
+            <a:br>
+              <a:rPr lang="en-AU" sz="1400" dirty="0"/>
+            </a:br>
+            <a:r>
+              <a:rPr lang="en-AU" sz="1400" dirty="0"/>
+              <a:t>- Define </a:t>
+            </a:r>
+            <a:r>
+              <a:rPr lang="en-AU" sz="1400" dirty="0" err="1"/>
+              <a:t>Tenant.DatabaseConnection</a:t>
+            </a:r>
+            <a:br>
+              <a:rPr lang="en-AU" sz="1400" dirty="0"/>
+            </a:br>
+            <a:r>
+              <a:rPr lang="en-AU" sz="1400" dirty="0"/>
+              <a:t>- Define Systems under this tenant.</a:t>
+            </a:r>
+            <a:br>
+              <a:rPr lang="en-AU" sz="1400" dirty="0"/>
+            </a:br>
+            <a:r>
+              <a:rPr lang="en-AU" sz="1400" dirty="0"/>
+              <a:t>Then</a:t>
+            </a:r>
+            <a:br>
+              <a:rPr lang="en-AU" sz="1400" dirty="0"/>
+            </a:br>
+            <a:r>
+              <a:rPr lang="en-AU" sz="1400" b="1" dirty="0"/>
+              <a:t>Generate Database Structure. For each System of </a:t>
+            </a:r>
+            <a:r>
+              <a:rPr lang="en-AU" sz="1400" b="1" dirty="0" err="1"/>
+              <a:t>BestFit</a:t>
+            </a:r>
+            <a:r>
+              <a:rPr lang="en-AU" sz="1400" b="1" dirty="0"/>
+              <a:t> Systems (e.g. Auth Api, </a:t>
+            </a:r>
+            <a:r>
+              <a:rPr lang="en-AU" sz="1400" b="1" dirty="0" err="1"/>
+              <a:t>StockEx</a:t>
+            </a:r>
+            <a:r>
+              <a:rPr lang="en-AU" sz="1400" b="1" dirty="0"/>
+              <a:t> Api, Payroll Api, ..)</a:t>
+            </a:r>
+          </a:p>
+          <a:p>
+            <a:pPr marL="285750" indent="-285750">
+              <a:buFontTx/>
+              <a:buChar char="-"/>
+            </a:pPr>
+            <a:r>
+              <a:rPr lang="en-AU" sz="1400" b="1" dirty="0"/>
+              <a:t>For each system we do the </a:t>
+            </a:r>
+            <a:r>
+              <a:rPr lang="en-AU" sz="1400" b="1"/>
+              <a:t>above steps (1, 2 , 8 , 9 , 10)</a:t>
+            </a:r>
+            <a:endParaRPr lang="en-US" sz="1400" dirty="0"/>
+          </a:p>
+        </p:txBody>
+      </p:sp>
+    </p:spTree>
+    <p:extLst>
+      <p:ext uri="{BB962C8B-B14F-4D97-AF65-F5344CB8AC3E}">
+        <p14:creationId xmlns:p14="http://schemas.microsoft.com/office/powerpoint/2010/main" val="1499035851"/>
+      </p:ext>
+    </p:extLst>
+  </p:cSld>
+  <p:clrMapOvr>
+    <a:masterClrMapping/>
+  </p:clrMapOvr>
+</p:sld>
+</file>
+
+<file path=ppt/slides/slide30.xml><?xml version="1.0" encoding="utf-8"?>
 <p:sld xmlns:a="http://schemas.openxmlformats.org/drawingml/2006/main" xmlns:r="http://schemas.openxmlformats.org/officeDocument/2006/relationships" xmlns:p="http://schemas.openxmlformats.org/presentationml/2006/main">
   <p:cSld>
     <p:spTree>
@@ -14894,7 +16578,7 @@
 </p:sld>
 </file>
 
-<file path=ppt/slides/slide29.xml><?xml version="1.0" encoding="utf-8"?>
+<file path=ppt/slides/slide31.xml><?xml version="1.0" encoding="utf-8"?>
 <p:sld xmlns:a="http://schemas.openxmlformats.org/drawingml/2006/main" xmlns:r="http://schemas.openxmlformats.org/officeDocument/2006/relationships" xmlns:p="http://schemas.openxmlformats.org/presentationml/2006/main">
   <p:cSld>
     <p:spTree>
@@ -16463,109 +18147,7 @@
 </p:sld>
 </file>
 
-<file path=ppt/slides/slide3.xml><?xml version="1.0" encoding="utf-8"?>
-<p:sld xmlns:a="http://schemas.openxmlformats.org/drawingml/2006/main" xmlns:r="http://schemas.openxmlformats.org/officeDocument/2006/relationships" xmlns:p="http://schemas.openxmlformats.org/presentationml/2006/main">
-  <p:cSld>
-    <p:spTree>
-      <p:nvGrpSpPr>
-        <p:cNvPr id="1" name=""/>
-        <p:cNvGrpSpPr/>
-        <p:nvPr/>
-      </p:nvGrpSpPr>
-      <p:grpSpPr>
-        <a:xfrm>
-          <a:off x="0" y="0"/>
-          <a:ext cx="0" cy="0"/>
-          <a:chOff x="0" y="0"/>
-          <a:chExt cx="0" cy="0"/>
-        </a:xfrm>
-      </p:grpSpPr>
-      <p:pic>
-        <p:nvPicPr>
-          <p:cNvPr id="21" name="Graphic 20">
-            <a:extLst>
-              <a:ext uri="{FF2B5EF4-FFF2-40B4-BE49-F238E27FC236}">
-                <a16:creationId xmlns:a16="http://schemas.microsoft.com/office/drawing/2014/main" id="{231CCD0D-C8D9-9647-5BA4-1BA74972F3BB}"/>
-              </a:ext>
-            </a:extLst>
-          </p:cNvPr>
-          <p:cNvPicPr>
-            <a:picLocks noChangeAspect="1"/>
-          </p:cNvPicPr>
-          <p:nvPr/>
-        </p:nvPicPr>
-        <p:blipFill>
-          <a:blip>
-            <a:extLst>
-              <a:ext uri="{96DAC541-7B7A-43D3-8B79-37D633B846F1}">
-                <asvg:svgBlip xmlns:asvg="http://schemas.microsoft.com/office/drawing/2016/SVG/main" r:embed="rId2"/>
-              </a:ext>
-            </a:extLst>
-          </a:blip>
-          <a:stretch>
-            <a:fillRect/>
-          </a:stretch>
-        </p:blipFill>
-        <p:spPr>
-          <a:xfrm>
-            <a:off x="-102245" y="0"/>
-            <a:ext cx="7535732" cy="6858000"/>
-          </a:xfrm>
-          <a:prstGeom prst="rect">
-            <a:avLst/>
-          </a:prstGeom>
-        </p:spPr>
-      </p:pic>
-      <p:pic>
-        <p:nvPicPr>
-          <p:cNvPr id="23" name="Graphic 22">
-            <a:extLst>
-              <a:ext uri="{FF2B5EF4-FFF2-40B4-BE49-F238E27FC236}">
-                <a16:creationId xmlns:a16="http://schemas.microsoft.com/office/drawing/2014/main" id="{C0601813-09BB-43EE-B72C-DEC8D1E1FEC6}"/>
-              </a:ext>
-            </a:extLst>
-          </p:cNvPr>
-          <p:cNvPicPr>
-            <a:picLocks noChangeAspect="1"/>
-          </p:cNvPicPr>
-          <p:nvPr/>
-        </p:nvPicPr>
-        <p:blipFill>
-          <a:blip>
-            <a:extLst>
-              <a:ext uri="{96DAC541-7B7A-43D3-8B79-37D633B846F1}">
-                <asvg:svgBlip xmlns:asvg="http://schemas.microsoft.com/office/drawing/2016/SVG/main" r:embed="rId3"/>
-              </a:ext>
-            </a:extLst>
-          </a:blip>
-          <a:stretch>
-            <a:fillRect/>
-          </a:stretch>
-        </p:blipFill>
-        <p:spPr>
-          <a:xfrm>
-            <a:off x="4656268" y="0"/>
-            <a:ext cx="7535732" cy="6858000"/>
-          </a:xfrm>
-          <a:prstGeom prst="rect">
-            <a:avLst/>
-          </a:prstGeom>
-        </p:spPr>
-      </p:pic>
-    </p:spTree>
-    <p:extLst>
-      <p:ext uri="{BB962C8B-B14F-4D97-AF65-F5344CB8AC3E}">
-        <p14:creationId xmlns:p14="http://schemas.microsoft.com/office/powerpoint/2010/main" val="1906776293"/>
-      </p:ext>
-    </p:extLst>
-  </p:cSld>
-  <p:clrMapOvr>
-    <a:masterClrMapping/>
-  </p:clrMapOvr>
-</p:sld>
-</file>
-
-<file path=ppt/slides/slide30.xml><?xml version="1.0" encoding="utf-8"?>
+<file path=ppt/slides/slide32.xml><?xml version="1.0" encoding="utf-8"?>
 <p:sld xmlns:a="http://schemas.openxmlformats.org/drawingml/2006/main" xmlns:r="http://schemas.openxmlformats.org/officeDocument/2006/relationships" xmlns:p="http://schemas.openxmlformats.org/presentationml/2006/main">
   <p:cSld>
     <p:spTree>
@@ -17695,7 +19277,7 @@
 </p:sld>
 </file>
 
-<file path=ppt/slides/slide31.xml><?xml version="1.0" encoding="utf-8"?>
+<file path=ppt/slides/slide33.xml><?xml version="1.0" encoding="utf-8"?>
 <p:sld xmlns:a="http://schemas.openxmlformats.org/drawingml/2006/main" xmlns:r="http://schemas.openxmlformats.org/officeDocument/2006/relationships" xmlns:p="http://schemas.openxmlformats.org/presentationml/2006/main">
   <p:cSld>
     <p:spTree>
@@ -19173,7 +20755,7 @@
 </p:sld>
 </file>
 
-<file path=ppt/slides/slide32.xml><?xml version="1.0" encoding="utf-8"?>
+<file path=ppt/slides/slide34.xml><?xml version="1.0" encoding="utf-8"?>
 <p:sld xmlns:a="http://schemas.openxmlformats.org/drawingml/2006/main" xmlns:r="http://schemas.openxmlformats.org/officeDocument/2006/relationships" xmlns:p="http://schemas.openxmlformats.org/presentationml/2006/main">
   <p:cSld>
     <p:spTree>
@@ -19701,7 +21283,7 @@
 </p:sld>
 </file>
 
-<file path=ppt/slides/slide33.xml><?xml version="1.0" encoding="utf-8"?>
+<file path=ppt/slides/slide35.xml><?xml version="1.0" encoding="utf-8"?>
 <p:sld xmlns:a="http://schemas.openxmlformats.org/drawingml/2006/main" xmlns:r="http://schemas.openxmlformats.org/officeDocument/2006/relationships" xmlns:p="http://schemas.openxmlformats.org/presentationml/2006/main">
   <p:cSld>
     <p:spTree>
@@ -20562,7 +22144,7 @@
 </p:sld>
 </file>
 
-<file path=ppt/slides/slide34.xml><?xml version="1.0" encoding="utf-8"?>
+<file path=ppt/slides/slide36.xml><?xml version="1.0" encoding="utf-8"?>
 <p:sld xmlns:a="http://schemas.openxmlformats.org/drawingml/2006/main" xmlns:r="http://schemas.openxmlformats.org/officeDocument/2006/relationships" xmlns:p="http://schemas.openxmlformats.org/presentationml/2006/main">
   <p:cSld>
     <p:spTree>
@@ -20889,7 +22471,7 @@
 </p:sld>
 </file>
 
-<file path=ppt/slides/slide35.xml><?xml version="1.0" encoding="utf-8"?>
+<file path=ppt/slides/slide37.xml><?xml version="1.0" encoding="utf-8"?>
 <p:sld xmlns:a="http://schemas.openxmlformats.org/drawingml/2006/main" xmlns:r="http://schemas.openxmlformats.org/officeDocument/2006/relationships" xmlns:p="http://schemas.openxmlformats.org/presentationml/2006/main">
   <p:cSld>
     <p:spTree>
@@ -21158,6 +22740,858 @@
 </file>
 
 <file path=ppt/slides/slide4.xml><?xml version="1.0" encoding="utf-8"?>
+<p:sld xmlns:a="http://schemas.openxmlformats.org/drawingml/2006/main" xmlns:r="http://schemas.openxmlformats.org/officeDocument/2006/relationships" xmlns:p="http://schemas.openxmlformats.org/presentationml/2006/main">
+  <p:cSld>
+    <p:spTree>
+      <p:nvGrpSpPr>
+        <p:cNvPr id="1" name=""/>
+        <p:cNvGrpSpPr/>
+        <p:nvPr/>
+      </p:nvGrpSpPr>
+      <p:grpSpPr>
+        <a:xfrm>
+          <a:off x="0" y="0"/>
+          <a:ext cx="0" cy="0"/>
+          <a:chOff x="0" y="0"/>
+          <a:chExt cx="0" cy="0"/>
+        </a:xfrm>
+      </p:grpSpPr>
+      <p:pic>
+        <p:nvPicPr>
+          <p:cNvPr id="7" name="Graphic 6" descr="Bar graph with upward trend outline">
+            <a:extLst>
+              <a:ext uri="{FF2B5EF4-FFF2-40B4-BE49-F238E27FC236}">
+                <a16:creationId xmlns:a16="http://schemas.microsoft.com/office/drawing/2014/main" id="{9319D6AB-12E8-1C6C-C8CD-D00F53FDE481}"/>
+              </a:ext>
+            </a:extLst>
+          </p:cNvPr>
+          <p:cNvPicPr>
+            <a:picLocks noChangeAspect="1"/>
+          </p:cNvPicPr>
+          <p:nvPr/>
+        </p:nvPicPr>
+        <p:blipFill>
+          <a:blip>
+            <a:extLst>
+              <a:ext uri="{96DAC541-7B7A-43D3-8B79-37D633B846F1}">
+                <asvg:svgBlip xmlns:asvg="http://schemas.microsoft.com/office/drawing/2016/SVG/main" r:embed="rId2"/>
+              </a:ext>
+            </a:extLst>
+          </a:blip>
+          <a:stretch>
+            <a:fillRect/>
+          </a:stretch>
+        </p:blipFill>
+        <p:spPr>
+          <a:xfrm>
+            <a:off x="272750" y="949706"/>
+            <a:ext cx="914400" cy="914400"/>
+          </a:xfrm>
+          <a:prstGeom prst="rect">
+            <a:avLst/>
+          </a:prstGeom>
+        </p:spPr>
+      </p:pic>
+      <p:pic>
+        <p:nvPicPr>
+          <p:cNvPr id="9" name="Graphic 8" descr="Safe outline">
+            <a:extLst>
+              <a:ext uri="{FF2B5EF4-FFF2-40B4-BE49-F238E27FC236}">
+                <a16:creationId xmlns:a16="http://schemas.microsoft.com/office/drawing/2014/main" id="{3B13AFE1-EAA2-53CE-3AFF-4DF00A478155}"/>
+              </a:ext>
+            </a:extLst>
+          </p:cNvPr>
+          <p:cNvPicPr>
+            <a:picLocks noChangeAspect="1"/>
+          </p:cNvPicPr>
+          <p:nvPr/>
+        </p:nvPicPr>
+        <p:blipFill>
+          <a:blip>
+            <a:extLst>
+              <a:ext uri="{96DAC541-7B7A-43D3-8B79-37D633B846F1}">
+                <asvg:svgBlip xmlns:asvg="http://schemas.microsoft.com/office/drawing/2016/SVG/main" r:embed="rId3"/>
+              </a:ext>
+            </a:extLst>
+          </a:blip>
+          <a:stretch>
+            <a:fillRect/>
+          </a:stretch>
+        </p:blipFill>
+        <p:spPr>
+          <a:xfrm>
+            <a:off x="2117591" y="949706"/>
+            <a:ext cx="914400" cy="914400"/>
+          </a:xfrm>
+          <a:prstGeom prst="rect">
+            <a:avLst/>
+          </a:prstGeom>
+        </p:spPr>
+      </p:pic>
+      <p:pic>
+        <p:nvPicPr>
+          <p:cNvPr id="11" name="Graphic 10" descr="Money outline">
+            <a:extLst>
+              <a:ext uri="{FF2B5EF4-FFF2-40B4-BE49-F238E27FC236}">
+                <a16:creationId xmlns:a16="http://schemas.microsoft.com/office/drawing/2014/main" id="{250D3CC7-C146-7851-DA01-3218FD0DC76A}"/>
+              </a:ext>
+            </a:extLst>
+          </p:cNvPr>
+          <p:cNvPicPr>
+            <a:picLocks noChangeAspect="1"/>
+          </p:cNvPicPr>
+          <p:nvPr/>
+        </p:nvPicPr>
+        <p:blipFill>
+          <a:blip>
+            <a:extLst>
+              <a:ext uri="{96DAC541-7B7A-43D3-8B79-37D633B846F1}">
+                <asvg:svgBlip xmlns:asvg="http://schemas.microsoft.com/office/drawing/2016/SVG/main" r:embed="rId4"/>
+              </a:ext>
+            </a:extLst>
+          </a:blip>
+          <a:stretch>
+            <a:fillRect/>
+          </a:stretch>
+        </p:blipFill>
+        <p:spPr>
+          <a:xfrm>
+            <a:off x="920843" y="5208095"/>
+            <a:ext cx="914400" cy="914400"/>
+          </a:xfrm>
+          <a:prstGeom prst="rect">
+            <a:avLst/>
+          </a:prstGeom>
+        </p:spPr>
+      </p:pic>
+      <p:pic>
+        <p:nvPicPr>
+          <p:cNvPr id="13" name="Graphic 12" descr="Box trolley outline">
+            <a:extLst>
+              <a:ext uri="{FF2B5EF4-FFF2-40B4-BE49-F238E27FC236}">
+                <a16:creationId xmlns:a16="http://schemas.microsoft.com/office/drawing/2014/main" id="{B7677CDD-FC0D-E0CC-FA3D-071CE5911268}"/>
+              </a:ext>
+            </a:extLst>
+          </p:cNvPr>
+          <p:cNvPicPr>
+            <a:picLocks noChangeAspect="1"/>
+          </p:cNvPicPr>
+          <p:nvPr/>
+        </p:nvPicPr>
+        <p:blipFill>
+          <a:blip>
+            <a:extLst>
+              <a:ext uri="{96DAC541-7B7A-43D3-8B79-37D633B846F1}">
+                <asvg:svgBlip xmlns:asvg="http://schemas.microsoft.com/office/drawing/2016/SVG/main" r:embed="rId5"/>
+              </a:ext>
+            </a:extLst>
+          </a:blip>
+          <a:stretch>
+            <a:fillRect/>
+          </a:stretch>
+        </p:blipFill>
+        <p:spPr>
+          <a:xfrm>
+            <a:off x="2079427" y="3472105"/>
+            <a:ext cx="914400" cy="914400"/>
+          </a:xfrm>
+          <a:prstGeom prst="rect">
+            <a:avLst/>
+          </a:prstGeom>
+        </p:spPr>
+      </p:pic>
+      <p:pic>
+        <p:nvPicPr>
+          <p:cNvPr id="19" name="Graphic 18" descr="Gears outline">
+            <a:extLst>
+              <a:ext uri="{FF2B5EF4-FFF2-40B4-BE49-F238E27FC236}">
+                <a16:creationId xmlns:a16="http://schemas.microsoft.com/office/drawing/2014/main" id="{0FE9C919-D0B5-6EBD-13D6-39F63B6D5B8D}"/>
+              </a:ext>
+            </a:extLst>
+          </p:cNvPr>
+          <p:cNvPicPr>
+            <a:picLocks noChangeAspect="1"/>
+          </p:cNvPicPr>
+          <p:nvPr/>
+        </p:nvPicPr>
+        <p:blipFill>
+          <a:blip>
+            <a:extLst>
+              <a:ext uri="{96DAC541-7B7A-43D3-8B79-37D633B846F1}">
+                <asvg:svgBlip xmlns:asvg="http://schemas.microsoft.com/office/drawing/2016/SVG/main" r:embed="rId6"/>
+              </a:ext>
+            </a:extLst>
+          </a:blip>
+          <a:stretch>
+            <a:fillRect/>
+          </a:stretch>
+        </p:blipFill>
+        <p:spPr>
+          <a:xfrm>
+            <a:off x="351382" y="3316888"/>
+            <a:ext cx="914400" cy="914400"/>
+          </a:xfrm>
+          <a:prstGeom prst="rect">
+            <a:avLst/>
+          </a:prstGeom>
+        </p:spPr>
+      </p:pic>
+      <p:pic>
+        <p:nvPicPr>
+          <p:cNvPr id="45" name="Graphic 44" descr="Programmer male outline">
+            <a:extLst>
+              <a:ext uri="{FF2B5EF4-FFF2-40B4-BE49-F238E27FC236}">
+                <a16:creationId xmlns:a16="http://schemas.microsoft.com/office/drawing/2014/main" id="{AD64E529-55A1-89E6-614C-32967B57EED6}"/>
+              </a:ext>
+            </a:extLst>
+          </p:cNvPr>
+          <p:cNvPicPr>
+            <a:picLocks noChangeAspect="1"/>
+          </p:cNvPicPr>
+          <p:nvPr/>
+        </p:nvPicPr>
+        <p:blipFill>
+          <a:blip>
+            <a:extLst>
+              <a:ext uri="{96DAC541-7B7A-43D3-8B79-37D633B846F1}">
+                <asvg:svgBlip xmlns:asvg="http://schemas.microsoft.com/office/drawing/2016/SVG/main" r:embed="rId7"/>
+              </a:ext>
+            </a:extLst>
+          </a:blip>
+          <a:stretch>
+            <a:fillRect/>
+          </a:stretch>
+        </p:blipFill>
+        <p:spPr>
+          <a:xfrm>
+            <a:off x="5527313" y="2443779"/>
+            <a:ext cx="914400" cy="914400"/>
+          </a:xfrm>
+          <a:prstGeom prst="rect">
+            <a:avLst/>
+          </a:prstGeom>
+        </p:spPr>
+      </p:pic>
+      <p:pic>
+        <p:nvPicPr>
+          <p:cNvPr id="47" name="Graphic 46" descr="Programmer female outline">
+            <a:extLst>
+              <a:ext uri="{FF2B5EF4-FFF2-40B4-BE49-F238E27FC236}">
+                <a16:creationId xmlns:a16="http://schemas.microsoft.com/office/drawing/2014/main" id="{22879E9B-440C-4380-CFB4-1826E3C458BE}"/>
+              </a:ext>
+            </a:extLst>
+          </p:cNvPr>
+          <p:cNvPicPr>
+            <a:picLocks noChangeAspect="1"/>
+          </p:cNvPicPr>
+          <p:nvPr/>
+        </p:nvPicPr>
+        <p:blipFill>
+          <a:blip>
+            <a:extLst>
+              <a:ext uri="{96DAC541-7B7A-43D3-8B79-37D633B846F1}">
+                <asvg:svgBlip xmlns:asvg="http://schemas.microsoft.com/office/drawing/2016/SVG/main" r:embed="rId8"/>
+              </a:ext>
+            </a:extLst>
+          </a:blip>
+          <a:stretch>
+            <a:fillRect/>
+          </a:stretch>
+        </p:blipFill>
+        <p:spPr>
+          <a:xfrm>
+            <a:off x="4304556" y="2402488"/>
+            <a:ext cx="914400" cy="914400"/>
+          </a:xfrm>
+          <a:prstGeom prst="rect">
+            <a:avLst/>
+          </a:prstGeom>
+        </p:spPr>
+      </p:pic>
+      <p:pic>
+        <p:nvPicPr>
+          <p:cNvPr id="49" name="Graphic 48" descr="Cloud Computing outline">
+            <a:extLst>
+              <a:ext uri="{FF2B5EF4-FFF2-40B4-BE49-F238E27FC236}">
+                <a16:creationId xmlns:a16="http://schemas.microsoft.com/office/drawing/2014/main" id="{DF1251D9-CCFF-EE79-D051-F99B1DC3269B}"/>
+              </a:ext>
+            </a:extLst>
+          </p:cNvPr>
+          <p:cNvPicPr>
+            <a:picLocks noChangeAspect="1"/>
+          </p:cNvPicPr>
+          <p:nvPr/>
+        </p:nvPicPr>
+        <p:blipFill>
+          <a:blip>
+            <a:extLst>
+              <a:ext uri="{96DAC541-7B7A-43D3-8B79-37D633B846F1}">
+                <asvg:svgBlip xmlns:asvg="http://schemas.microsoft.com/office/drawing/2016/SVG/main" r:embed="rId9"/>
+              </a:ext>
+            </a:extLst>
+          </a:blip>
+          <a:stretch>
+            <a:fillRect/>
+          </a:stretch>
+        </p:blipFill>
+        <p:spPr>
+          <a:xfrm>
+            <a:off x="6757349" y="1099895"/>
+            <a:ext cx="914400" cy="914400"/>
+          </a:xfrm>
+          <a:prstGeom prst="rect">
+            <a:avLst/>
+          </a:prstGeom>
+        </p:spPr>
+      </p:pic>
+      <p:pic>
+        <p:nvPicPr>
+          <p:cNvPr id="51" name="Graphic 50" descr="Laptop outline">
+            <a:extLst>
+              <a:ext uri="{FF2B5EF4-FFF2-40B4-BE49-F238E27FC236}">
+                <a16:creationId xmlns:a16="http://schemas.microsoft.com/office/drawing/2014/main" id="{F812DC0F-948E-2D52-41C0-0C3B22E4BB23}"/>
+              </a:ext>
+            </a:extLst>
+          </p:cNvPr>
+          <p:cNvPicPr>
+            <a:picLocks noChangeAspect="1"/>
+          </p:cNvPicPr>
+          <p:nvPr/>
+        </p:nvPicPr>
+        <p:blipFill>
+          <a:blip>
+            <a:extLst>
+              <a:ext uri="{96DAC541-7B7A-43D3-8B79-37D633B846F1}">
+                <asvg:svgBlip xmlns:asvg="http://schemas.microsoft.com/office/drawing/2016/SVG/main" r:embed="rId10"/>
+              </a:ext>
+            </a:extLst>
+          </a:blip>
+          <a:stretch>
+            <a:fillRect/>
+          </a:stretch>
+        </p:blipFill>
+        <p:spPr>
+          <a:xfrm>
+            <a:off x="8808241" y="4278893"/>
+            <a:ext cx="914400" cy="914400"/>
+          </a:xfrm>
+          <a:prstGeom prst="rect">
+            <a:avLst/>
+          </a:prstGeom>
+        </p:spPr>
+      </p:pic>
+      <p:pic>
+        <p:nvPicPr>
+          <p:cNvPr id="53" name="Graphic 52" descr="Hierarchy outline">
+            <a:extLst>
+              <a:ext uri="{FF2B5EF4-FFF2-40B4-BE49-F238E27FC236}">
+                <a16:creationId xmlns:a16="http://schemas.microsoft.com/office/drawing/2014/main" id="{4B7FD792-AC35-D53F-D1A5-E0845F6DC2FC}"/>
+              </a:ext>
+            </a:extLst>
+          </p:cNvPr>
+          <p:cNvPicPr>
+            <a:picLocks noChangeAspect="1"/>
+          </p:cNvPicPr>
+          <p:nvPr/>
+        </p:nvPicPr>
+        <p:blipFill>
+          <a:blip>
+            <a:extLst>
+              <a:ext uri="{96DAC541-7B7A-43D3-8B79-37D633B846F1}">
+                <asvg:svgBlip xmlns:asvg="http://schemas.microsoft.com/office/drawing/2016/SVG/main" r:embed="rId11"/>
+              </a:ext>
+            </a:extLst>
+          </a:blip>
+          <a:stretch>
+            <a:fillRect/>
+          </a:stretch>
+        </p:blipFill>
+        <p:spPr>
+          <a:xfrm>
+            <a:off x="3232142" y="5531803"/>
+            <a:ext cx="914400" cy="914400"/>
+          </a:xfrm>
+          <a:prstGeom prst="rect">
+            <a:avLst/>
+          </a:prstGeom>
+        </p:spPr>
+      </p:pic>
+      <p:pic>
+        <p:nvPicPr>
+          <p:cNvPr id="55" name="Graphic 54" descr="Upward trend outline">
+            <a:extLst>
+              <a:ext uri="{FF2B5EF4-FFF2-40B4-BE49-F238E27FC236}">
+                <a16:creationId xmlns:a16="http://schemas.microsoft.com/office/drawing/2014/main" id="{2A8DDF75-7A9D-F0CE-0A36-421A4E64C1CE}"/>
+              </a:ext>
+            </a:extLst>
+          </p:cNvPr>
+          <p:cNvPicPr>
+            <a:picLocks noChangeAspect="1"/>
+          </p:cNvPicPr>
+          <p:nvPr/>
+        </p:nvPicPr>
+        <p:blipFill>
+          <a:blip>
+            <a:extLst>
+              <a:ext uri="{96DAC541-7B7A-43D3-8B79-37D633B846F1}">
+                <asvg:svgBlip xmlns:asvg="http://schemas.microsoft.com/office/drawing/2016/SVG/main" r:embed="rId12"/>
+              </a:ext>
+            </a:extLst>
+          </a:blip>
+          <a:stretch>
+            <a:fillRect/>
+          </a:stretch>
+        </p:blipFill>
+        <p:spPr>
+          <a:xfrm>
+            <a:off x="5638800" y="5075487"/>
+            <a:ext cx="914400" cy="914400"/>
+          </a:xfrm>
+          <a:prstGeom prst="rect">
+            <a:avLst/>
+          </a:prstGeom>
+        </p:spPr>
+      </p:pic>
+      <p:pic>
+        <p:nvPicPr>
+          <p:cNvPr id="59" name="Graphic 58" descr="Office worker female outline">
+            <a:extLst>
+              <a:ext uri="{FF2B5EF4-FFF2-40B4-BE49-F238E27FC236}">
+                <a16:creationId xmlns:a16="http://schemas.microsoft.com/office/drawing/2014/main" id="{E6DBE0BD-218F-0999-4E32-0FAE8E505A50}"/>
+              </a:ext>
+            </a:extLst>
+          </p:cNvPr>
+          <p:cNvPicPr>
+            <a:picLocks noChangeAspect="1"/>
+          </p:cNvPicPr>
+          <p:nvPr/>
+        </p:nvPicPr>
+        <p:blipFill>
+          <a:blip>
+            <a:extLst>
+              <a:ext uri="{96DAC541-7B7A-43D3-8B79-37D633B846F1}">
+                <asvg:svgBlip xmlns:asvg="http://schemas.microsoft.com/office/drawing/2016/SVG/main" r:embed="rId13"/>
+              </a:ext>
+            </a:extLst>
+          </a:blip>
+          <a:stretch>
+            <a:fillRect/>
+          </a:stretch>
+        </p:blipFill>
+        <p:spPr>
+          <a:xfrm>
+            <a:off x="8055160" y="2402488"/>
+            <a:ext cx="914400" cy="914400"/>
+          </a:xfrm>
+          <a:prstGeom prst="rect">
+            <a:avLst/>
+          </a:prstGeom>
+        </p:spPr>
+      </p:pic>
+      <p:pic>
+        <p:nvPicPr>
+          <p:cNvPr id="61" name="Graphic 60" descr="Office worker male outline">
+            <a:extLst>
+              <a:ext uri="{FF2B5EF4-FFF2-40B4-BE49-F238E27FC236}">
+                <a16:creationId xmlns:a16="http://schemas.microsoft.com/office/drawing/2014/main" id="{CF2C3399-2123-9D89-8394-24C29FB3031E}"/>
+              </a:ext>
+            </a:extLst>
+          </p:cNvPr>
+          <p:cNvPicPr>
+            <a:picLocks noChangeAspect="1"/>
+          </p:cNvPicPr>
+          <p:nvPr/>
+        </p:nvPicPr>
+        <p:blipFill>
+          <a:blip>
+            <a:extLst>
+              <a:ext uri="{96DAC541-7B7A-43D3-8B79-37D633B846F1}">
+                <asvg:svgBlip xmlns:asvg="http://schemas.microsoft.com/office/drawing/2016/SVG/main" r:embed="rId14"/>
+              </a:ext>
+            </a:extLst>
+          </a:blip>
+          <a:stretch>
+            <a:fillRect/>
+          </a:stretch>
+        </p:blipFill>
+        <p:spPr>
+          <a:xfrm>
+            <a:off x="8980158" y="2528978"/>
+            <a:ext cx="914400" cy="914400"/>
+          </a:xfrm>
+          <a:prstGeom prst="rect">
+            <a:avLst/>
+          </a:prstGeom>
+        </p:spPr>
+      </p:pic>
+      <p:pic>
+        <p:nvPicPr>
+          <p:cNvPr id="65" name="Graphic 64" descr="Medical outline">
+            <a:extLst>
+              <a:ext uri="{FF2B5EF4-FFF2-40B4-BE49-F238E27FC236}">
+                <a16:creationId xmlns:a16="http://schemas.microsoft.com/office/drawing/2014/main" id="{3F13009F-07B0-B4A4-58BE-6FC90C6702ED}"/>
+              </a:ext>
+            </a:extLst>
+          </p:cNvPr>
+          <p:cNvPicPr>
+            <a:picLocks noChangeAspect="1"/>
+          </p:cNvPicPr>
+          <p:nvPr/>
+        </p:nvPicPr>
+        <p:blipFill>
+          <a:blip>
+            <a:extLst>
+              <a:ext uri="{96DAC541-7B7A-43D3-8B79-37D633B846F1}">
+                <asvg:svgBlip xmlns:asvg="http://schemas.microsoft.com/office/drawing/2016/SVG/main" r:embed="rId15"/>
+              </a:ext>
+            </a:extLst>
+          </a:blip>
+          <a:stretch>
+            <a:fillRect/>
+          </a:stretch>
+        </p:blipFill>
+        <p:spPr>
+          <a:xfrm>
+            <a:off x="8033379" y="5222809"/>
+            <a:ext cx="914400" cy="914400"/>
+          </a:xfrm>
+          <a:prstGeom prst="rect">
+            <a:avLst/>
+          </a:prstGeom>
+        </p:spPr>
+      </p:pic>
+      <p:pic>
+        <p:nvPicPr>
+          <p:cNvPr id="67" name="Graphic 66" descr="Stethoscope outline">
+            <a:extLst>
+              <a:ext uri="{FF2B5EF4-FFF2-40B4-BE49-F238E27FC236}">
+                <a16:creationId xmlns:a16="http://schemas.microsoft.com/office/drawing/2014/main" id="{64593343-9EA8-471D-1020-A6D5FDBF66D9}"/>
+              </a:ext>
+            </a:extLst>
+          </p:cNvPr>
+          <p:cNvPicPr>
+            <a:picLocks noChangeAspect="1"/>
+          </p:cNvPicPr>
+          <p:nvPr/>
+        </p:nvPicPr>
+        <p:blipFill>
+          <a:blip>
+            <a:extLst>
+              <a:ext uri="{96DAC541-7B7A-43D3-8B79-37D633B846F1}">
+                <asvg:svgBlip xmlns:asvg="http://schemas.microsoft.com/office/drawing/2016/SVG/main" r:embed="rId16"/>
+              </a:ext>
+            </a:extLst>
+          </a:blip>
+          <a:stretch>
+            <a:fillRect/>
+          </a:stretch>
+        </p:blipFill>
+        <p:spPr>
+          <a:xfrm>
+            <a:off x="9267488" y="5222809"/>
+            <a:ext cx="914400" cy="914400"/>
+          </a:xfrm>
+          <a:prstGeom prst="rect">
+            <a:avLst/>
+          </a:prstGeom>
+        </p:spPr>
+      </p:pic>
+      <p:pic>
+        <p:nvPicPr>
+          <p:cNvPr id="69" name="Graphic 68" descr="Clipboard Checked outline">
+            <a:extLst>
+              <a:ext uri="{FF2B5EF4-FFF2-40B4-BE49-F238E27FC236}">
+                <a16:creationId xmlns:a16="http://schemas.microsoft.com/office/drawing/2014/main" id="{68CD3164-0AD3-1A01-46AE-01EEB305DA78}"/>
+              </a:ext>
+            </a:extLst>
+          </p:cNvPr>
+          <p:cNvPicPr>
+            <a:picLocks noChangeAspect="1"/>
+          </p:cNvPicPr>
+          <p:nvPr/>
+        </p:nvPicPr>
+        <p:blipFill>
+          <a:blip>
+            <a:extLst>
+              <a:ext uri="{96DAC541-7B7A-43D3-8B79-37D633B846F1}">
+                <asvg:svgBlip xmlns:asvg="http://schemas.microsoft.com/office/drawing/2016/SVG/main" r:embed="rId17"/>
+              </a:ext>
+            </a:extLst>
+          </a:blip>
+          <a:stretch>
+            <a:fillRect/>
+          </a:stretch>
+        </p:blipFill>
+        <p:spPr>
+          <a:xfrm>
+            <a:off x="10288570" y="949706"/>
+            <a:ext cx="914400" cy="914400"/>
+          </a:xfrm>
+          <a:prstGeom prst="rect">
+            <a:avLst/>
+          </a:prstGeom>
+        </p:spPr>
+      </p:pic>
+      <p:pic>
+        <p:nvPicPr>
+          <p:cNvPr id="71" name="Graphic 70" descr="Handshake outline">
+            <a:extLst>
+              <a:ext uri="{FF2B5EF4-FFF2-40B4-BE49-F238E27FC236}">
+                <a16:creationId xmlns:a16="http://schemas.microsoft.com/office/drawing/2014/main" id="{D13D95FE-039A-E0B9-A748-C09E8EE2C18D}"/>
+              </a:ext>
+            </a:extLst>
+          </p:cNvPr>
+          <p:cNvPicPr>
+            <a:picLocks noChangeAspect="1"/>
+          </p:cNvPicPr>
+          <p:nvPr/>
+        </p:nvPicPr>
+        <p:blipFill>
+          <a:blip>
+            <a:extLst>
+              <a:ext uri="{96DAC541-7B7A-43D3-8B79-37D633B846F1}">
+                <asvg:svgBlip xmlns:asvg="http://schemas.microsoft.com/office/drawing/2016/SVG/main" r:embed="rId18"/>
+              </a:ext>
+            </a:extLst>
+          </a:blip>
+          <a:stretch>
+            <a:fillRect/>
+          </a:stretch>
+        </p:blipFill>
+        <p:spPr>
+          <a:xfrm>
+            <a:off x="10606082" y="4561749"/>
+            <a:ext cx="914400" cy="914400"/>
+          </a:xfrm>
+          <a:prstGeom prst="rect">
+            <a:avLst/>
+          </a:prstGeom>
+        </p:spPr>
+      </p:pic>
+      <p:pic>
+        <p:nvPicPr>
+          <p:cNvPr id="73" name="Graphic 72" descr="Monthly calendar outline">
+            <a:extLst>
+              <a:ext uri="{FF2B5EF4-FFF2-40B4-BE49-F238E27FC236}">
+                <a16:creationId xmlns:a16="http://schemas.microsoft.com/office/drawing/2014/main" id="{662344A3-E292-490A-550A-C8CF827CB036}"/>
+              </a:ext>
+            </a:extLst>
+          </p:cNvPr>
+          <p:cNvPicPr>
+            <a:picLocks noChangeAspect="1"/>
+          </p:cNvPicPr>
+          <p:nvPr/>
+        </p:nvPicPr>
+        <p:blipFill>
+          <a:blip>
+            <a:extLst>
+              <a:ext uri="{96DAC541-7B7A-43D3-8B79-37D633B846F1}">
+                <asvg:svgBlip xmlns:asvg="http://schemas.microsoft.com/office/drawing/2016/SVG/main" r:embed="rId19"/>
+              </a:ext>
+            </a:extLst>
+          </a:blip>
+          <a:stretch>
+            <a:fillRect/>
+          </a:stretch>
+        </p:blipFill>
+        <p:spPr>
+          <a:xfrm>
+            <a:off x="11012304" y="5836200"/>
+            <a:ext cx="914400" cy="914400"/>
+          </a:xfrm>
+          <a:prstGeom prst="rect">
+            <a:avLst/>
+          </a:prstGeom>
+        </p:spPr>
+      </p:pic>
+      <p:pic>
+        <p:nvPicPr>
+          <p:cNvPr id="75" name="Graphic 74" descr="Unlock outline">
+            <a:extLst>
+              <a:ext uri="{FF2B5EF4-FFF2-40B4-BE49-F238E27FC236}">
+                <a16:creationId xmlns:a16="http://schemas.microsoft.com/office/drawing/2014/main" id="{468485E0-3E41-21AE-7402-01D70A34CAF0}"/>
+              </a:ext>
+            </a:extLst>
+          </p:cNvPr>
+          <p:cNvPicPr>
+            <a:picLocks noChangeAspect="1"/>
+          </p:cNvPicPr>
+          <p:nvPr/>
+        </p:nvPicPr>
+        <p:blipFill>
+          <a:blip>
+            <a:extLst>
+              <a:ext uri="{96DAC541-7B7A-43D3-8B79-37D633B846F1}">
+                <asvg:svgBlip xmlns:asvg="http://schemas.microsoft.com/office/drawing/2016/SVG/main" r:embed="rId20"/>
+              </a:ext>
+            </a:extLst>
+          </a:blip>
+          <a:stretch>
+            <a:fillRect/>
+          </a:stretch>
+        </p:blipFill>
+        <p:spPr>
+          <a:xfrm>
+            <a:off x="4528410" y="3647349"/>
+            <a:ext cx="914400" cy="914400"/>
+          </a:xfrm>
+          <a:prstGeom prst="rect">
+            <a:avLst/>
+          </a:prstGeom>
+        </p:spPr>
+      </p:pic>
+      <p:pic>
+        <p:nvPicPr>
+          <p:cNvPr id="77" name="Graphic 76" descr="Lock outline">
+            <a:extLst>
+              <a:ext uri="{FF2B5EF4-FFF2-40B4-BE49-F238E27FC236}">
+                <a16:creationId xmlns:a16="http://schemas.microsoft.com/office/drawing/2014/main" id="{10871F3B-2629-C43B-68B6-9CAFC5CE6CFA}"/>
+              </a:ext>
+            </a:extLst>
+          </p:cNvPr>
+          <p:cNvPicPr>
+            <a:picLocks noChangeAspect="1"/>
+          </p:cNvPicPr>
+          <p:nvPr/>
+        </p:nvPicPr>
+        <p:blipFill>
+          <a:blip>
+            <a:extLst>
+              <a:ext uri="{96DAC541-7B7A-43D3-8B79-37D633B846F1}">
+                <asvg:svgBlip xmlns:asvg="http://schemas.microsoft.com/office/drawing/2016/SVG/main" r:embed="rId21"/>
+              </a:ext>
+            </a:extLst>
+          </a:blip>
+          <a:stretch>
+            <a:fillRect/>
+          </a:stretch>
+        </p:blipFill>
+        <p:spPr>
+          <a:xfrm>
+            <a:off x="6977394" y="3886200"/>
+            <a:ext cx="914400" cy="914400"/>
+          </a:xfrm>
+          <a:prstGeom prst="rect">
+            <a:avLst/>
+          </a:prstGeom>
+        </p:spPr>
+      </p:pic>
+    </p:spTree>
+    <p:extLst>
+      <p:ext uri="{BB962C8B-B14F-4D97-AF65-F5344CB8AC3E}">
+        <p14:creationId xmlns:p14="http://schemas.microsoft.com/office/powerpoint/2010/main" val="2683265105"/>
+      </p:ext>
+    </p:extLst>
+  </p:cSld>
+  <p:clrMapOvr>
+    <a:masterClrMapping/>
+  </p:clrMapOvr>
+</p:sld>
+</file>
+
+<file path=ppt/slides/slide5.xml><?xml version="1.0" encoding="utf-8"?>
+<p:sld xmlns:a="http://schemas.openxmlformats.org/drawingml/2006/main" xmlns:r="http://schemas.openxmlformats.org/officeDocument/2006/relationships" xmlns:p="http://schemas.openxmlformats.org/presentationml/2006/main">
+  <p:cSld>
+    <p:spTree>
+      <p:nvGrpSpPr>
+        <p:cNvPr id="1" name=""/>
+        <p:cNvGrpSpPr/>
+        <p:nvPr/>
+      </p:nvGrpSpPr>
+      <p:grpSpPr>
+        <a:xfrm>
+          <a:off x="0" y="0"/>
+          <a:ext cx="0" cy="0"/>
+          <a:chOff x="0" y="0"/>
+          <a:chExt cx="0" cy="0"/>
+        </a:xfrm>
+      </p:grpSpPr>
+      <p:pic>
+        <p:nvPicPr>
+          <p:cNvPr id="21" name="Graphic 20">
+            <a:extLst>
+              <a:ext uri="{FF2B5EF4-FFF2-40B4-BE49-F238E27FC236}">
+                <a16:creationId xmlns:a16="http://schemas.microsoft.com/office/drawing/2014/main" id="{231CCD0D-C8D9-9647-5BA4-1BA74972F3BB}"/>
+              </a:ext>
+            </a:extLst>
+          </p:cNvPr>
+          <p:cNvPicPr>
+            <a:picLocks noChangeAspect="1"/>
+          </p:cNvPicPr>
+          <p:nvPr/>
+        </p:nvPicPr>
+        <p:blipFill>
+          <a:blip>
+            <a:extLst>
+              <a:ext uri="{96DAC541-7B7A-43D3-8B79-37D633B846F1}">
+                <asvg:svgBlip xmlns:asvg="http://schemas.microsoft.com/office/drawing/2016/SVG/main" r:embed="rId2"/>
+              </a:ext>
+            </a:extLst>
+          </a:blip>
+          <a:stretch>
+            <a:fillRect/>
+          </a:stretch>
+        </p:blipFill>
+        <p:spPr>
+          <a:xfrm>
+            <a:off x="-102245" y="0"/>
+            <a:ext cx="7535732" cy="6858000"/>
+          </a:xfrm>
+          <a:prstGeom prst="rect">
+            <a:avLst/>
+          </a:prstGeom>
+        </p:spPr>
+      </p:pic>
+      <p:pic>
+        <p:nvPicPr>
+          <p:cNvPr id="23" name="Graphic 22">
+            <a:extLst>
+              <a:ext uri="{FF2B5EF4-FFF2-40B4-BE49-F238E27FC236}">
+                <a16:creationId xmlns:a16="http://schemas.microsoft.com/office/drawing/2014/main" id="{C0601813-09BB-43EE-B72C-DEC8D1E1FEC6}"/>
+              </a:ext>
+            </a:extLst>
+          </p:cNvPr>
+          <p:cNvPicPr>
+            <a:picLocks noChangeAspect="1"/>
+          </p:cNvPicPr>
+          <p:nvPr/>
+        </p:nvPicPr>
+        <p:blipFill>
+          <a:blip>
+            <a:extLst>
+              <a:ext uri="{96DAC541-7B7A-43D3-8B79-37D633B846F1}">
+                <asvg:svgBlip xmlns:asvg="http://schemas.microsoft.com/office/drawing/2016/SVG/main" r:embed="rId3"/>
+              </a:ext>
+            </a:extLst>
+          </a:blip>
+          <a:stretch>
+            <a:fillRect/>
+          </a:stretch>
+        </p:blipFill>
+        <p:spPr>
+          <a:xfrm>
+            <a:off x="4656268" y="0"/>
+            <a:ext cx="7535732" cy="6858000"/>
+          </a:xfrm>
+          <a:prstGeom prst="rect">
+            <a:avLst/>
+          </a:prstGeom>
+        </p:spPr>
+      </p:pic>
+    </p:spTree>
+    <p:extLst>
+      <p:ext uri="{BB962C8B-B14F-4D97-AF65-F5344CB8AC3E}">
+        <p14:creationId xmlns:p14="http://schemas.microsoft.com/office/powerpoint/2010/main" val="1906776293"/>
+      </p:ext>
+    </p:extLst>
+  </p:cSld>
+  <p:clrMapOvr>
+    <a:masterClrMapping/>
+  </p:clrMapOvr>
+</p:sld>
+</file>
+
+<file path=ppt/slides/slide6.xml><?xml version="1.0" encoding="utf-8"?>
 <p:sld xmlns:a="http://schemas.openxmlformats.org/drawingml/2006/main" xmlns:r="http://schemas.openxmlformats.org/officeDocument/2006/relationships" xmlns:p="http://schemas.openxmlformats.org/presentationml/2006/main">
   <p:cSld>
     <p:spTree>
@@ -21537,7 +23971,7 @@
 </p:sld>
 </file>
 
-<file path=ppt/slides/slide5.xml><?xml version="1.0" encoding="utf-8"?>
+<file path=ppt/slides/slide7.xml><?xml version="1.0" encoding="utf-8"?>
 <p:sld xmlns:a="http://schemas.openxmlformats.org/drawingml/2006/main" xmlns:r="http://schemas.openxmlformats.org/officeDocument/2006/relationships" xmlns:p="http://schemas.openxmlformats.org/presentationml/2006/main">
   <p:cSld>
     <p:spTree>
@@ -21926,7 +24360,7 @@
 </p:sld>
 </file>
 
-<file path=ppt/slides/slide6.xml><?xml version="1.0" encoding="utf-8"?>
+<file path=ppt/slides/slide8.xml><?xml version="1.0" encoding="utf-8"?>
 <p:sld xmlns:a="http://schemas.openxmlformats.org/drawingml/2006/main" xmlns:r="http://schemas.openxmlformats.org/officeDocument/2006/relationships" xmlns:p="http://schemas.openxmlformats.org/presentationml/2006/main">
   <p:cSld>
     <p:spTree>
@@ -22225,7 +24659,7 @@
 </p:sld>
 </file>
 
-<file path=ppt/slides/slide7.xml><?xml version="1.0" encoding="utf-8"?>
+<file path=ppt/slides/slide9.xml><?xml version="1.0" encoding="utf-8"?>
 <p:sld xmlns:a="http://schemas.openxmlformats.org/drawingml/2006/main" xmlns:r="http://schemas.openxmlformats.org/officeDocument/2006/relationships" xmlns:p="http://schemas.openxmlformats.org/presentationml/2006/main">
   <p:cSld>
     <p:spTree>
@@ -22506,598 +24940,6 @@
     <p:extLst>
       <p:ext uri="{BB962C8B-B14F-4D97-AF65-F5344CB8AC3E}">
         <p14:creationId xmlns:p14="http://schemas.microsoft.com/office/powerpoint/2010/main" val="1894579975"/>
-      </p:ext>
-    </p:extLst>
-  </p:cSld>
-  <p:clrMapOvr>
-    <a:masterClrMapping/>
-  </p:clrMapOvr>
-</p:sld>
-</file>
-
-<file path=ppt/slides/slide8.xml><?xml version="1.0" encoding="utf-8"?>
-<p:sld xmlns:a="http://schemas.openxmlformats.org/drawingml/2006/main" xmlns:r="http://schemas.openxmlformats.org/officeDocument/2006/relationships" xmlns:p="http://schemas.openxmlformats.org/presentationml/2006/main">
-  <p:cSld>
-    <p:spTree>
-      <p:nvGrpSpPr>
-        <p:cNvPr id="1" name="">
-          <a:extLst>
-            <a:ext uri="{FF2B5EF4-FFF2-40B4-BE49-F238E27FC236}">
-              <a16:creationId xmlns:a16="http://schemas.microsoft.com/office/drawing/2014/main" id="{5B36EA00-395F-4F04-189F-D4DFD2699091}"/>
-            </a:ext>
-          </a:extLst>
-        </p:cNvPr>
-        <p:cNvGrpSpPr/>
-        <p:nvPr/>
-      </p:nvGrpSpPr>
-      <p:grpSpPr>
-        <a:xfrm>
-          <a:off x="0" y="0"/>
-          <a:ext cx="0" cy="0"/>
-          <a:chOff x="0" y="0"/>
-          <a:chExt cx="0" cy="0"/>
-        </a:xfrm>
-      </p:grpSpPr>
-      <p:grpSp>
-        <p:nvGrpSpPr>
-          <p:cNvPr id="3" name="Group 2">
-            <a:extLst>
-              <a:ext uri="{FF2B5EF4-FFF2-40B4-BE49-F238E27FC236}">
-                <a16:creationId xmlns:a16="http://schemas.microsoft.com/office/drawing/2014/main" id="{154373E5-8028-72A9-9F42-FEABA5A247A7}"/>
-              </a:ext>
-            </a:extLst>
-          </p:cNvPr>
-          <p:cNvGrpSpPr/>
-          <p:nvPr/>
-        </p:nvGrpSpPr>
-        <p:grpSpPr>
-          <a:xfrm>
-            <a:off x="3003618" y="72185"/>
-            <a:ext cx="7229139" cy="6709406"/>
-            <a:chOff x="3003618" y="72185"/>
-            <a:chExt cx="7229139" cy="6709406"/>
-          </a:xfrm>
-        </p:grpSpPr>
-        <p:sp>
-          <p:nvSpPr>
-            <p:cNvPr id="2" name="Freeform: Shape 1">
-              <a:extLst>
-                <a:ext uri="{FF2B5EF4-FFF2-40B4-BE49-F238E27FC236}">
-                  <a16:creationId xmlns:a16="http://schemas.microsoft.com/office/drawing/2014/main" id="{86178146-9F13-C930-0D6C-0906244F2958}"/>
-                </a:ext>
-              </a:extLst>
-            </p:cNvPr>
-            <p:cNvSpPr/>
-            <p:nvPr/>
-          </p:nvSpPr>
-          <p:spPr>
-            <a:xfrm>
-              <a:off x="3003618" y="552917"/>
-              <a:ext cx="7229138" cy="6228674"/>
-            </a:xfrm>
-            <a:custGeom>
-              <a:avLst/>
-              <a:gdLst>
-                <a:gd name="csX0" fmla="*/ -1 w 7229138"/>
-                <a:gd name="csY0" fmla="*/ 3114376 h 6228674"/>
-                <a:gd name="csX1" fmla="*/ 3614568 w 7229138"/>
-                <a:gd name="csY1" fmla="*/ 40 h 6228674"/>
-                <a:gd name="csX2" fmla="*/ 7229137 w 7229138"/>
-                <a:gd name="csY2" fmla="*/ 3114376 h 6228674"/>
-                <a:gd name="csX3" fmla="*/ 3614568 w 7229138"/>
-                <a:gd name="csY3" fmla="*/ 6228715 h 6228674"/>
-                <a:gd name="csX4" fmla="*/ -1 w 7229138"/>
-                <a:gd name="csY4" fmla="*/ 3114376 h 6228674"/>
-              </a:gdLst>
-              <a:ahLst/>
-              <a:cxnLst>
-                <a:cxn ang="0">
-                  <a:pos x="csX0" y="csY0"/>
-                </a:cxn>
-                <a:cxn ang="0">
-                  <a:pos x="csX1" y="csY1"/>
-                </a:cxn>
-                <a:cxn ang="0">
-                  <a:pos x="csX2" y="csY2"/>
-                </a:cxn>
-                <a:cxn ang="0">
-                  <a:pos x="csX3" y="csY3"/>
-                </a:cxn>
-                <a:cxn ang="0">
-                  <a:pos x="csX4" y="csY4"/>
-                </a:cxn>
-              </a:cxnLst>
-              <a:rect l="l" t="t" r="r" b="b"/>
-              <a:pathLst>
-                <a:path w="7229138" h="6228674">
-                  <a:moveTo>
-                    <a:pt x="-1" y="3114376"/>
-                  </a:moveTo>
-                  <a:cubicBezTo>
-                    <a:pt x="-1" y="1394373"/>
-                    <a:pt x="1618301" y="40"/>
-                    <a:pt x="3614568" y="40"/>
-                  </a:cubicBezTo>
-                  <a:cubicBezTo>
-                    <a:pt x="5610843" y="40"/>
-                    <a:pt x="7229137" y="1394373"/>
-                    <a:pt x="7229137" y="3114376"/>
-                  </a:cubicBezTo>
-                  <a:cubicBezTo>
-                    <a:pt x="7229137" y="4834378"/>
-                    <a:pt x="5610843" y="6228715"/>
-                    <a:pt x="3614568" y="6228715"/>
-                  </a:cubicBezTo>
-                  <a:cubicBezTo>
-                    <a:pt x="1618301" y="6228715"/>
-                    <a:pt x="-1" y="4834378"/>
-                    <a:pt x="-1" y="3114376"/>
-                  </a:cubicBezTo>
-                  <a:close/>
-                </a:path>
-              </a:pathLst>
-            </a:custGeom>
-            <a:solidFill>
-              <a:srgbClr val="4472C4">
-                <a:alpha val="15000"/>
-              </a:srgbClr>
-            </a:solidFill>
-            <a:ln w="8067" cap="flat">
-              <a:noFill/>
-              <a:prstDash val="solid"/>
-              <a:miter/>
-            </a:ln>
-          </p:spPr>
-          <p:txBody>
-            <a:bodyPr/>
-            <a:lstStyle/>
-            <a:p>
-              <a:endParaRPr lang="en-US"/>
-            </a:p>
-          </p:txBody>
-        </p:sp>
-        <p:sp>
-          <p:nvSpPr>
-            <p:cNvPr id="9" name="Freeform: Shape 8">
-              <a:extLst>
-                <a:ext uri="{FF2B5EF4-FFF2-40B4-BE49-F238E27FC236}">
-                  <a16:creationId xmlns:a16="http://schemas.microsoft.com/office/drawing/2014/main" id="{E8D2A8E2-C8DB-4C1D-D5C1-19E1AC8B81BD}"/>
-                </a:ext>
-              </a:extLst>
-            </p:cNvPr>
-            <p:cNvSpPr/>
-            <p:nvPr/>
-          </p:nvSpPr>
-          <p:spPr>
-            <a:xfrm>
-              <a:off x="3003618" y="72185"/>
-              <a:ext cx="7229139" cy="6228677"/>
-            </a:xfrm>
-            <a:custGeom>
-              <a:avLst/>
-              <a:gdLst>
-                <a:gd name="csX0" fmla="*/ -1371 w 7229139"/>
-                <a:gd name="csY0" fmla="*/ 3112940 h 6228677"/>
-                <a:gd name="csX1" fmla="*/ 3613199 w 7229139"/>
-                <a:gd name="csY1" fmla="*/ -1399 h 6228677"/>
-                <a:gd name="csX2" fmla="*/ 7227768 w 7229139"/>
-                <a:gd name="csY2" fmla="*/ 3112940 h 6228677"/>
-                <a:gd name="csX3" fmla="*/ 3613199 w 7229139"/>
-                <a:gd name="csY3" fmla="*/ 6227279 h 6228677"/>
-                <a:gd name="csX4" fmla="*/ -1371 w 7229139"/>
-                <a:gd name="csY4" fmla="*/ 3112940 h 6228677"/>
-              </a:gdLst>
-              <a:ahLst/>
-              <a:cxnLst>
-                <a:cxn ang="0">
-                  <a:pos x="csX0" y="csY0"/>
-                </a:cxn>
-                <a:cxn ang="0">
-                  <a:pos x="csX1" y="csY1"/>
-                </a:cxn>
-                <a:cxn ang="0">
-                  <a:pos x="csX2" y="csY2"/>
-                </a:cxn>
-                <a:cxn ang="0">
-                  <a:pos x="csX3" y="csY3"/>
-                </a:cxn>
-                <a:cxn ang="0">
-                  <a:pos x="csX4" y="csY4"/>
-                </a:cxn>
-              </a:cxnLst>
-              <a:rect l="l" t="t" r="r" b="b"/>
-              <a:pathLst>
-                <a:path w="7229139" h="6228677">
-                  <a:moveTo>
-                    <a:pt x="-1371" y="3112940"/>
-                  </a:moveTo>
-                  <a:cubicBezTo>
-                    <a:pt x="-1371" y="1392953"/>
-                    <a:pt x="1616955" y="-1399"/>
-                    <a:pt x="3613199" y="-1399"/>
-                  </a:cubicBezTo>
-                  <a:cubicBezTo>
-                    <a:pt x="5609441" y="-1399"/>
-                    <a:pt x="7227768" y="1392953"/>
-                    <a:pt x="7227768" y="3112940"/>
-                  </a:cubicBezTo>
-                  <a:cubicBezTo>
-                    <a:pt x="7227768" y="4832927"/>
-                    <a:pt x="5609441" y="6227279"/>
-                    <a:pt x="3613199" y="6227279"/>
-                  </a:cubicBezTo>
-                  <a:cubicBezTo>
-                    <a:pt x="1616955" y="6227279"/>
-                    <a:pt x="-1371" y="4832927"/>
-                    <a:pt x="-1371" y="3112940"/>
-                  </a:cubicBezTo>
-                  <a:close/>
-                </a:path>
-              </a:pathLst>
-            </a:custGeom>
-            <a:solidFill>
-              <a:srgbClr val="4472C4">
-                <a:alpha val="15000"/>
-              </a:srgbClr>
-            </a:solidFill>
-            <a:ln w="8067" cap="flat">
-              <a:noFill/>
-              <a:prstDash val="solid"/>
-              <a:miter/>
-            </a:ln>
-          </p:spPr>
-          <p:txBody>
-            <a:bodyPr/>
-            <a:lstStyle/>
-            <a:p>
-              <a:endParaRPr lang="en-US"/>
-            </a:p>
-          </p:txBody>
-        </p:sp>
-        <p:pic>
-          <p:nvPicPr>
-            <p:cNvPr id="13" name="Graphic 12" descr="Box trolley outline">
-              <a:extLst>
-                <a:ext uri="{FF2B5EF4-FFF2-40B4-BE49-F238E27FC236}">
-                  <a16:creationId xmlns:a16="http://schemas.microsoft.com/office/drawing/2014/main" id="{7275BC7D-87F6-AB21-BA6B-E5CE9EE95F81}"/>
-                </a:ext>
-              </a:extLst>
-            </p:cNvPr>
-            <p:cNvPicPr>
-              <a:picLocks noChangeAspect="1"/>
-            </p:cNvPicPr>
-            <p:nvPr/>
-          </p:nvPicPr>
-          <p:blipFill>
-            <a:blip>
-              <a:extLst>
-                <a:ext uri="{96DAC541-7B7A-43D3-8B79-37D633B846F1}">
-                  <asvg:svgBlip xmlns:asvg="http://schemas.microsoft.com/office/drawing/2016/SVG/main" r:embed="rId2"/>
-                </a:ext>
-              </a:extLst>
-            </a:blip>
-            <a:stretch>
-              <a:fillRect/>
-            </a:stretch>
-          </p:blipFill>
-          <p:spPr>
-            <a:xfrm>
-              <a:off x="4103587" y="914400"/>
-              <a:ext cx="5029200" cy="5029200"/>
-            </a:xfrm>
-            <a:prstGeom prst="rect">
-              <a:avLst/>
-            </a:prstGeom>
-            <a:effectLst>
-              <a:outerShdw blurRad="50800" dist="127000" dir="2700000" algn="tl" rotWithShape="0">
-                <a:schemeClr val="accent1">
-                  <a:alpha val="40000"/>
-                </a:schemeClr>
-              </a:outerShdw>
-            </a:effectLst>
-          </p:spPr>
-        </p:pic>
-      </p:grpSp>
-    </p:spTree>
-    <p:extLst>
-      <p:ext uri="{BB962C8B-B14F-4D97-AF65-F5344CB8AC3E}">
-        <p14:creationId xmlns:p14="http://schemas.microsoft.com/office/powerpoint/2010/main" val="2230716222"/>
-      </p:ext>
-    </p:extLst>
-  </p:cSld>
-  <p:clrMapOvr>
-    <a:masterClrMapping/>
-  </p:clrMapOvr>
-</p:sld>
-</file>
-
-<file path=ppt/slides/slide9.xml><?xml version="1.0" encoding="utf-8"?>
-<p:sld xmlns:a="http://schemas.openxmlformats.org/drawingml/2006/main" xmlns:r="http://schemas.openxmlformats.org/officeDocument/2006/relationships" xmlns:p="http://schemas.openxmlformats.org/presentationml/2006/main">
-  <p:cSld>
-    <p:spTree>
-      <p:nvGrpSpPr>
-        <p:cNvPr id="1" name="">
-          <a:extLst>
-            <a:ext uri="{FF2B5EF4-FFF2-40B4-BE49-F238E27FC236}">
-              <a16:creationId xmlns:a16="http://schemas.microsoft.com/office/drawing/2014/main" id="{C28D913F-6FA5-4064-46CB-41445AA4059F}"/>
-            </a:ext>
-          </a:extLst>
-        </p:cNvPr>
-        <p:cNvGrpSpPr/>
-        <p:nvPr/>
-      </p:nvGrpSpPr>
-      <p:grpSpPr>
-        <a:xfrm>
-          <a:off x="0" y="0"/>
-          <a:ext cx="0" cy="0"/>
-          <a:chOff x="0" y="0"/>
-          <a:chExt cx="0" cy="0"/>
-        </a:xfrm>
-      </p:grpSpPr>
-      <p:grpSp>
-        <p:nvGrpSpPr>
-          <p:cNvPr id="3" name="Group 2">
-            <a:extLst>
-              <a:ext uri="{FF2B5EF4-FFF2-40B4-BE49-F238E27FC236}">
-                <a16:creationId xmlns:a16="http://schemas.microsoft.com/office/drawing/2014/main" id="{36527995-6817-3479-3DFD-73E5C1B25655}"/>
-              </a:ext>
-            </a:extLst>
-          </p:cNvPr>
-          <p:cNvGrpSpPr/>
-          <p:nvPr/>
-        </p:nvGrpSpPr>
-        <p:grpSpPr>
-          <a:xfrm>
-            <a:off x="3003618" y="72185"/>
-            <a:ext cx="7229139" cy="6709406"/>
-            <a:chOff x="3003618" y="72185"/>
-            <a:chExt cx="7229139" cy="6709406"/>
-          </a:xfrm>
-        </p:grpSpPr>
-        <p:sp>
-          <p:nvSpPr>
-            <p:cNvPr id="2" name="Freeform: Shape 1">
-              <a:extLst>
-                <a:ext uri="{FF2B5EF4-FFF2-40B4-BE49-F238E27FC236}">
-                  <a16:creationId xmlns:a16="http://schemas.microsoft.com/office/drawing/2014/main" id="{2059E4C9-AE06-C2EC-EE01-65CAD14BDA93}"/>
-                </a:ext>
-              </a:extLst>
-            </p:cNvPr>
-            <p:cNvSpPr/>
-            <p:nvPr/>
-          </p:nvSpPr>
-          <p:spPr>
-            <a:xfrm>
-              <a:off x="3003618" y="552917"/>
-              <a:ext cx="7229138" cy="6228674"/>
-            </a:xfrm>
-            <a:custGeom>
-              <a:avLst/>
-              <a:gdLst>
-                <a:gd name="csX0" fmla="*/ -1 w 7229138"/>
-                <a:gd name="csY0" fmla="*/ 3114376 h 6228674"/>
-                <a:gd name="csX1" fmla="*/ 3614568 w 7229138"/>
-                <a:gd name="csY1" fmla="*/ 40 h 6228674"/>
-                <a:gd name="csX2" fmla="*/ 7229137 w 7229138"/>
-                <a:gd name="csY2" fmla="*/ 3114376 h 6228674"/>
-                <a:gd name="csX3" fmla="*/ 3614568 w 7229138"/>
-                <a:gd name="csY3" fmla="*/ 6228715 h 6228674"/>
-                <a:gd name="csX4" fmla="*/ -1 w 7229138"/>
-                <a:gd name="csY4" fmla="*/ 3114376 h 6228674"/>
-              </a:gdLst>
-              <a:ahLst/>
-              <a:cxnLst>
-                <a:cxn ang="0">
-                  <a:pos x="csX0" y="csY0"/>
-                </a:cxn>
-                <a:cxn ang="0">
-                  <a:pos x="csX1" y="csY1"/>
-                </a:cxn>
-                <a:cxn ang="0">
-                  <a:pos x="csX2" y="csY2"/>
-                </a:cxn>
-                <a:cxn ang="0">
-                  <a:pos x="csX3" y="csY3"/>
-                </a:cxn>
-                <a:cxn ang="0">
-                  <a:pos x="csX4" y="csY4"/>
-                </a:cxn>
-              </a:cxnLst>
-              <a:rect l="l" t="t" r="r" b="b"/>
-              <a:pathLst>
-                <a:path w="7229138" h="6228674">
-                  <a:moveTo>
-                    <a:pt x="-1" y="3114376"/>
-                  </a:moveTo>
-                  <a:cubicBezTo>
-                    <a:pt x="-1" y="1394373"/>
-                    <a:pt x="1618301" y="40"/>
-                    <a:pt x="3614568" y="40"/>
-                  </a:cubicBezTo>
-                  <a:cubicBezTo>
-                    <a:pt x="5610843" y="40"/>
-                    <a:pt x="7229137" y="1394373"/>
-                    <a:pt x="7229137" y="3114376"/>
-                  </a:cubicBezTo>
-                  <a:cubicBezTo>
-                    <a:pt x="7229137" y="4834378"/>
-                    <a:pt x="5610843" y="6228715"/>
-                    <a:pt x="3614568" y="6228715"/>
-                  </a:cubicBezTo>
-                  <a:cubicBezTo>
-                    <a:pt x="1618301" y="6228715"/>
-                    <a:pt x="-1" y="4834378"/>
-                    <a:pt x="-1" y="3114376"/>
-                  </a:cubicBezTo>
-                  <a:close/>
-                </a:path>
-              </a:pathLst>
-            </a:custGeom>
-            <a:solidFill>
-              <a:srgbClr val="4472C4">
-                <a:alpha val="15000"/>
-              </a:srgbClr>
-            </a:solidFill>
-            <a:ln w="8067" cap="flat">
-              <a:noFill/>
-              <a:prstDash val="solid"/>
-              <a:miter/>
-            </a:ln>
-          </p:spPr>
-          <p:txBody>
-            <a:bodyPr/>
-            <a:lstStyle/>
-            <a:p>
-              <a:endParaRPr lang="en-US"/>
-            </a:p>
-          </p:txBody>
-        </p:sp>
-        <p:sp>
-          <p:nvSpPr>
-            <p:cNvPr id="9" name="Freeform: Shape 8">
-              <a:extLst>
-                <a:ext uri="{FF2B5EF4-FFF2-40B4-BE49-F238E27FC236}">
-                  <a16:creationId xmlns:a16="http://schemas.microsoft.com/office/drawing/2014/main" id="{DF82AC9D-6D4C-795E-455F-E89F2575BEEF}"/>
-                </a:ext>
-              </a:extLst>
-            </p:cNvPr>
-            <p:cNvSpPr/>
-            <p:nvPr/>
-          </p:nvSpPr>
-          <p:spPr>
-            <a:xfrm>
-              <a:off x="3003618" y="72185"/>
-              <a:ext cx="7229139" cy="6228677"/>
-            </a:xfrm>
-            <a:custGeom>
-              <a:avLst/>
-              <a:gdLst>
-                <a:gd name="csX0" fmla="*/ -1371 w 7229139"/>
-                <a:gd name="csY0" fmla="*/ 3112940 h 6228677"/>
-                <a:gd name="csX1" fmla="*/ 3613199 w 7229139"/>
-                <a:gd name="csY1" fmla="*/ -1399 h 6228677"/>
-                <a:gd name="csX2" fmla="*/ 7227768 w 7229139"/>
-                <a:gd name="csY2" fmla="*/ 3112940 h 6228677"/>
-                <a:gd name="csX3" fmla="*/ 3613199 w 7229139"/>
-                <a:gd name="csY3" fmla="*/ 6227279 h 6228677"/>
-                <a:gd name="csX4" fmla="*/ -1371 w 7229139"/>
-                <a:gd name="csY4" fmla="*/ 3112940 h 6228677"/>
-              </a:gdLst>
-              <a:ahLst/>
-              <a:cxnLst>
-                <a:cxn ang="0">
-                  <a:pos x="csX0" y="csY0"/>
-                </a:cxn>
-                <a:cxn ang="0">
-                  <a:pos x="csX1" y="csY1"/>
-                </a:cxn>
-                <a:cxn ang="0">
-                  <a:pos x="csX2" y="csY2"/>
-                </a:cxn>
-                <a:cxn ang="0">
-                  <a:pos x="csX3" y="csY3"/>
-                </a:cxn>
-                <a:cxn ang="0">
-                  <a:pos x="csX4" y="csY4"/>
-                </a:cxn>
-              </a:cxnLst>
-              <a:rect l="l" t="t" r="r" b="b"/>
-              <a:pathLst>
-                <a:path w="7229139" h="6228677">
-                  <a:moveTo>
-                    <a:pt x="-1371" y="3112940"/>
-                  </a:moveTo>
-                  <a:cubicBezTo>
-                    <a:pt x="-1371" y="1392953"/>
-                    <a:pt x="1616955" y="-1399"/>
-                    <a:pt x="3613199" y="-1399"/>
-                  </a:cubicBezTo>
-                  <a:cubicBezTo>
-                    <a:pt x="5609441" y="-1399"/>
-                    <a:pt x="7227768" y="1392953"/>
-                    <a:pt x="7227768" y="3112940"/>
-                  </a:cubicBezTo>
-                  <a:cubicBezTo>
-                    <a:pt x="7227768" y="4832927"/>
-                    <a:pt x="5609441" y="6227279"/>
-                    <a:pt x="3613199" y="6227279"/>
-                  </a:cubicBezTo>
-                  <a:cubicBezTo>
-                    <a:pt x="1616955" y="6227279"/>
-                    <a:pt x="-1371" y="4832927"/>
-                    <a:pt x="-1371" y="3112940"/>
-                  </a:cubicBezTo>
-                  <a:close/>
-                </a:path>
-              </a:pathLst>
-            </a:custGeom>
-            <a:solidFill>
-              <a:srgbClr val="4472C4">
-                <a:alpha val="15000"/>
-              </a:srgbClr>
-            </a:solidFill>
-            <a:ln w="8067" cap="flat">
-              <a:noFill/>
-              <a:prstDash val="solid"/>
-              <a:miter/>
-            </a:ln>
-          </p:spPr>
-          <p:txBody>
-            <a:bodyPr/>
-            <a:lstStyle/>
-            <a:p>
-              <a:endParaRPr lang="en-US"/>
-            </a:p>
-          </p:txBody>
-        </p:sp>
-        <p:pic>
-          <p:nvPicPr>
-            <p:cNvPr id="11" name="Graphic 10" descr="Money outline">
-              <a:extLst>
-                <a:ext uri="{FF2B5EF4-FFF2-40B4-BE49-F238E27FC236}">
-                  <a16:creationId xmlns:a16="http://schemas.microsoft.com/office/drawing/2014/main" id="{A307EB66-7D70-3B84-3775-A8A661264B58}"/>
-                </a:ext>
-              </a:extLst>
-            </p:cNvPr>
-            <p:cNvPicPr>
-              <a:picLocks noChangeAspect="1"/>
-            </p:cNvPicPr>
-            <p:nvPr/>
-          </p:nvPicPr>
-          <p:blipFill>
-            <a:blip>
-              <a:extLst>
-                <a:ext uri="{96DAC541-7B7A-43D3-8B79-37D633B846F1}">
-                  <asvg:svgBlip xmlns:asvg="http://schemas.microsoft.com/office/drawing/2016/SVG/main" r:embed="rId2"/>
-                </a:ext>
-              </a:extLst>
-            </a:blip>
-            <a:stretch>
-              <a:fillRect/>
-            </a:stretch>
-          </p:blipFill>
-          <p:spPr>
-            <a:xfrm>
-              <a:off x="4103587" y="914400"/>
-              <a:ext cx="5029200" cy="5029200"/>
-            </a:xfrm>
-            <a:prstGeom prst="rect">
-              <a:avLst/>
-            </a:prstGeom>
-            <a:effectLst>
-              <a:outerShdw blurRad="50800" dist="127000" dir="2700000" algn="tl" rotWithShape="0">
-                <a:schemeClr val="accent1">
-                  <a:alpha val="40000"/>
-                </a:schemeClr>
-              </a:outerShdw>
-            </a:effectLst>
-          </p:spPr>
-        </p:pic>
-      </p:grpSp>
-    </p:spTree>
-    <p:extLst>
-      <p:ext uri="{BB962C8B-B14F-4D97-AF65-F5344CB8AC3E}">
-        <p14:creationId xmlns:p14="http://schemas.microsoft.com/office/powerpoint/2010/main" val="903167996"/>
       </p:ext>
     </p:extLst>
   </p:cSld>
